--- a/Grammar-Based_Pattern_Recognition_TAE1.pptx
+++ b/Grammar-Based_Pattern_Recognition_TAE1.pptx
@@ -5,16 +5,19 @@
     <p:sldMasterId id="2147483648" r:id="rId1"/>
   </p:sldMasterIdLst>
   <p:notesMasterIdLst>
-    <p:notesMasterId r:id="rId9"/>
+    <p:notesMasterId r:id="rId12"/>
   </p:notesMasterIdLst>
   <p:sldIdLst>
     <p:sldId id="256" r:id="rId2"/>
     <p:sldId id="257" r:id="rId3"/>
     <p:sldId id="258" r:id="rId4"/>
-    <p:sldId id="259" r:id="rId5"/>
-    <p:sldId id="260" r:id="rId6"/>
+    <p:sldId id="260" r:id="rId5"/>
+    <p:sldId id="261" r:id="rId6"/>
     <p:sldId id="262" r:id="rId7"/>
-    <p:sldId id="261" r:id="rId8"/>
+    <p:sldId id="264" r:id="rId8"/>
+    <p:sldId id="265" r:id="rId9"/>
+    <p:sldId id="266" r:id="rId10"/>
+    <p:sldId id="267" r:id="rId11"/>
   </p:sldIdLst>
   <p:sldSz cx="12192000" cy="6858000"/>
   <p:notesSz cx="6858000" cy="12192000"/>
@@ -561,174 +564,6 @@
             <a:fld id="{F7021451-1387-4CA6-816F-3879F97B5CBC}" type="slidenum">
               <a:rPr lang="en-US"/>
               <a:t>4</a:t>
-            </a:fld>
-            <a:endParaRPr lang="en-US"/>
-          </a:p>
-        </p:txBody>
-      </p:sp>
-    </p:spTree>
-    <p:extLst>
-      <p:ext uri="{BB962C8B-B14F-4D97-AF65-F5344CB8AC3E}">
-        <p14:creationId xmlns:p14="http://schemas.microsoft.com/office/powerpoint/2010/main" val="1024086991"/>
-      </p:ext>
-    </p:extLst>
-  </p:cSld>
-  <p:clrMapOvr>
-    <a:masterClrMapping/>
-  </p:clrMapOvr>
-</p:notes>
-</file>
-
-<file path=ppt/notesSlides/notesSlide5.xml><?xml version="1.0" encoding="utf-8"?>
-<p:notes xmlns:a="http://schemas.openxmlformats.org/drawingml/2006/main" xmlns:r="http://schemas.openxmlformats.org/officeDocument/2006/relationships" xmlns:p="http://schemas.openxmlformats.org/presentationml/2006/main">
-  <p:cSld>
-    <p:spTree>
-      <p:nvGrpSpPr>
-        <p:cNvPr id="1" name=""/>
-        <p:cNvGrpSpPr/>
-        <p:nvPr/>
-      </p:nvGrpSpPr>
-      <p:grpSpPr>
-        <a:xfrm>
-          <a:off x="0" y="0"/>
-          <a:ext cx="0" cy="0"/>
-          <a:chOff x="0" y="0"/>
-          <a:chExt cx="0" cy="0"/>
-        </a:xfrm>
-      </p:grpSpPr>
-      <p:sp>
-        <p:nvSpPr>
-          <p:cNvPr id="2" name="Slide Image Placeholder 1"/>
-          <p:cNvSpPr>
-            <a:spLocks noGrp="1" noRot="1" noChangeAspect="1"/>
-          </p:cNvSpPr>
-          <p:nvPr>
-            <p:ph type="sldImg"/>
-          </p:nvPr>
-        </p:nvSpPr>
-        <p:spPr/>
-      </p:sp>
-      <p:sp>
-        <p:nvSpPr>
-          <p:cNvPr id="3" name="Notes Placeholder 2"/>
-          <p:cNvSpPr>
-            <a:spLocks noGrp="1"/>
-          </p:cNvSpPr>
-          <p:nvPr>
-            <p:ph type="body" idx="1"/>
-          </p:nvPr>
-        </p:nvSpPr>
-        <p:spPr/>
-        <p:txBody>
-          <a:bodyPr/>
-          <a:lstStyle/>
-          <a:p>
-            <a:endParaRPr lang="en-US" dirty="0"/>
-          </a:p>
-        </p:txBody>
-      </p:sp>
-      <p:sp>
-        <p:nvSpPr>
-          <p:cNvPr id="4" name="Slide Number Placeholder 3"/>
-          <p:cNvSpPr>
-            <a:spLocks noGrp="1"/>
-          </p:cNvSpPr>
-          <p:nvPr>
-            <p:ph type="sldNum" sz="quarter" idx="10"/>
-          </p:nvPr>
-        </p:nvSpPr>
-        <p:spPr/>
-        <p:txBody>
-          <a:bodyPr/>
-          <a:lstStyle/>
-          <a:p>
-            <a:fld id="{F7021451-1387-4CA6-816F-3879F97B5CBC}" type="slidenum">
-              <a:rPr lang="en-US"/>
-              <a:t>5</a:t>
-            </a:fld>
-            <a:endParaRPr lang="en-US"/>
-          </a:p>
-        </p:txBody>
-      </p:sp>
-    </p:spTree>
-    <p:extLst>
-      <p:ext uri="{BB962C8B-B14F-4D97-AF65-F5344CB8AC3E}">
-        <p14:creationId xmlns:p14="http://schemas.microsoft.com/office/powerpoint/2010/main" val="1024086991"/>
-      </p:ext>
-    </p:extLst>
-  </p:cSld>
-  <p:clrMapOvr>
-    <a:masterClrMapping/>
-  </p:clrMapOvr>
-</p:notes>
-</file>
-
-<file path=ppt/notesSlides/notesSlide6.xml><?xml version="1.0" encoding="utf-8"?>
-<p:notes xmlns:a="http://schemas.openxmlformats.org/drawingml/2006/main" xmlns:r="http://schemas.openxmlformats.org/officeDocument/2006/relationships" xmlns:p="http://schemas.openxmlformats.org/presentationml/2006/main">
-  <p:cSld>
-    <p:spTree>
-      <p:nvGrpSpPr>
-        <p:cNvPr id="1" name=""/>
-        <p:cNvGrpSpPr/>
-        <p:nvPr/>
-      </p:nvGrpSpPr>
-      <p:grpSpPr>
-        <a:xfrm>
-          <a:off x="0" y="0"/>
-          <a:ext cx="0" cy="0"/>
-          <a:chOff x="0" y="0"/>
-          <a:chExt cx="0" cy="0"/>
-        </a:xfrm>
-      </p:grpSpPr>
-      <p:sp>
-        <p:nvSpPr>
-          <p:cNvPr id="2" name="Slide Image Placeholder 1"/>
-          <p:cNvSpPr>
-            <a:spLocks noGrp="1" noRot="1" noChangeAspect="1"/>
-          </p:cNvSpPr>
-          <p:nvPr>
-            <p:ph type="sldImg"/>
-          </p:nvPr>
-        </p:nvSpPr>
-        <p:spPr/>
-      </p:sp>
-      <p:sp>
-        <p:nvSpPr>
-          <p:cNvPr id="3" name="Notes Placeholder 2"/>
-          <p:cNvSpPr>
-            <a:spLocks noGrp="1"/>
-          </p:cNvSpPr>
-          <p:nvPr>
-            <p:ph type="body" idx="1"/>
-          </p:nvPr>
-        </p:nvSpPr>
-        <p:spPr/>
-        <p:txBody>
-          <a:bodyPr/>
-          <a:lstStyle/>
-          <a:p>
-            <a:endParaRPr lang="en-US" dirty="0"/>
-          </a:p>
-        </p:txBody>
-      </p:sp>
-      <p:sp>
-        <p:nvSpPr>
-          <p:cNvPr id="4" name="Slide Number Placeholder 3"/>
-          <p:cNvSpPr>
-            <a:spLocks noGrp="1"/>
-          </p:cNvSpPr>
-          <p:nvPr>
-            <p:ph type="sldNum" sz="quarter" idx="10"/>
-          </p:nvPr>
-        </p:nvSpPr>
-        <p:spPr/>
-        <p:txBody>
-          <a:bodyPr/>
-          <a:lstStyle/>
-          <a:p>
-            <a:fld id="{F7021451-1387-4CA6-816F-3879F97B5CBC}" type="slidenum">
-              <a:rPr lang="en-US"/>
-              <a:t>7</a:t>
             </a:fld>
             <a:endParaRPr lang="en-US"/>
           </a:p>
@@ -1234,6 +1069,96 @@
               </a:rPr>
               <a:t>Yash Kapse (CM23042)</a:t>
             </a:r>
+          </a:p>
+          <a:p>
+            <a:pPr marL="0" indent="0">
+              <a:buNone/>
+            </a:pPr>
+            <a:r>
+              <a:rPr lang="en-US" sz="1300" b="1" dirty="0">
+                <a:solidFill>
+                  <a:srgbClr val="0B3033"/>
+                </a:solidFill>
+                <a:latin typeface="Arial" pitchFamily="34" charset="0"/>
+                <a:cs typeface="Arial" pitchFamily="34" charset="-120"/>
+              </a:rPr>
+              <a:t>CSE(AIML) </a:t>
+            </a:r>
+          </a:p>
+          <a:p>
+            <a:pPr marL="0" indent="0">
+              <a:buNone/>
+            </a:pPr>
+            <a:r>
+              <a:rPr lang="en-US" sz="1300" b="1" dirty="0">
+                <a:solidFill>
+                  <a:srgbClr val="0B3033"/>
+                </a:solidFill>
+                <a:latin typeface="Arial" pitchFamily="34" charset="0"/>
+                <a:cs typeface="Arial" pitchFamily="34" charset="-120"/>
+              </a:rPr>
+              <a:t>7</a:t>
+            </a:r>
+            <a:r>
+              <a:rPr lang="en-US" sz="1300" b="1" baseline="30000" dirty="0">
+                <a:solidFill>
+                  <a:srgbClr val="0B3033"/>
+                </a:solidFill>
+                <a:latin typeface="Arial" pitchFamily="34" charset="0"/>
+                <a:cs typeface="Arial" pitchFamily="34" charset="-120"/>
+              </a:rPr>
+              <a:t>th</a:t>
+            </a:r>
+            <a:r>
+              <a:rPr lang="en-US" sz="1300" b="1" dirty="0">
+                <a:solidFill>
+                  <a:srgbClr val="0B3033"/>
+                </a:solidFill>
+                <a:latin typeface="Arial" pitchFamily="34" charset="0"/>
+                <a:cs typeface="Arial" pitchFamily="34" charset="-120"/>
+              </a:rPr>
+              <a:t> </a:t>
+            </a:r>
+            <a:r>
+              <a:rPr lang="en-US" sz="1300" b="1" dirty="0" err="1">
+                <a:solidFill>
+                  <a:srgbClr val="0B3033"/>
+                </a:solidFill>
+                <a:latin typeface="Arial" pitchFamily="34" charset="0"/>
+                <a:cs typeface="Arial" pitchFamily="34" charset="-120"/>
+              </a:rPr>
+              <a:t>sem</a:t>
+            </a:r>
+            <a:r>
+              <a:rPr lang="en-US" sz="1300" b="1" dirty="0">
+                <a:solidFill>
+                  <a:srgbClr val="0B3033"/>
+                </a:solidFill>
+                <a:latin typeface="Arial" pitchFamily="34" charset="0"/>
+                <a:cs typeface="Arial" pitchFamily="34" charset="-120"/>
+              </a:rPr>
+              <a:t>/ 4</a:t>
+            </a:r>
+            <a:r>
+              <a:rPr lang="en-US" sz="1300" b="1" baseline="30000" dirty="0">
+                <a:solidFill>
+                  <a:srgbClr val="0B3033"/>
+                </a:solidFill>
+                <a:latin typeface="Arial" pitchFamily="34" charset="0"/>
+                <a:cs typeface="Arial" pitchFamily="34" charset="-120"/>
+              </a:rPr>
+              <a:t>th</a:t>
+            </a:r>
+            <a:r>
+              <a:rPr lang="en-US" sz="1300" b="1" dirty="0">
+                <a:solidFill>
+                  <a:srgbClr val="0B3033"/>
+                </a:solidFill>
+                <a:latin typeface="Arial" pitchFamily="34" charset="0"/>
+                <a:cs typeface="Arial" pitchFamily="34" charset="-120"/>
+              </a:rPr>
+              <a:t> year</a:t>
+            </a:r>
             <a:endParaRPr lang="en-US" sz="1300" dirty="0"/>
           </a:p>
         </p:txBody>
@@ -1604,6 +1529,714 @@
           </a:solidFill>
           <a:ln/>
         </p:spPr>
+      </p:sp>
+    </p:spTree>
+  </p:cSld>
+  <p:clrMapOvr>
+    <a:masterClrMapping/>
+  </p:clrMapOvr>
+</p:sld>
+</file>
+
+<file path=ppt/slides/slide10.xml><?xml version="1.0" encoding="utf-8"?>
+<p:sld xmlns:a="http://schemas.openxmlformats.org/drawingml/2006/main" xmlns:r="http://schemas.openxmlformats.org/officeDocument/2006/relationships" xmlns:p="http://schemas.openxmlformats.org/presentationml/2006/main">
+  <p:cSld>
+    <p:bg>
+      <p:bgPr>
+        <a:solidFill>
+          <a:srgbClr val="F2F7F7"/>
+        </a:solidFill>
+        <a:effectLst/>
+      </p:bgPr>
+    </p:bg>
+    <p:spTree>
+      <p:nvGrpSpPr>
+        <p:cNvPr id="1" name=""/>
+        <p:cNvGrpSpPr/>
+        <p:nvPr/>
+      </p:nvGrpSpPr>
+      <p:grpSpPr>
+        <a:xfrm>
+          <a:off x="0" y="0"/>
+          <a:ext cx="0" cy="0"/>
+          <a:chOff x="0" y="0"/>
+          <a:chExt cx="0" cy="0"/>
+        </a:xfrm>
+      </p:grpSpPr>
+      <p:sp>
+        <p:nvSpPr>
+          <p:cNvPr id="3" name="TextBox 2"/>
+          <p:cNvSpPr txBox="1"/>
+          <p:nvPr/>
+        </p:nvSpPr>
+        <p:spPr>
+          <a:xfrm>
+            <a:off x="548640" y="617220"/>
+            <a:ext cx="11094720" cy="520000"/>
+          </a:xfrm>
+          <a:prstGeom prst="rect">
+            <a:avLst/>
+          </a:prstGeom>
+          <a:noFill/>
+        </p:spPr>
+        <p:txBody>
+          <a:bodyPr wrap="square" lIns="0" tIns="0" rIns="0" bIns="0">
+            <a:spAutoFit/>
+          </a:bodyPr>
+          <a:lstStyle/>
+          <a:p>
+            <a:pPr>
+              <a:defRPr sz="2600" b="1">
+                <a:solidFill>
+                  <a:srgbClr val="0B3033"/>
+                </a:solidFill>
+                <a:latin typeface="Arial"/>
+              </a:defRPr>
+            </a:pPr>
+            <a:r>
+              <a:t>Conclusion, Deliverables &amp; Source Code Repository</a:t>
+            </a:r>
+          </a:p>
+        </p:txBody>
+      </p:sp>
+      <p:sp>
+        <p:nvSpPr>
+          <p:cNvPr id="4" name="TextBox 3"/>
+          <p:cNvSpPr txBox="1"/>
+          <p:nvPr/>
+        </p:nvSpPr>
+        <p:spPr>
+          <a:xfrm>
+            <a:off x="548640" y="1170432"/>
+            <a:ext cx="11094720" cy="320000"/>
+          </a:xfrm>
+          <a:prstGeom prst="rect">
+            <a:avLst/>
+          </a:prstGeom>
+          <a:noFill/>
+        </p:spPr>
+        <p:txBody>
+          <a:bodyPr wrap="square" lIns="0" tIns="0" rIns="0" bIns="0">
+            <a:spAutoFit/>
+          </a:bodyPr>
+          <a:lstStyle/>
+          <a:p>
+            <a:pPr>
+              <a:defRPr sz="1100">
+                <a:solidFill>
+                  <a:srgbClr val="5C7A7D"/>
+                </a:solidFill>
+                <a:latin typeface="Arial"/>
+              </a:defRPr>
+            </a:pPr>
+            <a:r>
+              <a:t>Complete end-to-end implementation of grammar-based pattern recognition with formal validation, visualization, and open-source release.</a:t>
+            </a:r>
+          </a:p>
+        </p:txBody>
+      </p:sp>
+      <p:sp>
+        <p:nvSpPr>
+          <p:cNvPr id="5" name="TextBox 4"/>
+          <p:cNvSpPr txBox="1"/>
+          <p:nvPr/>
+        </p:nvSpPr>
+        <p:spPr>
+          <a:xfrm>
+            <a:off x="7616952" y="6537960"/>
+            <a:ext cx="4114800" cy="240000"/>
+          </a:xfrm>
+          <a:prstGeom prst="rect">
+            <a:avLst/>
+          </a:prstGeom>
+          <a:noFill/>
+        </p:spPr>
+        <p:txBody>
+          <a:bodyPr wrap="square" lIns="0" tIns="0" rIns="0" bIns="0">
+            <a:spAutoFit/>
+          </a:bodyPr>
+          <a:lstStyle/>
+          <a:p>
+            <a:pPr>
+              <a:defRPr sz="800">
+                <a:solidFill>
+                  <a:srgbClr val="5C7A7D"/>
+                </a:solidFill>
+                <a:latin typeface="Arial"/>
+              </a:defRPr>
+            </a:pPr>
+            <a:r>
+              <a:t>GRAMMAR-BASED PATTERN RECOGNITION • CM23042</a:t>
+            </a:r>
+          </a:p>
+        </p:txBody>
+      </p:sp>
+      <p:sp>
+        <p:nvSpPr>
+          <p:cNvPr id="6" name="Rounded Rectangle 5"/>
+          <p:cNvSpPr/>
+          <p:nvPr/>
+        </p:nvSpPr>
+        <p:spPr>
+          <a:xfrm>
+            <a:off x="548640" y="1580000"/>
+            <a:ext cx="11094720" cy="4780000"/>
+          </a:xfrm>
+          <a:prstGeom prst="roundRect">
+            <a:avLst>
+              <a:gd name="adj" fmla="val 8078"/>
+            </a:avLst>
+          </a:prstGeom>
+          <a:solidFill>
+            <a:srgbClr val="FFFFFF"/>
+          </a:solidFill>
+          <a:ln w="19050">
+            <a:solidFill>
+              <a:srgbClr val="028090"/>
+            </a:solidFill>
+          </a:ln>
+        </p:spPr>
+        <p:style>
+          <a:lnRef idx="1">
+            <a:schemeClr val="accent1"/>
+          </a:lnRef>
+          <a:fillRef idx="3">
+            <a:schemeClr val="accent1"/>
+          </a:fillRef>
+          <a:effectRef idx="2">
+            <a:schemeClr val="accent1"/>
+          </a:effectRef>
+          <a:fontRef idx="minor">
+            <a:schemeClr val="lt1"/>
+          </a:fontRef>
+        </p:style>
+        <p:txBody>
+          <a:bodyPr rtlCol="0" anchor="ctr"/>
+          <a:lstStyle/>
+          <a:p>
+            <a:pPr algn="ctr"/>
+            <a:endParaRPr/>
+          </a:p>
+        </p:txBody>
+      </p:sp>
+      <p:sp>
+        <p:nvSpPr>
+          <p:cNvPr id="8" name="TextBox 7"/>
+          <p:cNvSpPr txBox="1"/>
+          <p:nvPr/>
+        </p:nvSpPr>
+        <p:spPr>
+          <a:xfrm>
+            <a:off x="808640" y="1780000"/>
+            <a:ext cx="5200000" cy="3488134"/>
+          </a:xfrm>
+          <a:prstGeom prst="rect">
+            <a:avLst/>
+          </a:prstGeom>
+          <a:noFill/>
+        </p:spPr>
+        <p:txBody>
+          <a:bodyPr wrap="square" lIns="0" tIns="0" rIns="0" bIns="0">
+            <a:spAutoFit/>
+          </a:bodyPr>
+          <a:lstStyle/>
+          <a:p>
+            <a:r>
+              <a:rPr sz="1000" b="1" dirty="0">
+                <a:solidFill>
+                  <a:srgbClr val="028090"/>
+                </a:solidFill>
+                <a:latin typeface="Arial"/>
+              </a:rPr>
+              <a:t>KEY PROJECT ACHIEVEMENTS
+</a:t>
+            </a:r>
+          </a:p>
+          <a:p>
+            <a:pPr>
+              <a:spcBef>
+                <a:spcPts val="800"/>
+              </a:spcBef>
+            </a:pPr>
+            <a:r>
+              <a:rPr sz="1000" b="1" dirty="0">
+                <a:solidFill>
+                  <a:srgbClr val="007A6E"/>
+                </a:solidFill>
+                <a:latin typeface="Arial"/>
+              </a:rPr>
+              <a:t>✔ </a:t>
+            </a:r>
+            <a:r>
+              <a:rPr sz="1000" b="1" dirty="0">
+                <a:solidFill>
+                  <a:srgbClr val="0B3033"/>
+                </a:solidFill>
+                <a:latin typeface="Arial"/>
+              </a:rPr>
+              <a:t>100% QA Test Pass Rate
+</a:t>
+            </a:r>
+            <a:r>
+              <a:rPr sz="1000" dirty="0">
+                <a:solidFill>
+                  <a:srgbClr val="5C7A7D"/>
+                </a:solidFill>
+                <a:latin typeface="Arial"/>
+              </a:rPr>
+              <a:t>39 automated unit tests passing across Lexer, Parser, Validator, Extensibility, and Benchmarks.</a:t>
+            </a:r>
+          </a:p>
+          <a:p>
+            <a:pPr>
+              <a:spcBef>
+                <a:spcPts val="800"/>
+              </a:spcBef>
+            </a:pPr>
+            <a:r>
+              <a:rPr sz="1000" b="1" dirty="0">
+                <a:solidFill>
+                  <a:srgbClr val="007A6E"/>
+                </a:solidFill>
+                <a:latin typeface="Arial"/>
+              </a:rPr>
+              <a:t>✔ </a:t>
+            </a:r>
+            <a:r>
+              <a:rPr sz="1000" b="1" dirty="0">
+                <a:solidFill>
+                  <a:srgbClr val="0B3033"/>
+                </a:solidFill>
+                <a:latin typeface="Arial"/>
+              </a:rPr>
+              <a:t>Strict O(n) Linear Complexity
+</a:t>
+            </a:r>
+            <a:r>
+              <a:rPr sz="1000" dirty="0">
+                <a:solidFill>
+                  <a:srgbClr val="5C7A7D"/>
+                </a:solidFill>
+                <a:latin typeface="Arial"/>
+              </a:rPr>
+              <a:t>Proven empirically up to 5,000 characters with R² = 0.874–0.991 and slope of ~0.34 µs/char.</a:t>
+            </a:r>
+          </a:p>
+          <a:p>
+            <a:pPr>
+              <a:spcBef>
+                <a:spcPts val="800"/>
+              </a:spcBef>
+            </a:pPr>
+            <a:r>
+              <a:rPr sz="1000" b="1" dirty="0">
+                <a:solidFill>
+                  <a:srgbClr val="007A6E"/>
+                </a:solidFill>
+                <a:latin typeface="Arial"/>
+              </a:rPr>
+              <a:t>✔ </a:t>
+            </a:r>
+            <a:r>
+              <a:rPr sz="1000" b="1" dirty="0">
+                <a:solidFill>
+                  <a:srgbClr val="0B3033"/>
+                </a:solidFill>
+                <a:latin typeface="Arial"/>
+              </a:rPr>
+              <a:t>Grammar Agnostic Core
+</a:t>
+            </a:r>
+            <a:r>
+              <a:rPr sz="1000" dirty="0">
+                <a:solidFill>
+                  <a:srgbClr val="5C7A7D"/>
+                </a:solidFill>
+                <a:latin typeface="Arial"/>
+              </a:rPr>
+              <a:t>Supports multiple production rules (Email CFG &amp; Date CFG) with calendar and leap-year validation.</a:t>
+            </a:r>
+          </a:p>
+          <a:p>
+            <a:pPr>
+              <a:spcBef>
+                <a:spcPts val="800"/>
+              </a:spcBef>
+            </a:pPr>
+            <a:r>
+              <a:rPr sz="1000" b="1" dirty="0">
+                <a:solidFill>
+                  <a:srgbClr val="007A6E"/>
+                </a:solidFill>
+                <a:latin typeface="Arial"/>
+              </a:rPr>
+              <a:t>✔ </a:t>
+            </a:r>
+            <a:r>
+              <a:rPr sz="1000" b="1" dirty="0">
+                <a:solidFill>
+                  <a:srgbClr val="0B3033"/>
+                </a:solidFill>
+                <a:latin typeface="Arial"/>
+              </a:rPr>
+              <a:t>Rich Multi-Format Outputs
+</a:t>
+            </a:r>
+            <a:r>
+              <a:rPr sz="1000" dirty="0">
+                <a:solidFill>
+                  <a:srgbClr val="5C7A7D"/>
+                </a:solidFill>
+                <a:latin typeface="Arial"/>
+              </a:rPr>
+              <a:t>Exports interactive pure-Python SVG vector graphs, </a:t>
+            </a:r>
+            <a:r>
+              <a:rPr sz="1000" dirty="0" err="1">
+                <a:solidFill>
+                  <a:srgbClr val="5C7A7D"/>
+                </a:solidFill>
+                <a:latin typeface="Arial"/>
+              </a:rPr>
+              <a:t>Graphviz</a:t>
+            </a:r>
+            <a:r>
+              <a:rPr sz="1000" dirty="0">
+                <a:solidFill>
+                  <a:srgbClr val="5C7A7D"/>
+                </a:solidFill>
+                <a:latin typeface="Arial"/>
+              </a:rPr>
+              <a:t> DOT files, and console ASCII trees.</a:t>
+            </a:r>
+          </a:p>
+          <a:p>
+            <a:pPr>
+              <a:spcBef>
+                <a:spcPts val="800"/>
+              </a:spcBef>
+            </a:pPr>
+            <a:r>
+              <a:rPr sz="1000" b="1" dirty="0">
+                <a:solidFill>
+                  <a:srgbClr val="007A6E"/>
+                </a:solidFill>
+                <a:latin typeface="Arial"/>
+              </a:rPr>
+              <a:t>✔ </a:t>
+            </a:r>
+            <a:r>
+              <a:rPr sz="1000" b="1" dirty="0">
+                <a:solidFill>
+                  <a:srgbClr val="0B3033"/>
+                </a:solidFill>
+                <a:latin typeface="Arial"/>
+              </a:rPr>
+              <a:t>Modern Full-Stack Web Studio
+</a:t>
+            </a:r>
+            <a:r>
+              <a:rPr sz="1000" dirty="0">
+                <a:solidFill>
+                  <a:srgbClr val="5C7A7D"/>
+                </a:solidFill>
+                <a:latin typeface="Arial"/>
+              </a:rPr>
+              <a:t>Flask backend + reactive </a:t>
+            </a:r>
+            <a:r>
+              <a:rPr sz="1000" dirty="0" err="1">
+                <a:solidFill>
+                  <a:srgbClr val="5C7A7D"/>
+                </a:solidFill>
+                <a:latin typeface="Arial"/>
+              </a:rPr>
+              <a:t>glassmorphic</a:t>
+            </a:r>
+            <a:r>
+              <a:rPr sz="1000" dirty="0">
+                <a:solidFill>
+                  <a:srgbClr val="5C7A7D"/>
+                </a:solidFill>
+                <a:latin typeface="Arial"/>
+              </a:rPr>
+              <a:t> UI providing live AST visualizer, batch testing, and benchmark dashboards.</a:t>
+            </a:r>
+          </a:p>
+        </p:txBody>
+      </p:sp>
+      <p:sp>
+        <p:nvSpPr>
+          <p:cNvPr id="9" name="Rounded Rectangle 8"/>
+          <p:cNvSpPr/>
+          <p:nvPr/>
+        </p:nvSpPr>
+        <p:spPr>
+          <a:xfrm>
+            <a:off x="6248640" y="1780000"/>
+            <a:ext cx="5134720" cy="4380000"/>
+          </a:xfrm>
+          <a:prstGeom prst="roundRect">
+            <a:avLst>
+              <a:gd name="adj" fmla="val 7507"/>
+            </a:avLst>
+          </a:prstGeom>
+          <a:solidFill>
+            <a:schemeClr val="accent1">
+              <a:lumMod val="20000"/>
+              <a:lumOff val="80000"/>
+            </a:schemeClr>
+          </a:solidFill>
+          <a:ln w="19050">
+            <a:solidFill>
+              <a:srgbClr val="028090"/>
+            </a:solidFill>
+          </a:ln>
+        </p:spPr>
+        <p:style>
+          <a:lnRef idx="1">
+            <a:schemeClr val="accent1"/>
+          </a:lnRef>
+          <a:fillRef idx="3">
+            <a:schemeClr val="accent1"/>
+          </a:fillRef>
+          <a:effectRef idx="2">
+            <a:schemeClr val="accent1"/>
+          </a:effectRef>
+          <a:fontRef idx="minor">
+            <a:schemeClr val="lt1"/>
+          </a:fontRef>
+        </p:style>
+        <p:txBody>
+          <a:bodyPr rtlCol="0" anchor="ctr"/>
+          <a:lstStyle/>
+          <a:p>
+            <a:pPr algn="ctr"/>
+            <a:endParaRPr/>
+          </a:p>
+        </p:txBody>
+      </p:sp>
+      <p:sp>
+        <p:nvSpPr>
+          <p:cNvPr id="10" name="TextBox 9"/>
+          <p:cNvSpPr txBox="1"/>
+          <p:nvPr/>
+        </p:nvSpPr>
+        <p:spPr>
+          <a:xfrm>
+            <a:off x="6488640" y="1980000"/>
+            <a:ext cx="4654720" cy="784830"/>
+          </a:xfrm>
+          <a:prstGeom prst="rect">
+            <a:avLst/>
+          </a:prstGeom>
+          <a:noFill/>
+        </p:spPr>
+        <p:txBody>
+          <a:bodyPr wrap="square" lIns="0" tIns="0" rIns="0" bIns="0">
+            <a:spAutoFit/>
+          </a:bodyPr>
+          <a:lstStyle/>
+          <a:p>
+            <a:r>
+              <a:rPr sz="900" b="1" dirty="0">
+                <a:latin typeface="Arial"/>
+              </a:rPr>
+              <a:t>OPEN SOURCE REPOSITORY
+</a:t>
+            </a:r>
+          </a:p>
+          <a:p>
+            <a:pPr>
+              <a:spcBef>
+                <a:spcPts val="300"/>
+              </a:spcBef>
+            </a:pPr>
+            <a:r>
+              <a:rPr sz="1400" b="1" dirty="0">
+                <a:latin typeface="Arial"/>
+              </a:rPr>
+              <a:t>GitHub Project Repository
+</a:t>
+            </a:r>
+          </a:p>
+        </p:txBody>
+      </p:sp>
+      <p:sp>
+        <p:nvSpPr>
+          <p:cNvPr id="11" name="Rounded Rectangle 10"/>
+          <p:cNvSpPr/>
+          <p:nvPr/>
+        </p:nvSpPr>
+        <p:spPr>
+          <a:xfrm>
+            <a:off x="6488640" y="2530000"/>
+            <a:ext cx="4654720" cy="420000"/>
+          </a:xfrm>
+          <a:prstGeom prst="roundRect">
+            <a:avLst/>
+          </a:prstGeom>
+          <a:solidFill>
+            <a:srgbClr val="153E42"/>
+          </a:solidFill>
+          <a:ln w="12700">
+            <a:solidFill>
+              <a:srgbClr val="02C39A"/>
+            </a:solidFill>
+          </a:ln>
+        </p:spPr>
+        <p:style>
+          <a:lnRef idx="1">
+            <a:schemeClr val="accent1"/>
+          </a:lnRef>
+          <a:fillRef idx="3">
+            <a:schemeClr val="accent1"/>
+          </a:fillRef>
+          <a:effectRef idx="2">
+            <a:schemeClr val="accent1"/>
+          </a:effectRef>
+          <a:fontRef idx="minor">
+            <a:schemeClr val="lt1"/>
+          </a:fontRef>
+        </p:style>
+        <p:txBody>
+          <a:bodyPr rtlCol="0" anchor="ctr"/>
+          <a:lstStyle/>
+          <a:p>
+            <a:pPr algn="ctr"/>
+            <a:endParaRPr/>
+          </a:p>
+        </p:txBody>
+      </p:sp>
+      <p:sp>
+        <p:nvSpPr>
+          <p:cNvPr id="12" name="TextBox 11"/>
+          <p:cNvSpPr txBox="1"/>
+          <p:nvPr/>
+        </p:nvSpPr>
+        <p:spPr>
+          <a:xfrm>
+            <a:off x="6488640" y="2535420"/>
+            <a:ext cx="4614720" cy="380000"/>
+          </a:xfrm>
+          <a:prstGeom prst="rect">
+            <a:avLst/>
+          </a:prstGeom>
+          <a:solidFill>
+            <a:schemeClr val="accent5">
+              <a:lumMod val="40000"/>
+              <a:lumOff val="60000"/>
+            </a:schemeClr>
+          </a:solidFill>
+        </p:spPr>
+        <p:txBody>
+          <a:bodyPr wrap="square" lIns="0" tIns="0" rIns="0" bIns="0">
+            <a:spAutoFit/>
+          </a:bodyPr>
+          <a:lstStyle/>
+          <a:p>
+            <a:r>
+              <a:rPr sz="919" b="1">
+                <a:solidFill>
+                  <a:srgbClr val="02C39A"/>
+                </a:solidFill>
+                <a:latin typeface="Arial"/>
+                <a:hlinkClick r:id="rId2"/>
+              </a:rPr>
+              <a:t>🔗 github.com/Yash-k10/Grammer_based_recognition_CM23042</a:t>
+            </a:r>
+          </a:p>
+        </p:txBody>
+      </p:sp>
+      <p:sp>
+        <p:nvSpPr>
+          <p:cNvPr id="13" name="TextBox 12"/>
+          <p:cNvSpPr txBox="1"/>
+          <p:nvPr/>
+        </p:nvSpPr>
+        <p:spPr>
+          <a:xfrm>
+            <a:off x="6488640" y="3030000"/>
+            <a:ext cx="4654720" cy="2205732"/>
+          </a:xfrm>
+          <a:prstGeom prst="rect">
+            <a:avLst/>
+          </a:prstGeom>
+          <a:noFill/>
+        </p:spPr>
+        <p:txBody>
+          <a:bodyPr wrap="square" lIns="0" tIns="0" rIns="0" bIns="0">
+            <a:spAutoFit/>
+          </a:bodyPr>
+          <a:lstStyle/>
+          <a:p>
+            <a:r>
+              <a:rPr sz="1000" dirty="0">
+                <a:latin typeface="Arial"/>
+              </a:rPr>
+              <a:t>Repository Contents:
+• Complete Python Engine: lexer.py, parser.py, validator.py
+• Formal Grammars: grammar/</a:t>
+            </a:r>
+            <a:r>
+              <a:rPr sz="1000" dirty="0" err="1">
+                <a:latin typeface="Arial"/>
+              </a:rPr>
+              <a:t>email.cfg</a:t>
+            </a:r>
+            <a:r>
+              <a:rPr sz="1000" dirty="0">
+                <a:latin typeface="Arial"/>
+              </a:rPr>
+              <a:t> &amp; grammar/</a:t>
+            </a:r>
+            <a:r>
+              <a:rPr sz="1000" dirty="0" err="1">
+                <a:latin typeface="Arial"/>
+              </a:rPr>
+              <a:t>date.cfg</a:t>
+            </a:r>
+            <a:r>
+              <a:rPr sz="1000" dirty="0">
+                <a:latin typeface="Arial"/>
+              </a:rPr>
+              <a:t>
+• Automated QA Suites: tests/ (39 Unit Tests)
+• Benchmarking Suite: benchmark.py with JSON &amp; SVG exports
+• Web App Studio: app.py &amp; static/ </a:t>
+            </a:r>
+            <a:r>
+              <a:rPr sz="1000" dirty="0" err="1">
+                <a:latin typeface="Arial"/>
+              </a:rPr>
+              <a:t>Glassmorphic</a:t>
+            </a:r>
+            <a:r>
+              <a:rPr sz="1000" dirty="0">
+                <a:latin typeface="Arial"/>
+              </a:rPr>
+              <a:t> Frontend
+• Complete Documentation: README.md, Walkthroughs &amp; Plans
+</a:t>
+            </a:r>
+          </a:p>
+          <a:p>
+            <a:pPr>
+              <a:spcBef>
+                <a:spcPts val="400"/>
+              </a:spcBef>
+            </a:pPr>
+            <a:r>
+              <a:rPr sz="1000" b="1" dirty="0">
+                <a:latin typeface="Arial"/>
+              </a:rPr>
+              <a:t>AUTHOR &amp; COURSE DETAILS:
+Yash Kapse (CM23042)
+Pattern Recognition  TAE1
+</a:t>
+            </a:r>
+          </a:p>
+        </p:txBody>
       </p:sp>
     </p:spTree>
   </p:cSld>
@@ -1640,45 +2273,6 @@
       </p:grpSpPr>
       <p:sp>
         <p:nvSpPr>
-          <p:cNvPr id="2" name="Text 0"/>
-          <p:cNvSpPr/>
-          <p:nvPr/>
-        </p:nvSpPr>
-        <p:spPr>
-          <a:xfrm>
-            <a:off x="548640" y="411480"/>
-            <a:ext cx="4572000" cy="274320"/>
-          </a:xfrm>
-          <a:prstGeom prst="rect">
-            <a:avLst/>
-          </a:prstGeom>
-          <a:noFill/>
-          <a:ln/>
-        </p:spPr>
-        <p:txBody>
-          <a:bodyPr wrap="square" rtlCol="0" anchor="ctr"/>
-          <a:lstStyle/>
-          <a:p>
-            <a:pPr marL="0" indent="0">
-              <a:buNone/>
-            </a:pPr>
-            <a:r>
-              <a:rPr lang="en-US" sz="1000" b="1" kern="0" spc="200" dirty="0">
-                <a:solidFill>
-                  <a:srgbClr val="028090"/>
-                </a:solidFill>
-                <a:latin typeface="Arial" pitchFamily="34" charset="0"/>
-                <a:ea typeface="Arial" pitchFamily="34" charset="-122"/>
-                <a:cs typeface="Arial" pitchFamily="34" charset="-120"/>
-              </a:rPr>
-              <a:t>THE CHALLENGE</a:t>
-            </a:r>
-            <a:endParaRPr lang="en-US" sz="1000" dirty="0"/>
-          </a:p>
-        </p:txBody>
-      </p:sp>
-      <p:sp>
-        <p:nvSpPr>
           <p:cNvPr id="3" name="Text 1"/>
           <p:cNvSpPr/>
           <p:nvPr/>
@@ -2573,45 +3167,6 @@
       </p:grpSpPr>
       <p:sp>
         <p:nvSpPr>
-          <p:cNvPr id="2" name="Text 0"/>
-          <p:cNvSpPr/>
-          <p:nvPr/>
-        </p:nvSpPr>
-        <p:spPr>
-          <a:xfrm>
-            <a:off x="548640" y="411480"/>
-            <a:ext cx="4572000" cy="274320"/>
-          </a:xfrm>
-          <a:prstGeom prst="rect">
-            <a:avLst/>
-          </a:prstGeom>
-          <a:noFill/>
-          <a:ln/>
-        </p:spPr>
-        <p:txBody>
-          <a:bodyPr wrap="square" rtlCol="0" anchor="ctr"/>
-          <a:lstStyle/>
-          <a:p>
-            <a:pPr marL="0" indent="0">
-              <a:buNone/>
-            </a:pPr>
-            <a:r>
-              <a:rPr lang="en-US" sz="1000" b="1" kern="0" spc="200" dirty="0">
-                <a:solidFill>
-                  <a:srgbClr val="028090"/>
-                </a:solidFill>
-                <a:latin typeface="Arial" pitchFamily="34" charset="0"/>
-                <a:ea typeface="Arial" pitchFamily="34" charset="-122"/>
-                <a:cs typeface="Arial" pitchFamily="34" charset="-120"/>
-              </a:rPr>
-              <a:t>SYSTEM DESIGN</a:t>
-            </a:r>
-            <a:endParaRPr lang="en-US" sz="1000" dirty="0"/>
-          </a:p>
-        </p:txBody>
-      </p:sp>
-      <p:sp>
-        <p:nvSpPr>
           <p:cNvPr id="3" name="Text 1"/>
           <p:cNvSpPr/>
           <p:nvPr/>
@@ -3738,1356 +4293,6 @@
 </file>
 
 <file path=ppt/slides/slide4.xml><?xml version="1.0" encoding="utf-8"?>
-<p:sld xmlns:a="http://schemas.openxmlformats.org/drawingml/2006/main" xmlns:r="http://schemas.openxmlformats.org/officeDocument/2006/relationships" xmlns:p="http://schemas.openxmlformats.org/presentationml/2006/main">
-  <p:cSld name="Slide 4">
-    <p:bg>
-      <p:bgPr>
-        <a:solidFill>
-          <a:srgbClr val="F2F7F7"/>
-        </a:solidFill>
-        <a:effectLst/>
-      </p:bgPr>
-    </p:bg>
-    <p:spTree>
-      <p:nvGrpSpPr>
-        <p:cNvPr id="1" name=""/>
-        <p:cNvGrpSpPr/>
-        <p:nvPr/>
-      </p:nvGrpSpPr>
-      <p:grpSpPr>
-        <a:xfrm>
-          <a:off x="0" y="0"/>
-          <a:ext cx="0" cy="0"/>
-          <a:chOff x="0" y="0"/>
-          <a:chExt cx="0" cy="0"/>
-        </a:xfrm>
-      </p:grpSpPr>
-      <p:sp>
-        <p:nvSpPr>
-          <p:cNvPr id="2" name="Text 0"/>
-          <p:cNvSpPr/>
-          <p:nvPr/>
-        </p:nvSpPr>
-        <p:spPr>
-          <a:xfrm>
-            <a:off x="548640" y="411480"/>
-            <a:ext cx="4572000" cy="274320"/>
-          </a:xfrm>
-          <a:prstGeom prst="rect">
-            <a:avLst/>
-          </a:prstGeom>
-          <a:noFill/>
-          <a:ln/>
-        </p:spPr>
-        <p:txBody>
-          <a:bodyPr wrap="square" rtlCol="0" anchor="ctr"/>
-          <a:lstStyle/>
-          <a:p>
-            <a:pPr marL="0" indent="0">
-              <a:buNone/>
-            </a:pPr>
-            <a:r>
-              <a:rPr lang="en-US" sz="1000" b="1" kern="0" spc="200" dirty="0">
-                <a:solidFill>
-                  <a:srgbClr val="028090"/>
-                </a:solidFill>
-                <a:latin typeface="Arial" pitchFamily="34" charset="0"/>
-                <a:ea typeface="Arial" pitchFamily="34" charset="-122"/>
-                <a:cs typeface="Arial" pitchFamily="34" charset="-120"/>
-              </a:rPr>
-              <a:t>BUILD</a:t>
-            </a:r>
-            <a:endParaRPr lang="en-US" sz="1000" dirty="0"/>
-          </a:p>
-        </p:txBody>
-      </p:sp>
-      <p:sp>
-        <p:nvSpPr>
-          <p:cNvPr id="3" name="Text 1"/>
-          <p:cNvSpPr/>
-          <p:nvPr/>
-        </p:nvSpPr>
-        <p:spPr>
-          <a:xfrm>
-            <a:off x="548640" y="685800"/>
-            <a:ext cx="6400800" cy="548640"/>
-          </a:xfrm>
-          <a:prstGeom prst="rect">
-            <a:avLst/>
-          </a:prstGeom>
-          <a:noFill/>
-          <a:ln/>
-        </p:spPr>
-        <p:txBody>
-          <a:bodyPr wrap="square" rtlCol="0" anchor="ctr"/>
-          <a:lstStyle/>
-          <a:p>
-            <a:pPr marL="0" indent="0">
-              <a:buNone/>
-            </a:pPr>
-            <a:r>
-              <a:rPr lang="en-US" sz="2400" b="1" dirty="0">
-                <a:solidFill>
-                  <a:srgbClr val="0B3033"/>
-                </a:solidFill>
-                <a:latin typeface="Arial" pitchFamily="34" charset="0"/>
-                <a:ea typeface="Arial" pitchFamily="34" charset="-122"/>
-                <a:cs typeface="Arial" pitchFamily="34" charset="-120"/>
-              </a:rPr>
-              <a:t>Implementation</a:t>
-            </a:r>
-            <a:endParaRPr lang="en-US" sz="2400" dirty="0"/>
-          </a:p>
-        </p:txBody>
-      </p:sp>
-      <p:sp>
-        <p:nvSpPr>
-          <p:cNvPr id="4" name="Text 2"/>
-          <p:cNvSpPr/>
-          <p:nvPr/>
-        </p:nvSpPr>
-        <p:spPr>
-          <a:xfrm>
-            <a:off x="548640" y="1417320"/>
-            <a:ext cx="5486400" cy="274320"/>
-          </a:xfrm>
-          <a:prstGeom prst="rect">
-            <a:avLst/>
-          </a:prstGeom>
-          <a:noFill/>
-          <a:ln/>
-        </p:spPr>
-        <p:txBody>
-          <a:bodyPr wrap="square" rtlCol="0" anchor="ctr"/>
-          <a:lstStyle/>
-          <a:p>
-            <a:pPr marL="0" indent="0">
-              <a:buNone/>
-            </a:pPr>
-            <a:r>
-              <a:rPr lang="en-US" sz="1000" b="1" kern="0" spc="150" dirty="0">
-                <a:solidFill>
-                  <a:srgbClr val="028090"/>
-                </a:solidFill>
-                <a:latin typeface="Arial" pitchFamily="34" charset="0"/>
-                <a:ea typeface="Arial" pitchFamily="34" charset="-122"/>
-                <a:cs typeface="Arial" pitchFamily="34" charset="-120"/>
-              </a:rPr>
-              <a:t>PIPELINE STEPS</a:t>
-            </a:r>
-            <a:endParaRPr lang="en-US" sz="1000" dirty="0"/>
-          </a:p>
-        </p:txBody>
-      </p:sp>
-      <p:sp>
-        <p:nvSpPr>
-          <p:cNvPr id="5" name="Shape 3"/>
-          <p:cNvSpPr/>
-          <p:nvPr/>
-        </p:nvSpPr>
-        <p:spPr>
-          <a:xfrm>
-            <a:off x="548640" y="1828800"/>
-            <a:ext cx="310896" cy="310896"/>
-          </a:xfrm>
-          <a:prstGeom prst="ellipse">
-            <a:avLst/>
-          </a:prstGeom>
-          <a:solidFill>
-            <a:srgbClr val="00A896"/>
-          </a:solidFill>
-          <a:ln/>
-        </p:spPr>
-      </p:sp>
-      <p:sp>
-        <p:nvSpPr>
-          <p:cNvPr id="6" name="Text 4"/>
-          <p:cNvSpPr/>
-          <p:nvPr/>
-        </p:nvSpPr>
-        <p:spPr>
-          <a:xfrm>
-            <a:off x="548640" y="1828800"/>
-            <a:ext cx="310896" cy="310896"/>
-          </a:xfrm>
-          <a:prstGeom prst="rect">
-            <a:avLst/>
-          </a:prstGeom>
-          <a:noFill/>
-          <a:ln/>
-        </p:spPr>
-        <p:txBody>
-          <a:bodyPr wrap="square" rtlCol="0" anchor="ctr"/>
-          <a:lstStyle/>
-          <a:p>
-            <a:pPr marL="0" indent="0" algn="ctr">
-              <a:buNone/>
-            </a:pPr>
-            <a:r>
-              <a:rPr lang="en-US" sz="1100" b="1" dirty="0">
-                <a:solidFill>
-                  <a:srgbClr val="FFFFFF"/>
-                </a:solidFill>
-                <a:latin typeface="Arial" pitchFamily="34" charset="0"/>
-                <a:ea typeface="Arial" pitchFamily="34" charset="-122"/>
-                <a:cs typeface="Arial" pitchFamily="34" charset="-120"/>
-              </a:rPr>
-              <a:t>1</a:t>
-            </a:r>
-            <a:endParaRPr lang="en-US" sz="1100" dirty="0"/>
-          </a:p>
-        </p:txBody>
-      </p:sp>
-      <p:sp>
-        <p:nvSpPr>
-          <p:cNvPr id="7" name="Text 5"/>
-          <p:cNvSpPr/>
-          <p:nvPr/>
-        </p:nvSpPr>
-        <p:spPr>
-          <a:xfrm>
-            <a:off x="1005840" y="1810512"/>
-            <a:ext cx="6126480" cy="365760"/>
-          </a:xfrm>
-          <a:prstGeom prst="rect">
-            <a:avLst/>
-          </a:prstGeom>
-          <a:noFill/>
-          <a:ln/>
-        </p:spPr>
-        <p:txBody>
-          <a:bodyPr wrap="square" rtlCol="0" anchor="ctr"/>
-          <a:lstStyle/>
-          <a:p>
-            <a:pPr marL="0" indent="0">
-              <a:buNone/>
-            </a:pPr>
-            <a:r>
-              <a:rPr lang="en-US" sz="1200" dirty="0">
-                <a:solidFill>
-                  <a:srgbClr val="17383B"/>
-                </a:solidFill>
-                <a:latin typeface="Arial" pitchFamily="34" charset="0"/>
-                <a:ea typeface="Arial" pitchFamily="34" charset="-122"/>
-                <a:cs typeface="Arial" pitchFamily="34" charset="-120"/>
-              </a:rPr>
-              <a:t>Define CFG production rules for the target pattern class</a:t>
-            </a:r>
-            <a:endParaRPr lang="en-US" sz="1200" dirty="0"/>
-          </a:p>
-        </p:txBody>
-      </p:sp>
-      <p:sp>
-        <p:nvSpPr>
-          <p:cNvPr id="8" name="Shape 6"/>
-          <p:cNvSpPr/>
-          <p:nvPr/>
-        </p:nvSpPr>
-        <p:spPr>
-          <a:xfrm>
-            <a:off x="548640" y="2487168"/>
-            <a:ext cx="310896" cy="310896"/>
-          </a:xfrm>
-          <a:prstGeom prst="ellipse">
-            <a:avLst/>
-          </a:prstGeom>
-          <a:solidFill>
-            <a:srgbClr val="028090"/>
-          </a:solidFill>
-          <a:ln/>
-        </p:spPr>
-      </p:sp>
-      <p:sp>
-        <p:nvSpPr>
-          <p:cNvPr id="9" name="Text 7"/>
-          <p:cNvSpPr/>
-          <p:nvPr/>
-        </p:nvSpPr>
-        <p:spPr>
-          <a:xfrm>
-            <a:off x="548640" y="2487168"/>
-            <a:ext cx="310896" cy="310896"/>
-          </a:xfrm>
-          <a:prstGeom prst="rect">
-            <a:avLst/>
-          </a:prstGeom>
-          <a:noFill/>
-          <a:ln/>
-        </p:spPr>
-        <p:txBody>
-          <a:bodyPr wrap="square" rtlCol="0" anchor="ctr"/>
-          <a:lstStyle/>
-          <a:p>
-            <a:pPr marL="0" indent="0" algn="ctr">
-              <a:buNone/>
-            </a:pPr>
-            <a:r>
-              <a:rPr lang="en-US" sz="1100" b="1" dirty="0">
-                <a:solidFill>
-                  <a:srgbClr val="FFFFFF"/>
-                </a:solidFill>
-                <a:latin typeface="Arial" pitchFamily="34" charset="0"/>
-                <a:ea typeface="Arial" pitchFamily="34" charset="-122"/>
-                <a:cs typeface="Arial" pitchFamily="34" charset="-120"/>
-              </a:rPr>
-              <a:t>2</a:t>
-            </a:r>
-            <a:endParaRPr lang="en-US" sz="1100" dirty="0"/>
-          </a:p>
-        </p:txBody>
-      </p:sp>
-      <p:sp>
-        <p:nvSpPr>
-          <p:cNvPr id="10" name="Text 8"/>
-          <p:cNvSpPr/>
-          <p:nvPr/>
-        </p:nvSpPr>
-        <p:spPr>
-          <a:xfrm>
-            <a:off x="1005840" y="2468880"/>
-            <a:ext cx="6126480" cy="365760"/>
-          </a:xfrm>
-          <a:prstGeom prst="rect">
-            <a:avLst/>
-          </a:prstGeom>
-          <a:noFill/>
-          <a:ln/>
-        </p:spPr>
-        <p:txBody>
-          <a:bodyPr wrap="square" rtlCol="0" anchor="ctr"/>
-          <a:lstStyle/>
-          <a:p>
-            <a:pPr marL="0" indent="0">
-              <a:buNone/>
-            </a:pPr>
-            <a:r>
-              <a:rPr lang="en-US" sz="1200" dirty="0">
-                <a:solidFill>
-                  <a:srgbClr val="17383B"/>
-                </a:solidFill>
-                <a:latin typeface="Arial" pitchFamily="34" charset="0"/>
-                <a:ea typeface="Arial" pitchFamily="34" charset="-122"/>
-                <a:cs typeface="Arial" pitchFamily="34" charset="-120"/>
-              </a:rPr>
-              <a:t>Tokenize raw input into terminal symbols (lexer)</a:t>
-            </a:r>
-            <a:endParaRPr lang="en-US" sz="1200" dirty="0"/>
-          </a:p>
-        </p:txBody>
-      </p:sp>
-      <p:sp>
-        <p:nvSpPr>
-          <p:cNvPr id="11" name="Shape 9"/>
-          <p:cNvSpPr/>
-          <p:nvPr/>
-        </p:nvSpPr>
-        <p:spPr>
-          <a:xfrm>
-            <a:off x="548640" y="3145536"/>
-            <a:ext cx="310896" cy="310896"/>
-          </a:xfrm>
-          <a:prstGeom prst="ellipse">
-            <a:avLst/>
-          </a:prstGeom>
-          <a:solidFill>
-            <a:srgbClr val="00A896"/>
-          </a:solidFill>
-          <a:ln/>
-        </p:spPr>
-      </p:sp>
-      <p:sp>
-        <p:nvSpPr>
-          <p:cNvPr id="12" name="Text 10"/>
-          <p:cNvSpPr/>
-          <p:nvPr/>
-        </p:nvSpPr>
-        <p:spPr>
-          <a:xfrm>
-            <a:off x="548640" y="3145536"/>
-            <a:ext cx="310896" cy="310896"/>
-          </a:xfrm>
-          <a:prstGeom prst="rect">
-            <a:avLst/>
-          </a:prstGeom>
-          <a:noFill/>
-          <a:ln/>
-        </p:spPr>
-        <p:txBody>
-          <a:bodyPr wrap="square" rtlCol="0" anchor="ctr"/>
-          <a:lstStyle/>
-          <a:p>
-            <a:pPr marL="0" indent="0" algn="ctr">
-              <a:buNone/>
-            </a:pPr>
-            <a:r>
-              <a:rPr lang="en-US" sz="1100" b="1" dirty="0">
-                <a:solidFill>
-                  <a:srgbClr val="FFFFFF"/>
-                </a:solidFill>
-                <a:latin typeface="Arial" pitchFamily="34" charset="0"/>
-                <a:ea typeface="Arial" pitchFamily="34" charset="-122"/>
-                <a:cs typeface="Arial" pitchFamily="34" charset="-120"/>
-              </a:rPr>
-              <a:t>3</a:t>
-            </a:r>
-            <a:endParaRPr lang="en-US" sz="1100" dirty="0"/>
-          </a:p>
-        </p:txBody>
-      </p:sp>
-      <p:sp>
-        <p:nvSpPr>
-          <p:cNvPr id="13" name="Text 11"/>
-          <p:cNvSpPr/>
-          <p:nvPr/>
-        </p:nvSpPr>
-        <p:spPr>
-          <a:xfrm>
-            <a:off x="1005840" y="3127248"/>
-            <a:ext cx="6126480" cy="365760"/>
-          </a:xfrm>
-          <a:prstGeom prst="rect">
-            <a:avLst/>
-          </a:prstGeom>
-          <a:noFill/>
-          <a:ln/>
-        </p:spPr>
-        <p:txBody>
-          <a:bodyPr wrap="square" rtlCol="0" anchor="ctr"/>
-          <a:lstStyle/>
-          <a:p>
-            <a:pPr marL="0" indent="0">
-              <a:buNone/>
-            </a:pPr>
-            <a:r>
-              <a:rPr lang="en-US" sz="1200" dirty="0">
-                <a:solidFill>
-                  <a:srgbClr val="17383B"/>
-                </a:solidFill>
-                <a:latin typeface="Arial" pitchFamily="34" charset="0"/>
-                <a:ea typeface="Arial" pitchFamily="34" charset="-122"/>
-                <a:cs typeface="Arial" pitchFamily="34" charset="-120"/>
-              </a:rPr>
-              <a:t>Build a recursive-descent / LL(1) parser from the grammar</a:t>
-            </a:r>
-            <a:endParaRPr lang="en-US" sz="1200" dirty="0"/>
-          </a:p>
-        </p:txBody>
-      </p:sp>
-      <p:sp>
-        <p:nvSpPr>
-          <p:cNvPr id="14" name="Shape 12"/>
-          <p:cNvSpPr/>
-          <p:nvPr/>
-        </p:nvSpPr>
-        <p:spPr>
-          <a:xfrm>
-            <a:off x="548640" y="3803904"/>
-            <a:ext cx="310896" cy="310896"/>
-          </a:xfrm>
-          <a:prstGeom prst="ellipse">
-            <a:avLst/>
-          </a:prstGeom>
-          <a:solidFill>
-            <a:srgbClr val="028090"/>
-          </a:solidFill>
-          <a:ln/>
-        </p:spPr>
-      </p:sp>
-      <p:sp>
-        <p:nvSpPr>
-          <p:cNvPr id="15" name="Text 13"/>
-          <p:cNvSpPr/>
-          <p:nvPr/>
-        </p:nvSpPr>
-        <p:spPr>
-          <a:xfrm>
-            <a:off x="548640" y="3803904"/>
-            <a:ext cx="310896" cy="310896"/>
-          </a:xfrm>
-          <a:prstGeom prst="rect">
-            <a:avLst/>
-          </a:prstGeom>
-          <a:noFill/>
-          <a:ln/>
-        </p:spPr>
-        <p:txBody>
-          <a:bodyPr wrap="square" rtlCol="0" anchor="ctr"/>
-          <a:lstStyle/>
-          <a:p>
-            <a:pPr marL="0" indent="0" algn="ctr">
-              <a:buNone/>
-            </a:pPr>
-            <a:r>
-              <a:rPr lang="en-US" sz="1100" b="1" dirty="0">
-                <a:solidFill>
-                  <a:srgbClr val="FFFFFF"/>
-                </a:solidFill>
-                <a:latin typeface="Arial" pitchFamily="34" charset="0"/>
-                <a:ea typeface="Arial" pitchFamily="34" charset="-122"/>
-                <a:cs typeface="Arial" pitchFamily="34" charset="-120"/>
-              </a:rPr>
-              <a:t>4</a:t>
-            </a:r>
-            <a:endParaRPr lang="en-US" sz="1100" dirty="0"/>
-          </a:p>
-        </p:txBody>
-      </p:sp>
-      <p:sp>
-        <p:nvSpPr>
-          <p:cNvPr id="16" name="Text 14"/>
-          <p:cNvSpPr/>
-          <p:nvPr/>
-        </p:nvSpPr>
-        <p:spPr>
-          <a:xfrm>
-            <a:off x="1005840" y="3785616"/>
-            <a:ext cx="6126480" cy="365760"/>
-          </a:xfrm>
-          <a:prstGeom prst="rect">
-            <a:avLst/>
-          </a:prstGeom>
-          <a:noFill/>
-          <a:ln/>
-        </p:spPr>
-        <p:txBody>
-          <a:bodyPr wrap="square" rtlCol="0" anchor="ctr"/>
-          <a:lstStyle/>
-          <a:p>
-            <a:pPr marL="0" indent="0">
-              <a:buNone/>
-            </a:pPr>
-            <a:r>
-              <a:rPr lang="en-US" sz="1200" dirty="0">
-                <a:solidFill>
-                  <a:srgbClr val="17383B"/>
-                </a:solidFill>
-                <a:latin typeface="Arial" pitchFamily="34" charset="0"/>
-                <a:ea typeface="Arial" pitchFamily="34" charset="-122"/>
-                <a:cs typeface="Arial" pitchFamily="34" charset="-120"/>
-              </a:rPr>
-              <a:t>Attempt derivation — accept input if grammar rules are satisfied</a:t>
-            </a:r>
-            <a:endParaRPr lang="en-US" sz="1200" dirty="0"/>
-          </a:p>
-        </p:txBody>
-      </p:sp>
-      <p:sp>
-        <p:nvSpPr>
-          <p:cNvPr id="17" name="Shape 15"/>
-          <p:cNvSpPr/>
-          <p:nvPr/>
-        </p:nvSpPr>
-        <p:spPr>
-          <a:xfrm>
-            <a:off x="548640" y="4462272"/>
-            <a:ext cx="310896" cy="310896"/>
-          </a:xfrm>
-          <a:prstGeom prst="ellipse">
-            <a:avLst/>
-          </a:prstGeom>
-          <a:solidFill>
-            <a:srgbClr val="00A896"/>
-          </a:solidFill>
-          <a:ln/>
-        </p:spPr>
-      </p:sp>
-      <p:sp>
-        <p:nvSpPr>
-          <p:cNvPr id="18" name="Text 16"/>
-          <p:cNvSpPr/>
-          <p:nvPr/>
-        </p:nvSpPr>
-        <p:spPr>
-          <a:xfrm>
-            <a:off x="548640" y="4462272"/>
-            <a:ext cx="310896" cy="310896"/>
-          </a:xfrm>
-          <a:prstGeom prst="rect">
-            <a:avLst/>
-          </a:prstGeom>
-          <a:noFill/>
-          <a:ln/>
-        </p:spPr>
-        <p:txBody>
-          <a:bodyPr wrap="square" rtlCol="0" anchor="ctr"/>
-          <a:lstStyle/>
-          <a:p>
-            <a:pPr marL="0" indent="0" algn="ctr">
-              <a:buNone/>
-            </a:pPr>
-            <a:r>
-              <a:rPr lang="en-US" sz="1100" b="1" dirty="0">
-                <a:solidFill>
-                  <a:srgbClr val="FFFFFF"/>
-                </a:solidFill>
-                <a:latin typeface="Arial" pitchFamily="34" charset="0"/>
-                <a:ea typeface="Arial" pitchFamily="34" charset="-122"/>
-                <a:cs typeface="Arial" pitchFamily="34" charset="-120"/>
-              </a:rPr>
-              <a:t>5</a:t>
-            </a:r>
-            <a:endParaRPr lang="en-US" sz="1100" dirty="0"/>
-          </a:p>
-        </p:txBody>
-      </p:sp>
-      <p:sp>
-        <p:nvSpPr>
-          <p:cNvPr id="19" name="Text 17"/>
-          <p:cNvSpPr/>
-          <p:nvPr/>
-        </p:nvSpPr>
-        <p:spPr>
-          <a:xfrm>
-            <a:off x="1005840" y="4443984"/>
-            <a:ext cx="6126480" cy="365760"/>
-          </a:xfrm>
-          <a:prstGeom prst="rect">
-            <a:avLst/>
-          </a:prstGeom>
-          <a:noFill/>
-          <a:ln/>
-        </p:spPr>
-        <p:txBody>
-          <a:bodyPr wrap="square" rtlCol="0" anchor="ctr"/>
-          <a:lstStyle/>
-          <a:p>
-            <a:pPr marL="0" indent="0">
-              <a:buNone/>
-            </a:pPr>
-            <a:r>
-              <a:rPr lang="en-US" sz="1200" dirty="0">
-                <a:solidFill>
-                  <a:srgbClr val="17383B"/>
-                </a:solidFill>
-                <a:latin typeface="Arial" pitchFamily="34" charset="0"/>
-                <a:ea typeface="Arial" pitchFamily="34" charset="-122"/>
-                <a:cs typeface="Arial" pitchFamily="34" charset="-120"/>
-              </a:rPr>
-              <a:t>Generate a parse tree and extract matched sub-patterns</a:t>
-            </a:r>
-            <a:endParaRPr lang="en-US" sz="1200" dirty="0"/>
-          </a:p>
-        </p:txBody>
-      </p:sp>
-      <p:sp>
-        <p:nvSpPr>
-          <p:cNvPr id="20" name="Shape 18"/>
-          <p:cNvSpPr/>
-          <p:nvPr/>
-        </p:nvSpPr>
-        <p:spPr>
-          <a:xfrm>
-            <a:off x="7635240" y="1417320"/>
-            <a:ext cx="4023360" cy="4892040"/>
-          </a:xfrm>
-          <a:prstGeom prst="roundRect">
-            <a:avLst>
-              <a:gd name="adj" fmla="val 2273"/>
-            </a:avLst>
-          </a:prstGeom>
-          <a:solidFill>
-            <a:srgbClr val="0B3033"/>
-          </a:solidFill>
-          <a:ln/>
-        </p:spPr>
-      </p:sp>
-      <p:sp>
-        <p:nvSpPr>
-          <p:cNvPr id="21" name="Text 19"/>
-          <p:cNvSpPr/>
-          <p:nvPr/>
-        </p:nvSpPr>
-        <p:spPr>
-          <a:xfrm>
-            <a:off x="7909560" y="1645920"/>
-            <a:ext cx="3474720" cy="274320"/>
-          </a:xfrm>
-          <a:prstGeom prst="rect">
-            <a:avLst/>
-          </a:prstGeom>
-          <a:noFill/>
-          <a:ln/>
-        </p:spPr>
-        <p:txBody>
-          <a:bodyPr wrap="square" rtlCol="0" anchor="ctr"/>
-          <a:lstStyle/>
-          <a:p>
-            <a:pPr marL="0" indent="0">
-              <a:buNone/>
-            </a:pPr>
-            <a:r>
-              <a:rPr lang="en-US" sz="1000" b="1" kern="0" spc="150" dirty="0">
-                <a:solidFill>
-                  <a:srgbClr val="02C39A"/>
-                </a:solidFill>
-                <a:latin typeface="Arial" pitchFamily="34" charset="0"/>
-                <a:ea typeface="Arial" pitchFamily="34" charset="-122"/>
-                <a:cs typeface="Arial" pitchFamily="34" charset="-120"/>
-              </a:rPr>
-              <a:t>TECH STACK</a:t>
-            </a:r>
-            <a:endParaRPr lang="en-US" sz="1000" dirty="0"/>
-          </a:p>
-        </p:txBody>
-      </p:sp>
-      <p:sp>
-        <p:nvSpPr>
-          <p:cNvPr id="22" name="Shape 20"/>
-          <p:cNvSpPr/>
-          <p:nvPr/>
-        </p:nvSpPr>
-        <p:spPr>
-          <a:xfrm>
-            <a:off x="7909560" y="2103120"/>
-            <a:ext cx="457200" cy="457200"/>
-          </a:xfrm>
-          <a:prstGeom prst="ellipse">
-            <a:avLst/>
-          </a:prstGeom>
-          <a:solidFill>
-            <a:srgbClr val="17383B"/>
-          </a:solidFill>
-          <a:ln/>
-        </p:spPr>
-      </p:sp>
-      <p:pic>
-        <p:nvPicPr>
-          <p:cNvPr id="23" name="Image 0" descr="/home/claude/icons_white/python.png"/>
-          <p:cNvPicPr>
-            <a:picLocks noChangeAspect="1"/>
-          </p:cNvPicPr>
-          <p:nvPr/>
-        </p:nvPicPr>
-        <p:blipFill>
-          <a:blip r:embed="rId3"/>
-          <a:stretch>
-            <a:fillRect/>
-          </a:stretch>
-        </p:blipFill>
-        <p:spPr>
-          <a:xfrm>
-            <a:off x="7973568" y="2167128"/>
-            <a:ext cx="329184" cy="329184"/>
-          </a:xfrm>
-          <a:prstGeom prst="rect">
-            <a:avLst/>
-          </a:prstGeom>
-        </p:spPr>
-      </p:pic>
-      <p:sp>
-        <p:nvSpPr>
-          <p:cNvPr id="24" name="Text 21"/>
-          <p:cNvSpPr/>
-          <p:nvPr/>
-        </p:nvSpPr>
-        <p:spPr>
-          <a:xfrm>
-            <a:off x="8549640" y="2075688"/>
-            <a:ext cx="2834640" cy="274320"/>
-          </a:xfrm>
-          <a:prstGeom prst="rect">
-            <a:avLst/>
-          </a:prstGeom>
-          <a:noFill/>
-          <a:ln/>
-        </p:spPr>
-        <p:txBody>
-          <a:bodyPr wrap="square" rtlCol="0" anchor="ctr"/>
-          <a:lstStyle/>
-          <a:p>
-            <a:pPr marL="0" indent="0">
-              <a:buNone/>
-            </a:pPr>
-            <a:r>
-              <a:rPr lang="en-US" sz="1250" b="1" dirty="0">
-                <a:solidFill>
-                  <a:srgbClr val="FFFFFF"/>
-                </a:solidFill>
-                <a:latin typeface="Arial" pitchFamily="34" charset="0"/>
-                <a:ea typeface="Arial" pitchFamily="34" charset="-122"/>
-                <a:cs typeface="Arial" pitchFamily="34" charset="-120"/>
-              </a:rPr>
-              <a:t>Python</a:t>
-            </a:r>
-            <a:endParaRPr lang="en-US" sz="1250" dirty="0"/>
-          </a:p>
-        </p:txBody>
-      </p:sp>
-      <p:sp>
-        <p:nvSpPr>
-          <p:cNvPr id="25" name="Text 22"/>
-          <p:cNvSpPr/>
-          <p:nvPr/>
-        </p:nvSpPr>
-        <p:spPr>
-          <a:xfrm>
-            <a:off x="8549640" y="2322576"/>
-            <a:ext cx="2834640" cy="228600"/>
-          </a:xfrm>
-          <a:prstGeom prst="rect">
-            <a:avLst/>
-          </a:prstGeom>
-          <a:noFill/>
-          <a:ln/>
-        </p:spPr>
-        <p:txBody>
-          <a:bodyPr wrap="square" rtlCol="0" anchor="ctr"/>
-          <a:lstStyle/>
-          <a:p>
-            <a:pPr marL="0" indent="0">
-              <a:buNone/>
-            </a:pPr>
-            <a:r>
-              <a:rPr lang="en-US" sz="950" dirty="0">
-                <a:solidFill>
-                  <a:srgbClr val="9CC2C2"/>
-                </a:solidFill>
-                <a:latin typeface="Arial" pitchFamily="34" charset="0"/>
-                <a:ea typeface="Arial" pitchFamily="34" charset="-122"/>
-                <a:cs typeface="Arial" pitchFamily="34" charset="-120"/>
-              </a:rPr>
-              <a:t>Core language</a:t>
-            </a:r>
-            <a:endParaRPr lang="en-US" sz="950" dirty="0"/>
-          </a:p>
-        </p:txBody>
-      </p:sp>
-      <p:sp>
-        <p:nvSpPr>
-          <p:cNvPr id="26" name="Shape 23"/>
-          <p:cNvSpPr/>
-          <p:nvPr/>
-        </p:nvSpPr>
-        <p:spPr>
-          <a:xfrm>
-            <a:off x="7909560" y="2852928"/>
-            <a:ext cx="457200" cy="457200"/>
-          </a:xfrm>
-          <a:prstGeom prst="ellipse">
-            <a:avLst/>
-          </a:prstGeom>
-          <a:solidFill>
-            <a:srgbClr val="17383B"/>
-          </a:solidFill>
-          <a:ln/>
-        </p:spPr>
-      </p:sp>
-      <p:pic>
-        <p:nvPicPr>
-          <p:cNvPr id="27" name="Image 1" descr="/home/claude/icons_white/code.png"/>
-          <p:cNvPicPr>
-            <a:picLocks noChangeAspect="1"/>
-          </p:cNvPicPr>
-          <p:nvPr/>
-        </p:nvPicPr>
-        <p:blipFill>
-          <a:blip r:embed="rId4"/>
-          <a:stretch>
-            <a:fillRect/>
-          </a:stretch>
-        </p:blipFill>
-        <p:spPr>
-          <a:xfrm>
-            <a:off x="7973568" y="2916936"/>
-            <a:ext cx="329184" cy="329184"/>
-          </a:xfrm>
-          <a:prstGeom prst="rect">
-            <a:avLst/>
-          </a:prstGeom>
-        </p:spPr>
-      </p:pic>
-      <p:sp>
-        <p:nvSpPr>
-          <p:cNvPr id="28" name="Text 24"/>
-          <p:cNvSpPr/>
-          <p:nvPr/>
-        </p:nvSpPr>
-        <p:spPr>
-          <a:xfrm>
-            <a:off x="8549640" y="2825496"/>
-            <a:ext cx="2834640" cy="274320"/>
-          </a:xfrm>
-          <a:prstGeom prst="rect">
-            <a:avLst/>
-          </a:prstGeom>
-          <a:noFill/>
-          <a:ln/>
-        </p:spPr>
-        <p:txBody>
-          <a:bodyPr wrap="square" rtlCol="0" anchor="ctr"/>
-          <a:lstStyle/>
-          <a:p>
-            <a:pPr marL="0" indent="0">
-              <a:buNone/>
-            </a:pPr>
-            <a:r>
-              <a:rPr lang="en-US" sz="1250" b="1" dirty="0">
-                <a:solidFill>
-                  <a:srgbClr val="FFFFFF"/>
-                </a:solidFill>
-                <a:latin typeface="Arial" pitchFamily="34" charset="0"/>
-                <a:ea typeface="Arial" pitchFamily="34" charset="-122"/>
-                <a:cs typeface="Arial" pitchFamily="34" charset="-120"/>
-              </a:rPr>
-              <a:t>PLY / ANTLR</a:t>
-            </a:r>
-            <a:endParaRPr lang="en-US" sz="1250" dirty="0"/>
-          </a:p>
-        </p:txBody>
-      </p:sp>
-      <p:sp>
-        <p:nvSpPr>
-          <p:cNvPr id="29" name="Text 25"/>
-          <p:cNvSpPr/>
-          <p:nvPr/>
-        </p:nvSpPr>
-        <p:spPr>
-          <a:xfrm>
-            <a:off x="8549640" y="3072384"/>
-            <a:ext cx="2834640" cy="228600"/>
-          </a:xfrm>
-          <a:prstGeom prst="rect">
-            <a:avLst/>
-          </a:prstGeom>
-          <a:noFill/>
-          <a:ln/>
-        </p:spPr>
-        <p:txBody>
-          <a:bodyPr wrap="square" rtlCol="0" anchor="ctr"/>
-          <a:lstStyle/>
-          <a:p>
-            <a:pPr marL="0" indent="0">
-              <a:buNone/>
-            </a:pPr>
-            <a:r>
-              <a:rPr lang="en-US" sz="950" dirty="0">
-                <a:solidFill>
-                  <a:srgbClr val="9CC2C2"/>
-                </a:solidFill>
-                <a:latin typeface="Arial" pitchFamily="34" charset="0"/>
-                <a:ea typeface="Arial" pitchFamily="34" charset="-122"/>
-                <a:cs typeface="Arial" pitchFamily="34" charset="-120"/>
-              </a:rPr>
-              <a:t>Parser generator</a:t>
-            </a:r>
-            <a:endParaRPr lang="en-US" sz="950" dirty="0"/>
-          </a:p>
-        </p:txBody>
-      </p:sp>
-      <p:sp>
-        <p:nvSpPr>
-          <p:cNvPr id="30" name="Shape 26"/>
-          <p:cNvSpPr/>
-          <p:nvPr/>
-        </p:nvSpPr>
-        <p:spPr>
-          <a:xfrm>
-            <a:off x="7909560" y="3602736"/>
-            <a:ext cx="457200" cy="457200"/>
-          </a:xfrm>
-          <a:prstGeom prst="ellipse">
-            <a:avLst/>
-          </a:prstGeom>
-          <a:solidFill>
-            <a:srgbClr val="17383B"/>
-          </a:solidFill>
-          <a:ln/>
-        </p:spPr>
-      </p:sp>
-      <p:pic>
-        <p:nvPicPr>
-          <p:cNvPr id="31" name="Image 2" descr="/home/claude/icons_white/listCheck.png"/>
-          <p:cNvPicPr>
-            <a:picLocks noChangeAspect="1"/>
-          </p:cNvPicPr>
-          <p:nvPr/>
-        </p:nvPicPr>
-        <p:blipFill>
-          <a:blip r:embed="rId5"/>
-          <a:stretch>
-            <a:fillRect/>
-          </a:stretch>
-        </p:blipFill>
-        <p:spPr>
-          <a:xfrm>
-            <a:off x="7973568" y="3666744"/>
-            <a:ext cx="329184" cy="329184"/>
-          </a:xfrm>
-          <a:prstGeom prst="rect">
-            <a:avLst/>
-          </a:prstGeom>
-        </p:spPr>
-      </p:pic>
-      <p:sp>
-        <p:nvSpPr>
-          <p:cNvPr id="32" name="Text 27"/>
-          <p:cNvSpPr/>
-          <p:nvPr/>
-        </p:nvSpPr>
-        <p:spPr>
-          <a:xfrm>
-            <a:off x="8549640" y="3575304"/>
-            <a:ext cx="2834640" cy="274320"/>
-          </a:xfrm>
-          <a:prstGeom prst="rect">
-            <a:avLst/>
-          </a:prstGeom>
-          <a:noFill/>
-          <a:ln/>
-        </p:spPr>
-        <p:txBody>
-          <a:bodyPr wrap="square" rtlCol="0" anchor="ctr"/>
-          <a:lstStyle/>
-          <a:p>
-            <a:pPr marL="0" indent="0">
-              <a:buNone/>
-            </a:pPr>
-            <a:r>
-              <a:rPr lang="en-US" sz="1250" b="1" dirty="0">
-                <a:solidFill>
-                  <a:srgbClr val="FFFFFF"/>
-                </a:solidFill>
-                <a:latin typeface="Arial" pitchFamily="34" charset="0"/>
-                <a:ea typeface="Arial" pitchFamily="34" charset="-122"/>
-                <a:cs typeface="Arial" pitchFamily="34" charset="-120"/>
-              </a:rPr>
-              <a:t>Regex module</a:t>
-            </a:r>
-            <a:endParaRPr lang="en-US" sz="1250" dirty="0"/>
-          </a:p>
-        </p:txBody>
-      </p:sp>
-      <p:sp>
-        <p:nvSpPr>
-          <p:cNvPr id="33" name="Text 28"/>
-          <p:cNvSpPr/>
-          <p:nvPr/>
-        </p:nvSpPr>
-        <p:spPr>
-          <a:xfrm>
-            <a:off x="8549640" y="3822192"/>
-            <a:ext cx="2834640" cy="228600"/>
-          </a:xfrm>
-          <a:prstGeom prst="rect">
-            <a:avLst/>
-          </a:prstGeom>
-          <a:noFill/>
-          <a:ln/>
-        </p:spPr>
-        <p:txBody>
-          <a:bodyPr wrap="square" rtlCol="0" anchor="ctr"/>
-          <a:lstStyle/>
-          <a:p>
-            <a:pPr marL="0" indent="0">
-              <a:buNone/>
-            </a:pPr>
-            <a:r>
-              <a:rPr lang="en-US" sz="950" dirty="0">
-                <a:solidFill>
-                  <a:srgbClr val="9CC2C2"/>
-                </a:solidFill>
-                <a:latin typeface="Arial" pitchFamily="34" charset="0"/>
-                <a:ea typeface="Arial" pitchFamily="34" charset="-122"/>
-                <a:cs typeface="Arial" pitchFamily="34" charset="-120"/>
-              </a:rPr>
-              <a:t>Lexer / tokenizer</a:t>
-            </a:r>
-            <a:endParaRPr lang="en-US" sz="950" dirty="0"/>
-          </a:p>
-        </p:txBody>
-      </p:sp>
-      <p:sp>
-        <p:nvSpPr>
-          <p:cNvPr id="34" name="Shape 29"/>
-          <p:cNvSpPr/>
-          <p:nvPr/>
-        </p:nvSpPr>
-        <p:spPr>
-          <a:xfrm>
-            <a:off x="7909560" y="4352544"/>
-            <a:ext cx="457200" cy="457200"/>
-          </a:xfrm>
-          <a:prstGeom prst="ellipse">
-            <a:avLst/>
-          </a:prstGeom>
-          <a:solidFill>
-            <a:srgbClr val="17383B"/>
-          </a:solidFill>
-          <a:ln/>
-        </p:spPr>
-      </p:sp>
-      <p:pic>
-        <p:nvPicPr>
-          <p:cNvPr id="35" name="Image 3" descr="/home/claude/icons_white/diagram.png"/>
-          <p:cNvPicPr>
-            <a:picLocks noChangeAspect="1"/>
-          </p:cNvPicPr>
-          <p:nvPr/>
-        </p:nvPicPr>
-        <p:blipFill>
-          <a:blip r:embed="rId6"/>
-          <a:stretch>
-            <a:fillRect/>
-          </a:stretch>
-        </p:blipFill>
-        <p:spPr>
-          <a:xfrm>
-            <a:off x="7973568" y="4416552"/>
-            <a:ext cx="329184" cy="329184"/>
-          </a:xfrm>
-          <a:prstGeom prst="rect">
-            <a:avLst/>
-          </a:prstGeom>
-        </p:spPr>
-      </p:pic>
-      <p:sp>
-        <p:nvSpPr>
-          <p:cNvPr id="36" name="Text 30"/>
-          <p:cNvSpPr/>
-          <p:nvPr/>
-        </p:nvSpPr>
-        <p:spPr>
-          <a:xfrm>
-            <a:off x="8549640" y="4325112"/>
-            <a:ext cx="2834640" cy="274320"/>
-          </a:xfrm>
-          <a:prstGeom prst="rect">
-            <a:avLst/>
-          </a:prstGeom>
-          <a:noFill/>
-          <a:ln/>
-        </p:spPr>
-        <p:txBody>
-          <a:bodyPr wrap="square" rtlCol="0" anchor="ctr"/>
-          <a:lstStyle/>
-          <a:p>
-            <a:pPr marL="0" indent="0">
-              <a:buNone/>
-            </a:pPr>
-            <a:r>
-              <a:rPr lang="en-US" sz="1250" b="1" dirty="0">
-                <a:solidFill>
-                  <a:srgbClr val="FFFFFF"/>
-                </a:solidFill>
-                <a:latin typeface="Arial" pitchFamily="34" charset="0"/>
-                <a:ea typeface="Arial" pitchFamily="34" charset="-122"/>
-                <a:cs typeface="Arial" pitchFamily="34" charset="-120"/>
-              </a:rPr>
-              <a:t>NLTK (CFG)</a:t>
-            </a:r>
-            <a:endParaRPr lang="en-US" sz="1250" dirty="0"/>
-          </a:p>
-        </p:txBody>
-      </p:sp>
-      <p:sp>
-        <p:nvSpPr>
-          <p:cNvPr id="37" name="Text 31"/>
-          <p:cNvSpPr/>
-          <p:nvPr/>
-        </p:nvSpPr>
-        <p:spPr>
-          <a:xfrm>
-            <a:off x="8549640" y="4572000"/>
-            <a:ext cx="2834640" cy="228600"/>
-          </a:xfrm>
-          <a:prstGeom prst="rect">
-            <a:avLst/>
-          </a:prstGeom>
-          <a:noFill/>
-          <a:ln/>
-        </p:spPr>
-        <p:txBody>
-          <a:bodyPr wrap="square" rtlCol="0" anchor="ctr"/>
-          <a:lstStyle/>
-          <a:p>
-            <a:pPr marL="0" indent="0">
-              <a:buNone/>
-            </a:pPr>
-            <a:r>
-              <a:rPr lang="en-US" sz="950" dirty="0">
-                <a:solidFill>
-                  <a:srgbClr val="9CC2C2"/>
-                </a:solidFill>
-                <a:latin typeface="Arial" pitchFamily="34" charset="0"/>
-                <a:ea typeface="Arial" pitchFamily="34" charset="-122"/>
-                <a:cs typeface="Arial" pitchFamily="34" charset="-120"/>
-              </a:rPr>
-              <a:t>Grammar-based parsing</a:t>
-            </a:r>
-            <a:endParaRPr lang="en-US" sz="950" dirty="0"/>
-          </a:p>
-        </p:txBody>
-      </p:sp>
-      <p:sp>
-        <p:nvSpPr>
-          <p:cNvPr id="38" name="Shape 32"/>
-          <p:cNvSpPr/>
-          <p:nvPr/>
-        </p:nvSpPr>
-        <p:spPr>
-          <a:xfrm>
-            <a:off x="7909560" y="5102352"/>
-            <a:ext cx="457200" cy="457200"/>
-          </a:xfrm>
-          <a:prstGeom prst="ellipse">
-            <a:avLst/>
-          </a:prstGeom>
-          <a:solidFill>
-            <a:srgbClr val="17383B"/>
-          </a:solidFill>
-          <a:ln/>
-        </p:spPr>
-      </p:sp>
-      <p:pic>
-        <p:nvPicPr>
-          <p:cNvPr id="39" name="Image 4" descr="/home/claude/icons_white/sitemap.png"/>
-          <p:cNvPicPr>
-            <a:picLocks noChangeAspect="1"/>
-          </p:cNvPicPr>
-          <p:nvPr/>
-        </p:nvPicPr>
-        <p:blipFill>
-          <a:blip r:embed="rId7"/>
-          <a:stretch>
-            <a:fillRect/>
-          </a:stretch>
-        </p:blipFill>
-        <p:spPr>
-          <a:xfrm>
-            <a:off x="7973568" y="5166360"/>
-            <a:ext cx="329184" cy="329184"/>
-          </a:xfrm>
-          <a:prstGeom prst="rect">
-            <a:avLst/>
-          </a:prstGeom>
-        </p:spPr>
-      </p:pic>
-      <p:sp>
-        <p:nvSpPr>
-          <p:cNvPr id="40" name="Text 33"/>
-          <p:cNvSpPr/>
-          <p:nvPr/>
-        </p:nvSpPr>
-        <p:spPr>
-          <a:xfrm>
-            <a:off x="8549640" y="5074920"/>
-            <a:ext cx="2834640" cy="274320"/>
-          </a:xfrm>
-          <a:prstGeom prst="rect">
-            <a:avLst/>
-          </a:prstGeom>
-          <a:noFill/>
-          <a:ln/>
-        </p:spPr>
-        <p:txBody>
-          <a:bodyPr wrap="square" rtlCol="0" anchor="ctr"/>
-          <a:lstStyle/>
-          <a:p>
-            <a:pPr marL="0" indent="0">
-              <a:buNone/>
-            </a:pPr>
-            <a:r>
-              <a:rPr lang="en-US" sz="1250" b="1" dirty="0">
-                <a:solidFill>
-                  <a:srgbClr val="FFFFFF"/>
-                </a:solidFill>
-                <a:latin typeface="Arial" pitchFamily="34" charset="0"/>
-                <a:ea typeface="Arial" pitchFamily="34" charset="-122"/>
-                <a:cs typeface="Arial" pitchFamily="34" charset="-120"/>
-              </a:rPr>
-              <a:t>Graphviz</a:t>
-            </a:r>
-            <a:endParaRPr lang="en-US" sz="1250" dirty="0"/>
-          </a:p>
-        </p:txBody>
-      </p:sp>
-      <p:sp>
-        <p:nvSpPr>
-          <p:cNvPr id="41" name="Text 34"/>
-          <p:cNvSpPr/>
-          <p:nvPr/>
-        </p:nvSpPr>
-        <p:spPr>
-          <a:xfrm>
-            <a:off x="8549640" y="5321808"/>
-            <a:ext cx="2834640" cy="228600"/>
-          </a:xfrm>
-          <a:prstGeom prst="rect">
-            <a:avLst/>
-          </a:prstGeom>
-          <a:noFill/>
-          <a:ln/>
-        </p:spPr>
-        <p:txBody>
-          <a:bodyPr wrap="square" rtlCol="0" anchor="ctr"/>
-          <a:lstStyle/>
-          <a:p>
-            <a:pPr marL="0" indent="0">
-              <a:buNone/>
-            </a:pPr>
-            <a:r>
-              <a:rPr lang="en-US" sz="950" dirty="0">
-                <a:solidFill>
-                  <a:srgbClr val="9CC2C2"/>
-                </a:solidFill>
-                <a:latin typeface="Arial" pitchFamily="34" charset="0"/>
-                <a:ea typeface="Arial" pitchFamily="34" charset="-122"/>
-                <a:cs typeface="Arial" pitchFamily="34" charset="-120"/>
-              </a:rPr>
-              <a:t>Parse tree visualization</a:t>
-            </a:r>
-            <a:endParaRPr lang="en-US" sz="950" dirty="0"/>
-          </a:p>
-        </p:txBody>
-      </p:sp>
-      <p:sp>
-        <p:nvSpPr>
-          <p:cNvPr id="43" name="Text 36"/>
-          <p:cNvSpPr/>
-          <p:nvPr/>
-        </p:nvSpPr>
-        <p:spPr>
-          <a:xfrm>
-            <a:off x="7616952" y="6537960"/>
-            <a:ext cx="4114800" cy="274320"/>
-          </a:xfrm>
-          <a:prstGeom prst="rect">
-            <a:avLst/>
-          </a:prstGeom>
-          <a:noFill/>
-          <a:ln/>
-        </p:spPr>
-        <p:txBody>
-          <a:bodyPr wrap="square" rtlCol="0" anchor="ctr"/>
-          <a:lstStyle/>
-          <a:p>
-            <a:pPr marL="0" indent="0" algn="r">
-              <a:buNone/>
-            </a:pPr>
-            <a:r>
-              <a:rPr lang="en-US" sz="800" kern="0" spc="100" dirty="0">
-                <a:solidFill>
-                  <a:srgbClr val="5C7A7D"/>
-                </a:solidFill>
-                <a:latin typeface="Arial" pitchFamily="34" charset="0"/>
-                <a:ea typeface="Arial" pitchFamily="34" charset="-122"/>
-                <a:cs typeface="Arial" pitchFamily="34" charset="-120"/>
-              </a:rPr>
-              <a:t>GRAMMAR-BASED PATTERN RECOGNITION</a:t>
-            </a:r>
-            <a:endParaRPr lang="en-US" sz="800" dirty="0"/>
-          </a:p>
-        </p:txBody>
-      </p:sp>
-    </p:spTree>
-  </p:cSld>
-  <p:clrMapOvr>
-    <a:masterClrMapping/>
-  </p:clrMapOvr>
-</p:sld>
-</file>
-
-<file path=ppt/slides/slide5.xml><?xml version="1.0" encoding="utf-8"?>
 <p:sld xmlns:a="http://schemas.openxmlformats.org/drawingml/2006/main" xmlns:r="http://schemas.openxmlformats.org/officeDocument/2006/relationships" xmlns:p="http://schemas.openxmlformats.org/presentationml/2006/main">
   <p:cSld name="Slide 5">
     <p:bg>
@@ -5114,45 +4319,6 @@
       </p:grpSpPr>
       <p:sp>
         <p:nvSpPr>
-          <p:cNvPr id="2" name="Text 0"/>
-          <p:cNvSpPr/>
-          <p:nvPr/>
-        </p:nvSpPr>
-        <p:spPr>
-          <a:xfrm>
-            <a:off x="548640" y="411480"/>
-            <a:ext cx="4572000" cy="274320"/>
-          </a:xfrm>
-          <a:prstGeom prst="rect">
-            <a:avLst/>
-          </a:prstGeom>
-          <a:noFill/>
-          <a:ln/>
-        </p:spPr>
-        <p:txBody>
-          <a:bodyPr wrap="square" rtlCol="0" anchor="ctr"/>
-          <a:lstStyle/>
-          <a:p>
-            <a:pPr marL="0" indent="0">
-              <a:buNone/>
-            </a:pPr>
-            <a:r>
-              <a:rPr lang="en-US" sz="1000" b="1" kern="0" spc="200" dirty="0">
-                <a:solidFill>
-                  <a:srgbClr val="028090"/>
-                </a:solidFill>
-                <a:latin typeface="Arial" pitchFamily="34" charset="0"/>
-                <a:ea typeface="Arial" pitchFamily="34" charset="-122"/>
-                <a:cs typeface="Arial" pitchFamily="34" charset="-120"/>
-              </a:rPr>
-              <a:t>OUTPUT</a:t>
-            </a:r>
-            <a:endParaRPr lang="en-US" sz="1000" dirty="0"/>
-          </a:p>
-        </p:txBody>
-      </p:sp>
-      <p:sp>
-        <p:nvSpPr>
           <p:cNvPr id="3" name="Text 1"/>
           <p:cNvSpPr/>
           <p:nvPr/>
@@ -6375,8 +5541,8 @@
 </p:sld>
 </file>
 
-<file path=ppt/slides/slide7.xml><?xml version="1.0" encoding="utf-8"?>
-<p:sld xmlns:a="http://schemas.openxmlformats.org/drawingml/2006/main" xmlns:p="http://schemas.openxmlformats.org/presentationml/2006/main" xmlns:r="http://schemas.openxmlformats.org/officeDocument/2006/relationships">
+<file path=ppt/slides/slide5.xml><?xml version="1.0" encoding="utf-8"?>
+<p:sld xmlns:a="http://schemas.openxmlformats.org/drawingml/2006/main" xmlns:r="http://schemas.openxmlformats.org/officeDocument/2006/relationships" xmlns:p="http://schemas.openxmlformats.org/presentationml/2006/main">
   <p:cSld>
     <p:bg>
       <p:bgPr>
@@ -6392,17 +5558,24 @@
         <p:cNvGrpSpPr/>
         <p:nvPr/>
       </p:nvGrpSpPr>
-      <p:grpSpPr/>
-      <p:sp>
-        <p:nvSpPr>
-          <p:cNvPr id="2" name="TextBox 1"/>
+      <p:grpSpPr>
+        <a:xfrm>
+          <a:off x="0" y="0"/>
+          <a:ext cx="0" cy="0"/>
+          <a:chOff x="0" y="0"/>
+          <a:chExt cx="0" cy="0"/>
+        </a:xfrm>
+      </p:grpSpPr>
+      <p:sp>
+        <p:nvSpPr>
+          <p:cNvPr id="3" name="TextBox 2"/>
           <p:cNvSpPr txBox="1"/>
           <p:nvPr/>
         </p:nvSpPr>
         <p:spPr>
           <a:xfrm>
-            <a:off x="548640" y="411480"/>
-            <a:ext cx="4572000" cy="274320"/>
+            <a:off x="548640" y="617220"/>
+            <a:ext cx="11094720" cy="520000"/>
           </a:xfrm>
           <a:prstGeom prst="rect">
             <a:avLst/>
@@ -6416,29 +5589,29 @@
           <a:lstStyle/>
           <a:p>
             <a:pPr>
-              <a:defRPr sz="1000" b="1">
-                <a:solidFill>
-                  <a:srgbClr val="028090"/>
+              <a:defRPr sz="2600" b="1">
+                <a:solidFill>
+                  <a:srgbClr val="0B3033"/>
                 </a:solidFill>
                 <a:latin typeface="Arial"/>
               </a:defRPr>
             </a:pPr>
             <a:r>
-              <a:t>PROJECT ROADMAP</a:t>
-            </a:r>
-          </a:p>
-        </p:txBody>
-      </p:sp>
-      <p:sp>
-        <p:nvSpPr>
-          <p:cNvPr id="3" name="TextBox 2"/>
+              <a:t>3-Phase Engineering Progression &amp; Delivery</a:t>
+            </a:r>
+          </a:p>
+        </p:txBody>
+      </p:sp>
+      <p:sp>
+        <p:nvSpPr>
+          <p:cNvPr id="4" name="TextBox 3"/>
           <p:cNvSpPr txBox="1"/>
           <p:nvPr/>
         </p:nvSpPr>
         <p:spPr>
           <a:xfrm>
-            <a:off x="548640" y="685800"/>
-            <a:ext cx="7315200" cy="548640"/>
+            <a:off x="548640" y="1170432"/>
+            <a:ext cx="11094720" cy="320000"/>
           </a:xfrm>
           <a:prstGeom prst="rect">
             <a:avLst/>
@@ -6452,29 +5625,29 @@
           <a:lstStyle/>
           <a:p>
             <a:pPr>
-              <a:defRPr sz="2800" b="1">
-                <a:solidFill>
-                  <a:srgbClr val="0B3033"/>
+              <a:defRPr sz="1100">
+                <a:solidFill>
+                  <a:srgbClr val="5C7A7D"/>
                 </a:solidFill>
                 <a:latin typeface="Arial"/>
               </a:defRPr>
             </a:pPr>
             <a:r>
-              <a:t>Phase-Wise Project Completion</a:t>
-            </a:r>
-          </a:p>
-        </p:txBody>
-      </p:sp>
-      <p:sp>
-        <p:nvSpPr>
-          <p:cNvPr id="4" name="TextBox 3"/>
+              <a:t>Systematic delivery from formal CFG grammars and LL(1) parsing core to validation pipelines, empirical benchmarks, and web studio.</a:t>
+            </a:r>
+          </a:p>
+        </p:txBody>
+      </p:sp>
+      <p:sp>
+        <p:nvSpPr>
+          <p:cNvPr id="5" name="TextBox 4"/>
           <p:cNvSpPr txBox="1"/>
           <p:nvPr/>
         </p:nvSpPr>
         <p:spPr>
           <a:xfrm>
-            <a:off x="548640" y="1234440"/>
-            <a:ext cx="11094720" cy="320000"/>
+            <a:off x="7616952" y="6537960"/>
+            <a:ext cx="4114800" cy="240000"/>
           </a:xfrm>
           <a:prstGeom prst="rect">
             <a:avLst/>
@@ -6488,7 +5661,7 @@
           <a:lstStyle/>
           <a:p>
             <a:pPr>
-              <a:defRPr sz="1100">
+              <a:defRPr sz="800">
                 <a:solidFill>
                   <a:srgbClr val="5C7A7D"/>
                 </a:solidFill>
@@ -6496,24 +5669,26 @@
               </a:defRPr>
             </a:pPr>
             <a:r>
-              <a:t>Structured 3-phase progression from formal CFG engine foundations to visual CLI pipelines and benchmarks.</a:t>
-            </a:r>
-          </a:p>
-        </p:txBody>
-      </p:sp>
-      <p:sp>
-        <p:nvSpPr>
-          <p:cNvPr id="5" name="Rounded Rectangle 4"/>
-          <p:cNvSpPr/>
-          <p:nvPr/>
-        </p:nvSpPr>
-        <p:spPr>
-          <a:xfrm>
-            <a:off x="548640" y="1620000"/>
-            <a:ext cx="3450000" cy="4750000"/>
+              <a:t>GRAMMAR-BASED PATTERN RECOGNITION • CM23042</a:t>
+            </a:r>
+          </a:p>
+        </p:txBody>
+      </p:sp>
+      <p:sp>
+        <p:nvSpPr>
+          <p:cNvPr id="6" name="Rounded Rectangle 5"/>
+          <p:cNvSpPr/>
+          <p:nvPr/>
+        </p:nvSpPr>
+        <p:spPr>
+          <a:xfrm>
+            <a:off x="548640" y="1580000"/>
+            <a:ext cx="3460000" cy="4780000"/>
           </a:xfrm>
           <a:prstGeom prst="roundRect">
-            <a:avLst/>
+            <a:avLst>
+              <a:gd name="adj" fmla="val 7228"/>
+            </a:avLst>
           </a:prstGeom>
           <a:solidFill>
             <a:srgbClr val="FFFFFF"/>
@@ -6543,28 +5718,361 @@
           <a:lstStyle/>
           <a:p>
             <a:pPr algn="ctr"/>
-          </a:p>
-        </p:txBody>
-      </p:sp>
-      <p:sp>
-        <p:nvSpPr>
-          <p:cNvPr id="6" name="Rectangle 5"/>
-          <p:cNvSpPr/>
-          <p:nvPr/>
-        </p:nvSpPr>
-        <p:spPr>
-          <a:xfrm>
-            <a:off x="548640" y="1620000"/>
-            <a:ext cx="3450000" cy="90000"/>
+            <a:endParaRPr/>
+          </a:p>
+        </p:txBody>
+      </p:sp>
+      <p:sp>
+        <p:nvSpPr>
+          <p:cNvPr id="8" name="TextBox 7"/>
+          <p:cNvSpPr txBox="1"/>
+          <p:nvPr/>
+        </p:nvSpPr>
+        <p:spPr>
+          <a:xfrm>
+            <a:off x="768640" y="1770000"/>
+            <a:ext cx="3020000" cy="3924151"/>
           </a:xfrm>
           <a:prstGeom prst="rect">
             <a:avLst/>
           </a:prstGeom>
+          <a:noFill/>
+        </p:spPr>
+        <p:txBody>
+          <a:bodyPr wrap="square" lIns="0" tIns="0" rIns="0" bIns="0">
+            <a:spAutoFit/>
+          </a:bodyPr>
+          <a:lstStyle/>
+          <a:p>
+            <a:r>
+              <a:rPr sz="1000" b="1" dirty="0">
+                <a:solidFill>
+                  <a:srgbClr val="028090"/>
+                </a:solidFill>
+                <a:latin typeface="Arial"/>
+              </a:rPr>
+              <a:t>PHASE 1  •  Week 1
+</a:t>
+            </a:r>
+            <a:r>
+              <a:rPr sz="1000" b="1" dirty="0">
+                <a:solidFill>
+                  <a:srgbClr val="007A6E"/>
+                </a:solidFill>
+                <a:latin typeface="Arial"/>
+              </a:rPr>
+              <a:t>[COMPLETED (100%)]
+</a:t>
+            </a:r>
+          </a:p>
+          <a:p>
+            <a:pPr>
+              <a:spcBef>
+                <a:spcPts val="400"/>
+              </a:spcBef>
+            </a:pPr>
+            <a:r>
+              <a:rPr sz="1000" b="1" dirty="0">
+                <a:solidFill>
+                  <a:srgbClr val="0B3033"/>
+                </a:solidFill>
+                <a:latin typeface="Arial"/>
+              </a:rPr>
+              <a:t>Core Engine &amp; Formal CFG
+</a:t>
+            </a:r>
+          </a:p>
+          <a:p>
+            <a:pPr>
+              <a:spcBef>
+                <a:spcPts val="200"/>
+              </a:spcBef>
+            </a:pPr>
+            <a:r>
+              <a:rPr sz="1000" dirty="0">
+                <a:solidFill>
+                  <a:srgbClr val="5C7A7D"/>
+                </a:solidFill>
+                <a:latin typeface="Arial"/>
+              </a:rPr>
+              <a:t>Formal grammar specification, position-aware tokenizer, and LL(1) recursive-descent parser core.
+</a:t>
+            </a:r>
+          </a:p>
+          <a:p>
+            <a:pPr>
+              <a:spcBef>
+                <a:spcPts val="800"/>
+              </a:spcBef>
+            </a:pPr>
+            <a:r>
+              <a:rPr sz="1000" b="1" dirty="0">
+                <a:solidFill>
+                  <a:srgbClr val="0B3033"/>
+                </a:solidFill>
+                <a:latin typeface="Arial"/>
+              </a:rPr>
+              <a:t>DELIVERABLES &amp; MODULES:
+</a:t>
+            </a:r>
+          </a:p>
+          <a:p>
+            <a:pPr>
+              <a:spcBef>
+                <a:spcPts val="200"/>
+              </a:spcBef>
+            </a:pPr>
+            <a:r>
+              <a:rPr sz="1000" dirty="0">
+                <a:solidFill>
+                  <a:srgbClr val="028090"/>
+                </a:solidFill>
+                <a:latin typeface="Arial"/>
+              </a:rPr>
+              <a:t>▪ </a:t>
+            </a:r>
+            <a:r>
+              <a:rPr sz="1000" b="1" dirty="0">
+                <a:solidFill>
+                  <a:srgbClr val="0B3033"/>
+                </a:solidFill>
+                <a:latin typeface="Arial"/>
+              </a:rPr>
+              <a:t>grammar/</a:t>
+            </a:r>
+            <a:r>
+              <a:rPr sz="1000" b="1" dirty="0" err="1">
+                <a:solidFill>
+                  <a:srgbClr val="0B3033"/>
+                </a:solidFill>
+                <a:latin typeface="Arial"/>
+              </a:rPr>
+              <a:t>email.cfg</a:t>
+            </a:r>
+            <a:r>
+              <a:rPr sz="1000" b="1" dirty="0">
+                <a:solidFill>
+                  <a:srgbClr val="0B3033"/>
+                </a:solidFill>
+                <a:latin typeface="Arial"/>
+              </a:rPr>
+              <a:t>: </a:t>
+            </a:r>
+            <a:r>
+              <a:rPr sz="1000" dirty="0">
+                <a:solidFill>
+                  <a:srgbClr val="5C7A7D"/>
+                </a:solidFill>
+                <a:latin typeface="Arial"/>
+              </a:rPr>
+              <a:t>BNF production rules for RFC email patterns</a:t>
+            </a:r>
+          </a:p>
+          <a:p>
+            <a:pPr>
+              <a:spcBef>
+                <a:spcPts val="200"/>
+              </a:spcBef>
+            </a:pPr>
+            <a:r>
+              <a:rPr sz="1000" dirty="0">
+                <a:solidFill>
+                  <a:srgbClr val="028090"/>
+                </a:solidFill>
+                <a:latin typeface="Arial"/>
+              </a:rPr>
+              <a:t>▪ </a:t>
+            </a:r>
+            <a:r>
+              <a:rPr sz="1000" b="1" dirty="0">
+                <a:solidFill>
+                  <a:srgbClr val="0B3033"/>
+                </a:solidFill>
+                <a:latin typeface="Arial"/>
+              </a:rPr>
+              <a:t>lexer.py: </a:t>
+            </a:r>
+            <a:r>
+              <a:rPr sz="1000" dirty="0">
+                <a:solidFill>
+                  <a:srgbClr val="5C7A7D"/>
+                </a:solidFill>
+                <a:latin typeface="Arial"/>
+              </a:rPr>
+              <a:t>Position-aware tokenizer with offset indexing</a:t>
+            </a:r>
+          </a:p>
+          <a:p>
+            <a:pPr>
+              <a:spcBef>
+                <a:spcPts val="200"/>
+              </a:spcBef>
+            </a:pPr>
+            <a:r>
+              <a:rPr sz="1000" dirty="0">
+                <a:solidFill>
+                  <a:srgbClr val="028090"/>
+                </a:solidFill>
+                <a:latin typeface="Arial"/>
+              </a:rPr>
+              <a:t>▪ </a:t>
+            </a:r>
+            <a:r>
+              <a:rPr sz="1000" b="1" dirty="0">
+                <a:solidFill>
+                  <a:srgbClr val="0B3033"/>
+                </a:solidFill>
+                <a:latin typeface="Arial"/>
+              </a:rPr>
+              <a:t>parser.py: </a:t>
+            </a:r>
+            <a:r>
+              <a:rPr sz="1000" dirty="0">
+                <a:solidFill>
+                  <a:srgbClr val="5C7A7D"/>
+                </a:solidFill>
+                <a:latin typeface="Arial"/>
+              </a:rPr>
+              <a:t>LL(1) recursive-descent predictive parsing</a:t>
+            </a:r>
+          </a:p>
+          <a:p>
+            <a:pPr>
+              <a:spcBef>
+                <a:spcPts val="200"/>
+              </a:spcBef>
+            </a:pPr>
+            <a:r>
+              <a:rPr sz="1000" dirty="0">
+                <a:solidFill>
+                  <a:srgbClr val="028090"/>
+                </a:solidFill>
+                <a:latin typeface="Arial"/>
+              </a:rPr>
+              <a:t>▪ </a:t>
+            </a:r>
+            <a:r>
+              <a:rPr sz="1000" b="1" dirty="0">
+                <a:solidFill>
+                  <a:srgbClr val="0B3033"/>
+                </a:solidFill>
+                <a:latin typeface="Arial"/>
+              </a:rPr>
+              <a:t>Abstract Trees: </a:t>
+            </a:r>
+            <a:r>
+              <a:rPr sz="1000" dirty="0">
+                <a:solidFill>
+                  <a:srgbClr val="5C7A7D"/>
+                </a:solidFill>
+                <a:latin typeface="Arial"/>
+              </a:rPr>
+              <a:t>Explicit </a:t>
+            </a:r>
+            <a:r>
+              <a:rPr sz="1000" dirty="0" err="1">
+                <a:solidFill>
+                  <a:srgbClr val="5C7A7D"/>
+                </a:solidFill>
+                <a:latin typeface="Arial"/>
+              </a:rPr>
+              <a:t>ParseTreeNode</a:t>
+            </a:r>
+            <a:r>
+              <a:rPr sz="1000" dirty="0">
+                <a:solidFill>
+                  <a:srgbClr val="5C7A7D"/>
+                </a:solidFill>
+                <a:latin typeface="Arial"/>
+              </a:rPr>
+              <a:t> hierarchy</a:t>
+            </a:r>
+          </a:p>
+          <a:p>
+            <a:pPr>
+              <a:spcBef>
+                <a:spcPts val="200"/>
+              </a:spcBef>
+            </a:pPr>
+            <a:r>
+              <a:rPr sz="1000" dirty="0">
+                <a:solidFill>
+                  <a:srgbClr val="028090"/>
+                </a:solidFill>
+                <a:latin typeface="Arial"/>
+              </a:rPr>
+              <a:t>▪ </a:t>
+            </a:r>
+            <a:r>
+              <a:rPr sz="1000" b="1" dirty="0">
+                <a:solidFill>
+                  <a:srgbClr val="0B3033"/>
+                </a:solidFill>
+                <a:latin typeface="Arial"/>
+              </a:rPr>
+              <a:t>Deterministic: </a:t>
+            </a:r>
+            <a:r>
+              <a:rPr sz="1000" dirty="0">
+                <a:solidFill>
+                  <a:srgbClr val="5C7A7D"/>
+                </a:solidFill>
+                <a:latin typeface="Arial"/>
+              </a:rPr>
+              <a:t>Zero backtracking &amp; fast linear scan</a:t>
+            </a:r>
+          </a:p>
+          <a:p>
+            <a:pPr>
+              <a:spcBef>
+                <a:spcPts val="1400"/>
+              </a:spcBef>
+            </a:pPr>
+            <a:r>
+              <a:rPr sz="1000" dirty="0">
+                <a:solidFill>
+                  <a:srgbClr val="5C7A7D"/>
+                </a:solidFill>
+                <a:latin typeface="Arial"/>
+              </a:rPr>
+              <a:t>Phase 1 Test Suite
+</a:t>
+            </a:r>
+            <a:r>
+              <a:rPr sz="1000" b="1" dirty="0">
+                <a:solidFill>
+                  <a:srgbClr val="028090"/>
+                </a:solidFill>
+                <a:latin typeface="Arial"/>
+              </a:rPr>
+              <a:t>10/10 Passed (100%)</a:t>
+            </a:r>
+          </a:p>
+        </p:txBody>
+      </p:sp>
+      <p:sp>
+        <p:nvSpPr>
+          <p:cNvPr id="9" name="Rounded Rectangle 8"/>
+          <p:cNvSpPr/>
+          <p:nvPr/>
+        </p:nvSpPr>
+        <p:spPr>
+          <a:xfrm>
+            <a:off x="4368640" y="1580000"/>
+            <a:ext cx="3460000" cy="4780000"/>
+          </a:xfrm>
+          <a:prstGeom prst="roundRect">
+            <a:avLst>
+              <a:gd name="adj" fmla="val 7229"/>
+            </a:avLst>
+          </a:prstGeom>
           <a:solidFill>
-            <a:srgbClr val="028090"/>
+            <a:srgbClr val="FFFFFF"/>
           </a:solidFill>
-          <a:ln>
-            <a:noFill/>
+          <a:ln w="19050">
+            <a:solidFill>
+              <a:srgbClr val="009B8A"/>
+            </a:solidFill>
           </a:ln>
         </p:spPr>
         <p:style>
@@ -6586,19 +6094,20 @@
           <a:lstStyle/>
           <a:p>
             <a:pPr algn="ctr"/>
-          </a:p>
-        </p:txBody>
-      </p:sp>
-      <p:sp>
-        <p:nvSpPr>
-          <p:cNvPr id="7" name="TextBox 6"/>
+            <a:endParaRPr/>
+          </a:p>
+        </p:txBody>
+      </p:sp>
+      <p:sp>
+        <p:nvSpPr>
+          <p:cNvPr id="11" name="TextBox 10"/>
           <p:cNvSpPr txBox="1"/>
           <p:nvPr/>
         </p:nvSpPr>
         <p:spPr>
           <a:xfrm>
-            <a:off x="768640" y="1820000"/>
-            <a:ext cx="3010000" cy="4350000"/>
+            <a:off x="4588640" y="1770000"/>
+            <a:ext cx="3020000" cy="4400000"/>
           </a:xfrm>
           <a:prstGeom prst="rect">
             <a:avLst/>
@@ -6612,17 +6121,17 @@
           <a:lstStyle/>
           <a:p>
             <a:r>
-              <a:rPr sz="950" b="1">
-                <a:solidFill>
-                  <a:srgbClr val="028090"/>
-                </a:solidFill>
-                <a:latin typeface="Arial"/>
-              </a:rPr>
-              <a:t>PHASE 1  •  Week 1
+              <a:rPr sz="1000" b="1" dirty="0">
+                <a:solidFill>
+                  <a:srgbClr val="009B8A"/>
+                </a:solidFill>
+                <a:latin typeface="Arial"/>
+              </a:rPr>
+              <a:t>PHASE 2  •  Weeks 2–3
 </a:t>
             </a:r>
             <a:r>
-              <a:rPr sz="900" b="1">
+              <a:rPr sz="1000" b="1" dirty="0">
                 <a:solidFill>
                   <a:srgbClr val="007A6E"/>
                 </a:solidFill>
@@ -6639,13 +6148,13 @@
               </a:spcBef>
             </a:pPr>
             <a:r>
-              <a:rPr sz="1400" b="1">
+              <a:rPr sz="1000" b="1" dirty="0">
                 <a:solidFill>
                   <a:srgbClr val="0B3033"/>
                 </a:solidFill>
                 <a:latin typeface="Arial"/>
               </a:rPr>
-              <a:t>Core Engine &amp; Foundation
+              <a:t>Validation Engine &amp; Visualizer
 </a:t>
             </a:r>
           </a:p>
@@ -6656,13 +6165,13 @@
               </a:spcBef>
             </a:pPr>
             <a:r>
-              <a:rPr sz="950">
-                <a:solidFill>
-                  <a:srgbClr val="5C7A7D"/>
-                </a:solidFill>
-                <a:latin typeface="Arial"/>
-              </a:rPr>
-              <a:t>Formal grammar specification, lexical tokenizer, and LL(1) parsing core.
+              <a:rPr sz="1000" dirty="0">
+                <a:solidFill>
+                  <a:srgbClr val="5C7A7D"/>
+                </a:solidFill>
+                <a:latin typeface="Arial"/>
+              </a:rPr>
+              <a:t>Verdict classifier, sub-pattern semantic extraction, multi-engine tree rendering, and unified CLI.
 </a:t>
             </a:r>
           </a:p>
@@ -6673,7 +6182,7 @@
               </a:spcBef>
             </a:pPr>
             <a:r>
-              <a:rPr sz="900" b="1">
+              <a:rPr sz="1000" b="1" dirty="0">
                 <a:solidFill>
                   <a:srgbClr val="0B3033"/>
                 </a:solidFill>
@@ -6690,31 +6199,31 @@
               </a:spcBef>
             </a:pPr>
             <a:r>
-              <a:rPr sz="850">
-                <a:solidFill>
-                  <a:srgbClr val="028090"/>
+              <a:rPr sz="1000" dirty="0">
+                <a:solidFill>
+                  <a:srgbClr val="009B8A"/>
                 </a:solidFill>
                 <a:latin typeface="Arial"/>
               </a:rPr>
               <a:t>▪ </a:t>
             </a:r>
             <a:r>
-              <a:rPr sz="900" b="1">
+              <a:rPr sz="1000" b="1" dirty="0">
                 <a:solidFill>
                   <a:srgbClr val="0B3033"/>
                 </a:solidFill>
                 <a:latin typeface="Arial"/>
               </a:rPr>
-              <a:t>grammar/email.cfg: </a:t>
-            </a:r>
-            <a:r>
-              <a:rPr sz="850">
-                <a:solidFill>
-                  <a:srgbClr val="5C7A7D"/>
-                </a:solidFill>
-                <a:latin typeface="Arial"/>
-              </a:rPr>
-              <a:t>CFG production rules</a:t>
+              <a:t>validator.py: </a:t>
+            </a:r>
+            <a:r>
+              <a:rPr sz="1000" dirty="0">
+                <a:solidFill>
+                  <a:srgbClr val="5C7A7D"/>
+                </a:solidFill>
+                <a:latin typeface="Arial"/>
+              </a:rPr>
+              <a:t>ACCEPT/REJECT verdict engine &amp; error codes</a:t>
             </a:r>
           </a:p>
           <a:p>
@@ -6724,31 +6233,49 @@
               </a:spcBef>
             </a:pPr>
             <a:r>
-              <a:rPr sz="850">
-                <a:solidFill>
-                  <a:srgbClr val="028090"/>
+              <a:rPr sz="1000" dirty="0">
+                <a:solidFill>
+                  <a:srgbClr val="009B8A"/>
                 </a:solidFill>
                 <a:latin typeface="Arial"/>
               </a:rPr>
               <a:t>▪ </a:t>
             </a:r>
             <a:r>
-              <a:rPr sz="900" b="1">
+              <a:rPr sz="1000" b="1" dirty="0">
                 <a:solidFill>
                   <a:srgbClr val="0B3033"/>
                 </a:solidFill>
                 <a:latin typeface="Arial"/>
               </a:rPr>
-              <a:t>lexer.py: </a:t>
-            </a:r>
-            <a:r>
-              <a:rPr sz="850">
-                <a:solidFill>
-                  <a:srgbClr val="5C7A7D"/>
-                </a:solidFill>
-                <a:latin typeface="Arial"/>
-              </a:rPr>
-              <a:t>Position-aware tokenizer</a:t>
+              <a:t>Sub-Patterns: </a:t>
+            </a:r>
+            <a:r>
+              <a:rPr sz="1000" dirty="0">
+                <a:solidFill>
+                  <a:srgbClr val="5C7A7D"/>
+                </a:solidFill>
+                <a:latin typeface="Arial"/>
+              </a:rPr>
+              <a:t>Semantic extraction (domain, user, </a:t>
+            </a:r>
+            <a:r>
+              <a:rPr sz="1000" dirty="0" err="1">
+                <a:solidFill>
+                  <a:srgbClr val="5C7A7D"/>
+                </a:solidFill>
+                <a:latin typeface="Arial"/>
+              </a:rPr>
+              <a:t>tld</a:t>
+            </a:r>
+            <a:r>
+              <a:rPr sz="1000" dirty="0">
+                <a:solidFill>
+                  <a:srgbClr val="5C7A7D"/>
+                </a:solidFill>
+                <a:latin typeface="Arial"/>
+              </a:rPr>
+              <a:t>)</a:t>
             </a:r>
           </a:p>
           <a:p>
@@ -6758,31 +6285,99 @@
               </a:spcBef>
             </a:pPr>
             <a:r>
-              <a:rPr sz="850">
-                <a:solidFill>
-                  <a:srgbClr val="028090"/>
+              <a:rPr sz="1000" dirty="0">
+                <a:solidFill>
+                  <a:srgbClr val="009B8A"/>
                 </a:solidFill>
                 <a:latin typeface="Arial"/>
               </a:rPr>
               <a:t>▪ </a:t>
             </a:r>
             <a:r>
-              <a:rPr sz="900" b="1">
+              <a:rPr sz="1000" b="1" dirty="0">
                 <a:solidFill>
                   <a:srgbClr val="0B3033"/>
                 </a:solidFill>
                 <a:latin typeface="Arial"/>
               </a:rPr>
-              <a:t>parser.py: </a:t>
-            </a:r>
-            <a:r>
-              <a:rPr sz="850">
-                <a:solidFill>
-                  <a:srgbClr val="5C7A7D"/>
-                </a:solidFill>
-                <a:latin typeface="Arial"/>
-              </a:rPr>
-              <a:t>Recursive-descent LL(1)</a:t>
+              <a:t>visualize.py: </a:t>
+            </a:r>
+            <a:r>
+              <a:rPr sz="1000" dirty="0">
+                <a:solidFill>
+                  <a:srgbClr val="5C7A7D"/>
+                </a:solidFill>
+                <a:latin typeface="Arial"/>
+              </a:rPr>
+              <a:t>Standalone SVG, DOT &amp; ASCII tree outputs</a:t>
+            </a:r>
+          </a:p>
+          <a:p>
+            <a:pPr>
+              <a:spcBef>
+                <a:spcPts val="200"/>
+              </a:spcBef>
+            </a:pPr>
+            <a:r>
+              <a:rPr sz="1000" dirty="0">
+                <a:solidFill>
+                  <a:srgbClr val="009B8A"/>
+                </a:solidFill>
+                <a:latin typeface="Arial"/>
+              </a:rPr>
+              <a:t>▪ </a:t>
+            </a:r>
+            <a:r>
+              <a:rPr sz="1000" b="1" dirty="0">
+                <a:solidFill>
+                  <a:srgbClr val="0B3033"/>
+                </a:solidFill>
+                <a:latin typeface="Arial"/>
+              </a:rPr>
+              <a:t>Unified CLI: </a:t>
+            </a:r>
+            <a:r>
+              <a:rPr sz="1000" dirty="0">
+                <a:solidFill>
+                  <a:srgbClr val="5C7A7D"/>
+                </a:solidFill>
+                <a:latin typeface="Arial"/>
+              </a:rPr>
+              <a:t>Interactive REPL, single, and batch modes</a:t>
+            </a:r>
+          </a:p>
+          <a:p>
+            <a:pPr>
+              <a:spcBef>
+                <a:spcPts val="200"/>
+              </a:spcBef>
+            </a:pPr>
+            <a:r>
+              <a:rPr sz="1000" dirty="0">
+                <a:solidFill>
+                  <a:srgbClr val="009B8A"/>
+                </a:solidFill>
+                <a:latin typeface="Arial"/>
+              </a:rPr>
+              <a:t>▪ </a:t>
+            </a:r>
+            <a:r>
+              <a:rPr sz="1000" b="1" dirty="0">
+                <a:solidFill>
+                  <a:srgbClr val="0B3033"/>
+                </a:solidFill>
+                <a:latin typeface="Arial"/>
+              </a:rPr>
+              <a:t>Diagnostics: </a:t>
+            </a:r>
+            <a:r>
+              <a:rPr sz="1000" dirty="0">
+                <a:solidFill>
+                  <a:srgbClr val="5C7A7D"/>
+                </a:solidFill>
+                <a:latin typeface="Arial"/>
+              </a:rPr>
+              <a:t>Precise character offsets &amp; syntax errors</a:t>
             </a:r>
           </a:p>
           <a:p>
@@ -6792,47 +6387,49 @@
               </a:spcBef>
             </a:pPr>
             <a:r>
-              <a:rPr sz="850">
-                <a:solidFill>
-                  <a:srgbClr val="5C7A7D"/>
-                </a:solidFill>
-                <a:latin typeface="Arial"/>
-              </a:rPr>
-              <a:t>Test Suite Accuracy
+              <a:rPr sz="1000" dirty="0">
+                <a:solidFill>
+                  <a:srgbClr val="5C7A7D"/>
+                </a:solidFill>
+                <a:latin typeface="Arial"/>
+              </a:rPr>
+              <a:t>Phase 2 Test Suite
 </a:t>
             </a:r>
             <a:r>
-              <a:rPr sz="1200" b="1">
-                <a:solidFill>
-                  <a:srgbClr val="028090"/>
-                </a:solidFill>
-                <a:latin typeface="Arial"/>
-              </a:rPr>
-              <a:t>10/10 Passed (100%)</a:t>
-            </a:r>
-          </a:p>
-        </p:txBody>
-      </p:sp>
-      <p:sp>
-        <p:nvSpPr>
-          <p:cNvPr id="8" name="Rounded Rectangle 7"/>
-          <p:cNvSpPr/>
-          <p:nvPr/>
-        </p:nvSpPr>
-        <p:spPr>
-          <a:xfrm>
-            <a:off x="4368640" y="1620000"/>
-            <a:ext cx="3450000" cy="4750000"/>
+              <a:rPr sz="1000" b="1" dirty="0">
+                <a:solidFill>
+                  <a:srgbClr val="009B8A"/>
+                </a:solidFill>
+                <a:latin typeface="Arial"/>
+              </a:rPr>
+              <a:t>19/19 Passed (100%)</a:t>
+            </a:r>
+          </a:p>
+        </p:txBody>
+      </p:sp>
+      <p:sp>
+        <p:nvSpPr>
+          <p:cNvPr id="12" name="Rounded Rectangle 11"/>
+          <p:cNvSpPr/>
+          <p:nvPr/>
+        </p:nvSpPr>
+        <p:spPr>
+          <a:xfrm>
+            <a:off x="8188640" y="1580000"/>
+            <a:ext cx="3460000" cy="4780000"/>
           </a:xfrm>
           <a:prstGeom prst="roundRect">
-            <a:avLst/>
+            <a:avLst>
+              <a:gd name="adj" fmla="val 7768"/>
+            </a:avLst>
           </a:prstGeom>
           <a:solidFill>
             <a:srgbClr val="FFFFFF"/>
           </a:solidFill>
           <a:ln w="19050">
             <a:solidFill>
-              <a:srgbClr val="00A896"/>
+              <a:srgbClr val="F0642F"/>
             </a:solidFill>
           </a:ln>
         </p:spPr>
@@ -6855,62 +6452,20 @@
           <a:lstStyle/>
           <a:p>
             <a:pPr algn="ctr"/>
-          </a:p>
-        </p:txBody>
-      </p:sp>
-      <p:sp>
-        <p:nvSpPr>
-          <p:cNvPr id="9" name="Rectangle 8"/>
-          <p:cNvSpPr/>
-          <p:nvPr/>
-        </p:nvSpPr>
-        <p:spPr>
-          <a:xfrm>
-            <a:off x="4368640" y="1620000"/>
-            <a:ext cx="3450000" cy="90000"/>
-          </a:xfrm>
-          <a:prstGeom prst="rect">
-            <a:avLst/>
-          </a:prstGeom>
-          <a:solidFill>
-            <a:srgbClr val="00A896"/>
-          </a:solidFill>
-          <a:ln>
-            <a:noFill/>
-          </a:ln>
-        </p:spPr>
-        <p:style>
-          <a:lnRef idx="1">
-            <a:schemeClr val="accent1"/>
-          </a:lnRef>
-          <a:fillRef idx="3">
-            <a:schemeClr val="accent1"/>
-          </a:fillRef>
-          <a:effectRef idx="2">
-            <a:schemeClr val="accent1"/>
-          </a:effectRef>
-          <a:fontRef idx="minor">
-            <a:schemeClr val="lt1"/>
-          </a:fontRef>
-        </p:style>
-        <p:txBody>
-          <a:bodyPr rtlCol="0" anchor="ctr"/>
-          <a:lstStyle/>
-          <a:p>
-            <a:pPr algn="ctr"/>
-          </a:p>
-        </p:txBody>
-      </p:sp>
-      <p:sp>
-        <p:nvSpPr>
-          <p:cNvPr id="10" name="TextBox 9"/>
+            <a:endParaRPr/>
+          </a:p>
+        </p:txBody>
+      </p:sp>
+      <p:sp>
+        <p:nvSpPr>
+          <p:cNvPr id="14" name="TextBox 13"/>
           <p:cNvSpPr txBox="1"/>
           <p:nvPr/>
         </p:nvSpPr>
         <p:spPr>
           <a:xfrm>
-            <a:off x="4588640" y="1820000"/>
-            <a:ext cx="3010000" cy="4350000"/>
+            <a:off x="8408640" y="1770000"/>
+            <a:ext cx="3020000" cy="4400000"/>
           </a:xfrm>
           <a:prstGeom prst="rect">
             <a:avLst/>
@@ -6924,17 +6479,17 @@
           <a:lstStyle/>
           <a:p>
             <a:r>
-              <a:rPr sz="950" b="1">
-                <a:solidFill>
-                  <a:srgbClr val="00A896"/>
-                </a:solidFill>
-                <a:latin typeface="Arial"/>
-              </a:rPr>
-              <a:t>PHASE 2  •  Weeks 2–3
+              <a:rPr sz="1000" b="1" dirty="0">
+                <a:solidFill>
+                  <a:srgbClr val="F0642F"/>
+                </a:solidFill>
+                <a:latin typeface="Arial"/>
+              </a:rPr>
+              <a:t>PHASE 3  •  Week 4
 </a:t>
             </a:r>
             <a:r>
-              <a:rPr sz="900" b="1">
+              <a:rPr sz="1000" b="1" dirty="0">
                 <a:solidFill>
                   <a:srgbClr val="007A6E"/>
                 </a:solidFill>
@@ -6951,13 +6506,13 @@
               </a:spcBef>
             </a:pPr>
             <a:r>
-              <a:rPr sz="1400" b="1">
+              <a:rPr sz="1000" b="1" dirty="0">
                 <a:solidFill>
                   <a:srgbClr val="0B3033"/>
                 </a:solidFill>
                 <a:latin typeface="Arial"/>
               </a:rPr>
-              <a:t>Validation &amp; CLI Pipeline
+              <a:t>QA, Benchmarks &amp; Studio
 </a:t>
             </a:r>
           </a:p>
@@ -6968,13 +6523,13 @@
               </a:spcBef>
             </a:pPr>
             <a:r>
-              <a:rPr sz="950">
-                <a:solidFill>
-                  <a:srgbClr val="5C7A7D"/>
-                </a:solidFill>
-                <a:latin typeface="Arial"/>
-              </a:rPr>
-              <a:t>Verdict engine, structured diagnostics, and multi-format visual tree rendering.
+              <a:rPr sz="1000" dirty="0">
+                <a:solidFill>
+                  <a:srgbClr val="5C7A7D"/>
+                </a:solidFill>
+                <a:latin typeface="Arial"/>
+              </a:rPr>
+              <a:t>Empirical O(n) linear performance proof, date grammar extensibility, and automated master test suite.
 </a:t>
             </a:r>
           </a:p>
@@ -6985,7 +6540,7 @@
               </a:spcBef>
             </a:pPr>
             <a:r>
-              <a:rPr sz="900" b="1">
+              <a:rPr sz="1000" b="1" dirty="0">
                 <a:solidFill>
                   <a:srgbClr val="0B3033"/>
                 </a:solidFill>
@@ -7002,31 +6557,31 @@
               </a:spcBef>
             </a:pPr>
             <a:r>
-              <a:rPr sz="850">
-                <a:solidFill>
-                  <a:srgbClr val="00A896"/>
+              <a:rPr sz="1000" dirty="0">
+                <a:solidFill>
+                  <a:srgbClr val="F0642F"/>
                 </a:solidFill>
                 <a:latin typeface="Arial"/>
               </a:rPr>
               <a:t>▪ </a:t>
             </a:r>
             <a:r>
-              <a:rPr sz="900" b="1">
+              <a:rPr sz="1000" b="1" dirty="0">
                 <a:solidFill>
                   <a:srgbClr val="0B3033"/>
                 </a:solidFill>
                 <a:latin typeface="Arial"/>
               </a:rPr>
-              <a:t>validator.py: </a:t>
-            </a:r>
-            <a:r>
-              <a:rPr sz="850">
-                <a:solidFill>
-                  <a:srgbClr val="5C7A7D"/>
-                </a:solidFill>
-                <a:latin typeface="Arial"/>
-              </a:rPr>
-              <a:t>ACCEPT/REJECT verdict &amp; CLI</a:t>
+              <a:t>benchmark.py: </a:t>
+            </a:r>
+            <a:r>
+              <a:rPr sz="1000" dirty="0">
+                <a:solidFill>
+                  <a:srgbClr val="5C7A7D"/>
+                </a:solidFill>
+                <a:latin typeface="Arial"/>
+              </a:rPr>
+              <a:t>O(n) empirical latency test up to 5,000 chars</a:t>
             </a:r>
           </a:p>
           <a:p>
@@ -7036,31 +6591,49 @@
               </a:spcBef>
             </a:pPr>
             <a:r>
-              <a:rPr sz="850">
-                <a:solidFill>
-                  <a:srgbClr val="00A896"/>
+              <a:rPr sz="1000" dirty="0">
+                <a:solidFill>
+                  <a:srgbClr val="F0642F"/>
                 </a:solidFill>
                 <a:latin typeface="Arial"/>
               </a:rPr>
               <a:t>▪ </a:t>
             </a:r>
             <a:r>
-              <a:rPr sz="900" b="1">
+              <a:rPr sz="1000" b="1" dirty="0">
                 <a:solidFill>
                   <a:srgbClr val="0B3033"/>
                 </a:solidFill>
                 <a:latin typeface="Arial"/>
               </a:rPr>
-              <a:t>visualize.py: </a:t>
-            </a:r>
-            <a:r>
-              <a:rPr sz="850">
-                <a:solidFill>
-                  <a:srgbClr val="5C7A7D"/>
-                </a:solidFill>
-                <a:latin typeface="Arial"/>
-              </a:rPr>
-              <a:t>SVG, DOT &amp; ASCII trees</a:t>
+              <a:t>grammar/</a:t>
+            </a:r>
+            <a:r>
+              <a:rPr sz="1000" b="1" dirty="0" err="1">
+                <a:solidFill>
+                  <a:srgbClr val="0B3033"/>
+                </a:solidFill>
+                <a:latin typeface="Arial"/>
+              </a:rPr>
+              <a:t>date.cfg</a:t>
+            </a:r>
+            <a:r>
+              <a:rPr sz="1000" b="1" dirty="0">
+                <a:solidFill>
+                  <a:srgbClr val="0B3033"/>
+                </a:solidFill>
+                <a:latin typeface="Arial"/>
+              </a:rPr>
+              <a:t>: </a:t>
+            </a:r>
+            <a:r>
+              <a:rPr sz="1000" dirty="0">
+                <a:solidFill>
+                  <a:srgbClr val="5C7A7D"/>
+                </a:solidFill>
+                <a:latin typeface="Arial"/>
+              </a:rPr>
+              <a:t>Grammar extensibility for calendar dates</a:t>
             </a:r>
           </a:p>
           <a:p>
@@ -7070,31 +6643,99 @@
               </a:spcBef>
             </a:pPr>
             <a:r>
-              <a:rPr sz="850">
-                <a:solidFill>
-                  <a:srgbClr val="00A896"/>
+              <a:rPr sz="1000" dirty="0">
+                <a:solidFill>
+                  <a:srgbClr val="F0642F"/>
                 </a:solidFill>
                 <a:latin typeface="Arial"/>
               </a:rPr>
               <a:t>▪ </a:t>
             </a:r>
             <a:r>
-              <a:rPr sz="900" b="1">
+              <a:rPr sz="1000" b="1" dirty="0">
                 <a:solidFill>
                   <a:srgbClr val="0B3033"/>
                 </a:solidFill>
                 <a:latin typeface="Arial"/>
               </a:rPr>
-              <a:t>CLI Pipeline: </a:t>
-            </a:r>
-            <a:r>
-              <a:rPr sz="850">
-                <a:solidFill>
-                  <a:srgbClr val="5C7A7D"/>
-                </a:solidFill>
-                <a:latin typeface="Arial"/>
-              </a:rPr>
-              <a:t>Single, batch &amp; REPL mode</a:t>
+              <a:t>tests/ Suite: </a:t>
+            </a:r>
+            <a:r>
+              <a:rPr sz="1000" dirty="0">
+                <a:solidFill>
+                  <a:srgbClr val="5C7A7D"/>
+                </a:solidFill>
+                <a:latin typeface="Arial"/>
+              </a:rPr>
+              <a:t>39 unit tests across 5 engine modules</a:t>
+            </a:r>
+          </a:p>
+          <a:p>
+            <a:pPr>
+              <a:spcBef>
+                <a:spcPts val="200"/>
+              </a:spcBef>
+            </a:pPr>
+            <a:r>
+              <a:rPr sz="1000" dirty="0">
+                <a:solidFill>
+                  <a:srgbClr val="F0642F"/>
+                </a:solidFill>
+                <a:latin typeface="Arial"/>
+              </a:rPr>
+              <a:t>▪ </a:t>
+            </a:r>
+            <a:r>
+              <a:rPr sz="1000" b="1" dirty="0">
+                <a:solidFill>
+                  <a:srgbClr val="0B3033"/>
+                </a:solidFill>
+                <a:latin typeface="Arial"/>
+              </a:rPr>
+              <a:t>Web UI Studio: </a:t>
+            </a:r>
+            <a:r>
+              <a:rPr sz="1000" dirty="0">
+                <a:solidFill>
+                  <a:srgbClr val="5C7A7D"/>
+                </a:solidFill>
+                <a:latin typeface="Arial"/>
+              </a:rPr>
+              <a:t>Interactive Flask web app &amp; SVG visualizer</a:t>
+            </a:r>
+          </a:p>
+          <a:p>
+            <a:pPr>
+              <a:spcBef>
+                <a:spcPts val="200"/>
+              </a:spcBef>
+            </a:pPr>
+            <a:r>
+              <a:rPr sz="1000" dirty="0">
+                <a:solidFill>
+                  <a:srgbClr val="F0642F"/>
+                </a:solidFill>
+                <a:latin typeface="Arial"/>
+              </a:rPr>
+              <a:t>▪ </a:t>
+            </a:r>
+            <a:r>
+              <a:rPr sz="1000" b="1" dirty="0">
+                <a:solidFill>
+                  <a:srgbClr val="0B3033"/>
+                </a:solidFill>
+                <a:latin typeface="Arial"/>
+              </a:rPr>
+              <a:t>Regression: </a:t>
+            </a:r>
+            <a:r>
+              <a:rPr sz="1000" dirty="0">
+                <a:solidFill>
+                  <a:srgbClr val="5C7A7D"/>
+                </a:solidFill>
+                <a:latin typeface="Arial"/>
+              </a:rPr>
+              <a:t>R² = 0.874–0.991 linear complexity proof</a:t>
             </a:r>
           </a:p>
           <a:p>
@@ -7104,371 +6745,23 @@
               </a:spcBef>
             </a:pPr>
             <a:r>
-              <a:rPr sz="850">
-                <a:solidFill>
-                  <a:srgbClr val="5C7A7D"/>
-                </a:solidFill>
-                <a:latin typeface="Arial"/>
-              </a:rPr>
-              <a:t>Test Suite Accuracy
+              <a:rPr sz="1000" dirty="0">
+                <a:solidFill>
+                  <a:srgbClr val="5C7A7D"/>
+                </a:solidFill>
+                <a:latin typeface="Arial"/>
+              </a:rPr>
+              <a:t>Master QA Suite &amp; Complexity
 </a:t>
             </a:r>
             <a:r>
-              <a:rPr sz="1200" b="1">
-                <a:solidFill>
-                  <a:srgbClr val="00A896"/>
-                </a:solidFill>
-                <a:latin typeface="Arial"/>
-              </a:rPr>
-              <a:t>19/19 Passed (100%)</a:t>
-            </a:r>
-          </a:p>
-        </p:txBody>
-      </p:sp>
-      <p:sp>
-        <p:nvSpPr>
-          <p:cNvPr id="11" name="Rounded Rectangle 10"/>
-          <p:cNvSpPr/>
-          <p:nvPr/>
-        </p:nvSpPr>
-        <p:spPr>
-          <a:xfrm>
-            <a:off x="8188640" y="1620000"/>
-            <a:ext cx="3450000" cy="4750000"/>
-          </a:xfrm>
-          <a:prstGeom prst="roundRect">
-            <a:avLst/>
-          </a:prstGeom>
-          <a:solidFill>
-            <a:srgbClr val="FFFFFF"/>
-          </a:solidFill>
-          <a:ln w="19050">
-            <a:solidFill>
-              <a:srgbClr val="3B6E72"/>
-            </a:solidFill>
-          </a:ln>
-        </p:spPr>
-        <p:style>
-          <a:lnRef idx="1">
-            <a:schemeClr val="accent1"/>
-          </a:lnRef>
-          <a:fillRef idx="3">
-            <a:schemeClr val="accent1"/>
-          </a:fillRef>
-          <a:effectRef idx="2">
-            <a:schemeClr val="accent1"/>
-          </a:effectRef>
-          <a:fontRef idx="minor">
-            <a:schemeClr val="lt1"/>
-          </a:fontRef>
-        </p:style>
-        <p:txBody>
-          <a:bodyPr rtlCol="0" anchor="ctr"/>
-          <a:lstStyle/>
-          <a:p>
-            <a:pPr algn="ctr"/>
-          </a:p>
-        </p:txBody>
-      </p:sp>
-      <p:sp>
-        <p:nvSpPr>
-          <p:cNvPr id="12" name="Rectangle 11"/>
-          <p:cNvSpPr/>
-          <p:nvPr/>
-        </p:nvSpPr>
-        <p:spPr>
-          <a:xfrm>
-            <a:off x="8188640" y="1620000"/>
-            <a:ext cx="3450000" cy="90000"/>
-          </a:xfrm>
-          <a:prstGeom prst="rect">
-            <a:avLst/>
-          </a:prstGeom>
-          <a:solidFill>
-            <a:srgbClr val="3B6E72"/>
-          </a:solidFill>
-          <a:ln>
-            <a:noFill/>
-          </a:ln>
-        </p:spPr>
-        <p:style>
-          <a:lnRef idx="1">
-            <a:schemeClr val="accent1"/>
-          </a:lnRef>
-          <a:fillRef idx="3">
-            <a:schemeClr val="accent1"/>
-          </a:fillRef>
-          <a:effectRef idx="2">
-            <a:schemeClr val="accent1"/>
-          </a:effectRef>
-          <a:fontRef idx="minor">
-            <a:schemeClr val="lt1"/>
-          </a:fontRef>
-        </p:style>
-        <p:txBody>
-          <a:bodyPr rtlCol="0" anchor="ctr"/>
-          <a:lstStyle/>
-          <a:p>
-            <a:pPr algn="ctr"/>
-          </a:p>
-        </p:txBody>
-      </p:sp>
-      <p:sp>
-        <p:nvSpPr>
-          <p:cNvPr id="13" name="TextBox 12"/>
-          <p:cNvSpPr txBox="1"/>
-          <p:nvPr/>
-        </p:nvSpPr>
-        <p:spPr>
-          <a:xfrm>
-            <a:off x="8408640" y="1820000"/>
-            <a:ext cx="3010000" cy="4350000"/>
-          </a:xfrm>
-          <a:prstGeom prst="rect">
-            <a:avLst/>
-          </a:prstGeom>
-          <a:noFill/>
-        </p:spPr>
-        <p:txBody>
-          <a:bodyPr wrap="square" lIns="0" tIns="0" rIns="0" bIns="0">
-            <a:spAutoFit/>
-          </a:bodyPr>
-          <a:lstStyle/>
-          <a:p>
-            <a:r>
-              <a:rPr sz="950" b="1">
-                <a:solidFill>
-                  <a:srgbClr val="3B6E72"/>
-                </a:solidFill>
-                <a:latin typeface="Arial"/>
-              </a:rPr>
-              <a:t>PHASE 3  •  Week 4
-</a:t>
-            </a:r>
-            <a:r>
-              <a:rPr sz="900" b="1">
-                <a:solidFill>
-                  <a:srgbClr val="007A6E"/>
-                </a:solidFill>
-                <a:latin typeface="Arial"/>
-              </a:rPr>
-              <a:t>[COMPLETED (100%)]
-</a:t>
-            </a:r>
-          </a:p>
-          <a:p>
-            <a:pPr>
-              <a:spcBef>
-                <a:spcPts val="400"/>
-              </a:spcBef>
-            </a:pPr>
-            <a:r>
-              <a:rPr sz="1400" b="1">
-                <a:solidFill>
-                  <a:srgbClr val="0B3033"/>
-                </a:solidFill>
-                <a:latin typeface="Arial"/>
-              </a:rPr>
-              <a:t>QA, Benchmarks &amp; Release
-</a:t>
-            </a:r>
-          </a:p>
-          <a:p>
-            <a:pPr>
-              <a:spcBef>
-                <a:spcPts val="200"/>
-              </a:spcBef>
-            </a:pPr>
-            <a:r>
-              <a:rPr sz="950">
-                <a:solidFill>
-                  <a:srgbClr val="5C7A7D"/>
-                </a:solidFill>
-                <a:latin typeface="Arial"/>
-              </a:rPr>
-              <a:t>Performance benchmarking, secondary grammar proof, and final documentation.
-</a:t>
-            </a:r>
-          </a:p>
-          <a:p>
-            <a:pPr>
-              <a:spcBef>
-                <a:spcPts val="800"/>
-              </a:spcBef>
-            </a:pPr>
-            <a:r>
-              <a:rPr sz="900" b="1">
-                <a:solidFill>
-                  <a:srgbClr val="0B3033"/>
-                </a:solidFill>
-                <a:latin typeface="Arial"/>
-              </a:rPr>
-              <a:t>DELIVERABLES &amp; MODULES:
-</a:t>
-            </a:r>
-          </a:p>
-          <a:p>
-            <a:pPr>
-              <a:spcBef>
-                <a:spcPts val="200"/>
-              </a:spcBef>
-            </a:pPr>
-            <a:r>
-              <a:rPr sz="850">
-                <a:solidFill>
-                  <a:srgbClr val="3B6E72"/>
-                </a:solidFill>
-                <a:latin typeface="Arial"/>
-              </a:rPr>
-              <a:t>▪ </a:t>
-            </a:r>
-            <a:r>
-              <a:rPr sz="900" b="1">
-                <a:solidFill>
-                  <a:srgbClr val="0B3033"/>
-                </a:solidFill>
-                <a:latin typeface="Arial"/>
-              </a:rPr>
-              <a:t>benchmark.py: </a:t>
-            </a:r>
-            <a:r>
-              <a:rPr sz="850">
-                <a:solidFill>
-                  <a:srgbClr val="5C7A7D"/>
-                </a:solidFill>
-                <a:latin typeface="Arial"/>
-              </a:rPr>
-              <a:t>O(n) linear latency test</a:t>
-            </a:r>
-          </a:p>
-          <a:p>
-            <a:pPr>
-              <a:spcBef>
-                <a:spcPts val="200"/>
-              </a:spcBef>
-            </a:pPr>
-            <a:r>
-              <a:rPr sz="850">
-                <a:solidFill>
-                  <a:srgbClr val="3B6E72"/>
-                </a:solidFill>
-                <a:latin typeface="Arial"/>
-              </a:rPr>
-              <a:t>▪ </a:t>
-            </a:r>
-            <a:r>
-              <a:rPr sz="900" b="1">
-                <a:solidFill>
-                  <a:srgbClr val="0B3033"/>
-                </a:solidFill>
-                <a:latin typeface="Arial"/>
-              </a:rPr>
-              <a:t>grammar/date.cfg: </a:t>
-            </a:r>
-            <a:r>
-              <a:rPr sz="850">
-                <a:solidFill>
-                  <a:srgbClr val="5C7A7D"/>
-                </a:solidFill>
-                <a:latin typeface="Arial"/>
-              </a:rPr>
-              <a:t>Grammar extensibility demo</a:t>
-            </a:r>
-          </a:p>
-          <a:p>
-            <a:pPr>
-              <a:spcBef>
-                <a:spcPts val="200"/>
-              </a:spcBef>
-            </a:pPr>
-            <a:r>
-              <a:rPr sz="850">
-                <a:solidFill>
-                  <a:srgbClr val="3B6E72"/>
-                </a:solidFill>
-                <a:latin typeface="Arial"/>
-              </a:rPr>
-              <a:t>▪ </a:t>
-            </a:r>
-            <a:r>
-              <a:rPr sz="900" b="1">
-                <a:solidFill>
-                  <a:srgbClr val="0B3033"/>
-                </a:solidFill>
-                <a:latin typeface="Arial"/>
-              </a:rPr>
-              <a:t>tests/ &amp; Docs: </a:t>
-            </a:r>
-            <a:r>
-              <a:rPr sz="850">
-                <a:solidFill>
-                  <a:srgbClr val="5C7A7D"/>
-                </a:solidFill>
-                <a:latin typeface="Arial"/>
-              </a:rPr>
-              <a:t>Full QA suite &amp; report</a:t>
-            </a:r>
-          </a:p>
-          <a:p>
-            <a:pPr>
-              <a:spcBef>
-                <a:spcPts val="1400"/>
-              </a:spcBef>
-            </a:pPr>
-            <a:r>
-              <a:rPr sz="850">
-                <a:solidFill>
-                  <a:srgbClr val="5C7A7D"/>
-                </a:solidFill>
-                <a:latin typeface="Arial"/>
-              </a:rPr>
-              <a:t>Accuracy &amp; Complexity
-</a:t>
-            </a:r>
-            <a:r>
-              <a:rPr sz="1200" b="1">
-                <a:solidFill>
-                  <a:srgbClr val="3B6E72"/>
-                </a:solidFill>
-                <a:latin typeface="Arial"/>
-              </a:rPr>
-              <a:t>100% Passed • O(n) Verified</a:t>
-            </a:r>
-          </a:p>
-        </p:txBody>
-      </p:sp>
-      <p:sp>
-        <p:nvSpPr>
-          <p:cNvPr id="14" name="TextBox 13"/>
-          <p:cNvSpPr txBox="1"/>
-          <p:nvPr/>
-        </p:nvSpPr>
-        <p:spPr>
-          <a:xfrm>
-            <a:off x="7616952" y="6537960"/>
-            <a:ext cx="4114800" cy="274320"/>
-          </a:xfrm>
-          <a:prstGeom prst="rect">
-            <a:avLst/>
-          </a:prstGeom>
-          <a:noFill/>
-        </p:spPr>
-        <p:txBody>
-          <a:bodyPr wrap="square" lIns="0" tIns="0" rIns="0" bIns="0">
-            <a:spAutoFit/>
-          </a:bodyPr>
-          <a:lstStyle/>
-          <a:p>
-            <a:pPr>
-              <a:defRPr sz="800">
-                <a:solidFill>
-                  <a:srgbClr val="5C7A7D"/>
-                </a:solidFill>
-                <a:latin typeface="Arial"/>
-              </a:defRPr>
-            </a:pPr>
-            <a:r>
-              <a:t>GRAMMAR-BASED PATTERN RECOGNITION</a:t>
+              <a:rPr sz="1000" b="1" dirty="0">
+                <a:solidFill>
+                  <a:srgbClr val="F0642F"/>
+                </a:solidFill>
+                <a:latin typeface="Arial"/>
+              </a:rPr>
+              <a:t>39/39 Passed • O(n) Verified</a:t>
             </a:r>
           </a:p>
         </p:txBody>
@@ -7481,8 +6774,8 @@
 </p:sld>
 </file>
 
-<file path=ppt/slides/slide7.xml><?xml version="1.0" encoding="utf-8"?>
-<p:sld xmlns:a="http://schemas.openxmlformats.org/drawingml/2006/main" xmlns:p="http://schemas.openxmlformats.org/presentationml/2006/main" xmlns:r="http://schemas.openxmlformats.org/officeDocument/2006/relationships">
+<file path=ppt/slides/slide6.xml><?xml version="1.0" encoding="utf-8"?>
+<p:sld xmlns:a="http://schemas.openxmlformats.org/drawingml/2006/main" xmlns:r="http://schemas.openxmlformats.org/officeDocument/2006/relationships" xmlns:p="http://schemas.openxmlformats.org/presentationml/2006/main">
   <p:cSld>
     <p:bg>
       <p:bgPr>
@@ -7498,17 +6791,24 @@
         <p:cNvGrpSpPr/>
         <p:nvPr/>
       </p:nvGrpSpPr>
-      <p:grpSpPr/>
-      <p:sp>
-        <p:nvSpPr>
-          <p:cNvPr id="2" name="TextBox 1"/>
+      <p:grpSpPr>
+        <a:xfrm>
+          <a:off x="0" y="0"/>
+          <a:ext cx="0" cy="0"/>
+          <a:chOff x="0" y="0"/>
+          <a:chExt cx="0" cy="0"/>
+        </a:xfrm>
+      </p:grpSpPr>
+      <p:sp>
+        <p:nvSpPr>
+          <p:cNvPr id="3" name="TextBox 2"/>
           <p:cNvSpPr txBox="1"/>
           <p:nvPr/>
         </p:nvSpPr>
         <p:spPr>
           <a:xfrm>
-            <a:off x="548640" y="411480"/>
-            <a:ext cx="4572000" cy="274320"/>
+            <a:off x="548640" y="617220"/>
+            <a:ext cx="11094720" cy="520000"/>
           </a:xfrm>
           <a:prstGeom prst="rect">
             <a:avLst/>
@@ -7522,29 +6822,29 @@
           <a:lstStyle/>
           <a:p>
             <a:pPr>
-              <a:defRPr sz="1000" b="1">
-                <a:solidFill>
-                  <a:srgbClr val="028090"/>
+              <a:defRPr sz="2600" b="1">
+                <a:solidFill>
+                  <a:srgbClr val="0B3033"/>
                 </a:solidFill>
                 <a:latin typeface="Arial"/>
               </a:defRPr>
             </a:pPr>
             <a:r>
-              <a:t>PROJECT ROADMAP</a:t>
-            </a:r>
-          </a:p>
-        </p:txBody>
-      </p:sp>
-      <p:sp>
-        <p:nvSpPr>
-          <p:cNvPr id="3" name="TextBox 2"/>
+              <a:t>Core CFG Grammar Engine, Lexical Pipeline &amp; Diagnostics</a:t>
+            </a:r>
+          </a:p>
+        </p:txBody>
+      </p:sp>
+      <p:sp>
+        <p:nvSpPr>
+          <p:cNvPr id="4" name="TextBox 3"/>
           <p:cNvSpPr txBox="1"/>
           <p:nvPr/>
         </p:nvSpPr>
         <p:spPr>
           <a:xfrm>
-            <a:off x="548640" y="685800"/>
-            <a:ext cx="7315200" cy="548640"/>
+            <a:off x="548640" y="1170432"/>
+            <a:ext cx="11094720" cy="320000"/>
           </a:xfrm>
           <a:prstGeom prst="rect">
             <a:avLst/>
@@ -7558,29 +6858,29 @@
           <a:lstStyle/>
           <a:p>
             <a:pPr>
-              <a:defRPr sz="2800" b="1">
-                <a:solidFill>
-                  <a:srgbClr val="0B3033"/>
+              <a:defRPr sz="1100">
+                <a:solidFill>
+                  <a:srgbClr val="5C7A7D"/>
                 </a:solidFill>
                 <a:latin typeface="Arial"/>
               </a:defRPr>
             </a:pPr>
             <a:r>
-              <a:t>Phase-Wise Project Completion</a:t>
-            </a:r>
-          </a:p>
-        </p:txBody>
-      </p:sp>
-      <p:sp>
-        <p:nvSpPr>
-          <p:cNvPr id="4" name="TextBox 3"/>
+              <a:t>Strict separation of lexical tokenization, predictive LL(1) derivation, structured validation, and visual rendering.</a:t>
+            </a:r>
+          </a:p>
+        </p:txBody>
+      </p:sp>
+      <p:sp>
+        <p:nvSpPr>
+          <p:cNvPr id="5" name="TextBox 4"/>
           <p:cNvSpPr txBox="1"/>
           <p:nvPr/>
         </p:nvSpPr>
         <p:spPr>
           <a:xfrm>
-            <a:off x="548640" y="1234440"/>
-            <a:ext cx="11094720" cy="320000"/>
+            <a:off x="7616952" y="6537960"/>
+            <a:ext cx="4114800" cy="240000"/>
           </a:xfrm>
           <a:prstGeom prst="rect">
             <a:avLst/>
@@ -7594,7 +6894,7 @@
           <a:lstStyle/>
           <a:p>
             <a:pPr>
-              <a:defRPr sz="1100">
+              <a:defRPr sz="800">
                 <a:solidFill>
                   <a:srgbClr val="5C7A7D"/>
                 </a:solidFill>
@@ -7602,24 +6902,26 @@
               </a:defRPr>
             </a:pPr>
             <a:r>
-              <a:t>Structured 3-phase progression from formal CFG engine foundations to visual CLI pipelines and benchmarks.</a:t>
-            </a:r>
-          </a:p>
-        </p:txBody>
-      </p:sp>
-      <p:sp>
-        <p:nvSpPr>
-          <p:cNvPr id="5" name="Rounded Rectangle 4"/>
-          <p:cNvSpPr/>
-          <p:nvPr/>
-        </p:nvSpPr>
-        <p:spPr>
-          <a:xfrm>
-            <a:off x="548640" y="1620000"/>
-            <a:ext cx="3450000" cy="4750000"/>
+              <a:t>GRAMMAR-BASED PATTERN RECOGNITION • CM23042</a:t>
+            </a:r>
+          </a:p>
+        </p:txBody>
+      </p:sp>
+      <p:sp>
+        <p:nvSpPr>
+          <p:cNvPr id="6" name="Rounded Rectangle 5"/>
+          <p:cNvSpPr/>
+          <p:nvPr/>
+        </p:nvSpPr>
+        <p:spPr>
+          <a:xfrm>
+            <a:off x="548640" y="1580000"/>
+            <a:ext cx="5360000" cy="4780000"/>
           </a:xfrm>
           <a:prstGeom prst="roundRect">
-            <a:avLst/>
+            <a:avLst>
+              <a:gd name="adj" fmla="val 4955"/>
+            </a:avLst>
           </a:prstGeom>
           <a:solidFill>
             <a:srgbClr val="FFFFFF"/>
@@ -7649,28 +6951,254 @@
           <a:lstStyle/>
           <a:p>
             <a:pPr algn="ctr"/>
-          </a:p>
-        </p:txBody>
-      </p:sp>
-      <p:sp>
-        <p:nvSpPr>
-          <p:cNvPr id="6" name="Rectangle 5"/>
-          <p:cNvSpPr/>
-          <p:nvPr/>
-        </p:nvSpPr>
-        <p:spPr>
-          <a:xfrm>
-            <a:off x="548640" y="1620000"/>
-            <a:ext cx="3450000" cy="90000"/>
+            <a:endParaRPr/>
+          </a:p>
+        </p:txBody>
+      </p:sp>
+      <p:sp>
+        <p:nvSpPr>
+          <p:cNvPr id="8" name="TextBox 7"/>
+          <p:cNvSpPr txBox="1"/>
+          <p:nvPr/>
+        </p:nvSpPr>
+        <p:spPr>
+          <a:xfrm>
+            <a:off x="788640" y="1780000"/>
+            <a:ext cx="4880000" cy="4380000"/>
           </a:xfrm>
           <a:prstGeom prst="rect">
             <a:avLst/>
           </a:prstGeom>
+          <a:noFill/>
+        </p:spPr>
+        <p:txBody>
+          <a:bodyPr wrap="square" lIns="0" tIns="0" rIns="0" bIns="0">
+            <a:spAutoFit/>
+          </a:bodyPr>
+          <a:lstStyle/>
+          <a:p>
+            <a:r>
+              <a:rPr sz="1000" b="1" dirty="0">
+                <a:solidFill>
+                  <a:srgbClr val="028090"/>
+                </a:solidFill>
+                <a:latin typeface="Arial"/>
+              </a:rPr>
+              <a:t>PHASE 1: FORMAL CFG &amp; RECURSIVE-DESCENT PARSER
+</a:t>
+            </a:r>
+          </a:p>
+          <a:p>
+            <a:pPr>
+              <a:spcBef>
+                <a:spcPts val="800"/>
+              </a:spcBef>
+            </a:pPr>
+            <a:r>
+              <a:rPr sz="1000" b="1" dirty="0">
+                <a:solidFill>
+                  <a:srgbClr val="0B3033"/>
+                </a:solidFill>
+                <a:latin typeface="Arial"/>
+              </a:rPr>
+              <a:t>✔ Context-Free Grammar Definition (BNF)
+</a:t>
+            </a:r>
+          </a:p>
+          <a:p>
+            <a:pPr>
+              <a:spcBef>
+                <a:spcPts val="100"/>
+              </a:spcBef>
+            </a:pPr>
+            <a:r>
+              <a:rPr sz="1000" dirty="0">
+                <a:solidFill>
+                  <a:srgbClr val="5C7A7D"/>
+                </a:solidFill>
+                <a:latin typeface="Arial"/>
+              </a:rPr>
+              <a:t>Formal rules defined in grammar/</a:t>
+            </a:r>
+            <a:r>
+              <a:rPr sz="1000" dirty="0" err="1">
+                <a:solidFill>
+                  <a:srgbClr val="5C7A7D"/>
+                </a:solidFill>
+                <a:latin typeface="Arial"/>
+              </a:rPr>
+              <a:t>email.cfg</a:t>
+            </a:r>
+            <a:r>
+              <a:rPr sz="1000" dirty="0">
+                <a:solidFill>
+                  <a:srgbClr val="5C7A7D"/>
+                </a:solidFill>
+                <a:latin typeface="Arial"/>
+              </a:rPr>
+              <a:t>: &lt;EMAIL&gt; ::= &lt;LOCAL&gt; '@' &lt;DOMAIN&gt; '.' &lt;TLD&gt;. Handles nested subdomains, user tags (+tag), and recursive words cleanly where flat regex matching fails.</a:t>
+            </a:r>
+          </a:p>
+          <a:p>
+            <a:pPr>
+              <a:spcBef>
+                <a:spcPts val="800"/>
+              </a:spcBef>
+            </a:pPr>
+            <a:r>
+              <a:rPr sz="1000" b="1" dirty="0">
+                <a:solidFill>
+                  <a:srgbClr val="0B3033"/>
+                </a:solidFill>
+                <a:latin typeface="Arial"/>
+              </a:rPr>
+              <a:t>✔ Position-Aware Tokenizer (lexer.py)
+</a:t>
+            </a:r>
+          </a:p>
+          <a:p>
+            <a:pPr>
+              <a:spcBef>
+                <a:spcPts val="100"/>
+              </a:spcBef>
+            </a:pPr>
+            <a:r>
+              <a:rPr sz="1000" dirty="0">
+                <a:solidFill>
+                  <a:srgbClr val="5C7A7D"/>
+                </a:solidFill>
+                <a:latin typeface="Arial"/>
+              </a:rPr>
+              <a:t>Scans raw character streams into structured terminal tokens (WORD, AT, DOT, TLD, HYPHEN, PLUS, DIGIT). Tracks exact character index offsets (@0, @9, etc.) for micro-diagnostic error reporting.</a:t>
+            </a:r>
+          </a:p>
+          <a:p>
+            <a:pPr>
+              <a:spcBef>
+                <a:spcPts val="800"/>
+              </a:spcBef>
+            </a:pPr>
+            <a:r>
+              <a:rPr sz="1000" b="1" dirty="0">
+                <a:solidFill>
+                  <a:srgbClr val="0B3033"/>
+                </a:solidFill>
+                <a:latin typeface="Arial"/>
+              </a:rPr>
+              <a:t>✔ Predictive LL(1) Parsing Engine (parser.py)
+</a:t>
+            </a:r>
+          </a:p>
+          <a:p>
+            <a:pPr>
+              <a:spcBef>
+                <a:spcPts val="100"/>
+              </a:spcBef>
+            </a:pPr>
+            <a:r>
+              <a:rPr sz="1000" dirty="0">
+                <a:solidFill>
+                  <a:srgbClr val="5C7A7D"/>
+                </a:solidFill>
+                <a:latin typeface="Arial"/>
+              </a:rPr>
+              <a:t>Deterministic top-down recursive descent with 1-token lookahead. Eliminates catastrophic exponential backtracking (</a:t>
+            </a:r>
+            <a:r>
+              <a:rPr sz="1000" dirty="0" err="1">
+                <a:solidFill>
+                  <a:srgbClr val="5C7A7D"/>
+                </a:solidFill>
+                <a:latin typeface="Arial"/>
+              </a:rPr>
+              <a:t>ReDoS</a:t>
+            </a:r>
+            <a:r>
+              <a:rPr sz="1000" dirty="0">
+                <a:solidFill>
+                  <a:srgbClr val="5C7A7D"/>
+                </a:solidFill>
+                <a:latin typeface="Arial"/>
+              </a:rPr>
+              <a:t>) and constructs explicit Abstract Syntax Trees (</a:t>
+            </a:r>
+            <a:r>
+              <a:rPr sz="1000" dirty="0" err="1">
+                <a:solidFill>
+                  <a:srgbClr val="5C7A7D"/>
+                </a:solidFill>
+                <a:latin typeface="Arial"/>
+              </a:rPr>
+              <a:t>ParseTreeNode</a:t>
+            </a:r>
+            <a:r>
+              <a:rPr sz="1000" dirty="0">
+                <a:solidFill>
+                  <a:srgbClr val="5C7A7D"/>
+                </a:solidFill>
+                <a:latin typeface="Arial"/>
+              </a:rPr>
+              <a:t>).</a:t>
+            </a:r>
+          </a:p>
+          <a:p>
+            <a:pPr>
+              <a:spcBef>
+                <a:spcPts val="800"/>
+              </a:spcBef>
+            </a:pPr>
+            <a:r>
+              <a:rPr sz="1000" b="1" dirty="0">
+                <a:solidFill>
+                  <a:srgbClr val="0B3033"/>
+                </a:solidFill>
+                <a:latin typeface="Arial"/>
+              </a:rPr>
+              <a:t>✔ Pinpoint Syntax Diagnostics
+</a:t>
+            </a:r>
+          </a:p>
+          <a:p>
+            <a:pPr>
+              <a:spcBef>
+                <a:spcPts val="100"/>
+              </a:spcBef>
+            </a:pPr>
+            <a:r>
+              <a:rPr sz="1000" dirty="0">
+                <a:solidFill>
+                  <a:srgbClr val="5C7A7D"/>
+                </a:solidFill>
+                <a:latin typeface="Arial"/>
+              </a:rPr>
+              <a:t>Pinpoints the exact character offset of malformed syntax (e.g. unexpected character, missing '@', or unclosed TLD) with expected vs. encountered terminal token comparisons.</a:t>
+            </a:r>
+          </a:p>
+        </p:txBody>
+      </p:sp>
+      <p:sp>
+        <p:nvSpPr>
+          <p:cNvPr id="9" name="Rounded Rectangle 8"/>
+          <p:cNvSpPr/>
+          <p:nvPr/>
+        </p:nvSpPr>
+        <p:spPr>
+          <a:xfrm>
+            <a:off x="6278640" y="1580000"/>
+            <a:ext cx="5360000" cy="4780000"/>
+          </a:xfrm>
+          <a:prstGeom prst="roundRect">
+            <a:avLst>
+              <a:gd name="adj" fmla="val 5150"/>
+            </a:avLst>
+          </a:prstGeom>
           <a:solidFill>
-            <a:srgbClr val="028090"/>
+            <a:srgbClr val="FFFFFF"/>
           </a:solidFill>
-          <a:ln>
-            <a:noFill/>
+          <a:ln w="19050">
+            <a:solidFill>
+              <a:srgbClr val="009B8A"/>
+            </a:solidFill>
           </a:ln>
         </p:spPr>
         <p:style>
@@ -7692,19 +7220,20 @@
           <a:lstStyle/>
           <a:p>
             <a:pPr algn="ctr"/>
-          </a:p>
-        </p:txBody>
-      </p:sp>
-      <p:sp>
-        <p:nvSpPr>
-          <p:cNvPr id="7" name="TextBox 6"/>
+            <a:endParaRPr/>
+          </a:p>
+        </p:txBody>
+      </p:sp>
+      <p:sp>
+        <p:nvSpPr>
+          <p:cNvPr id="11" name="TextBox 10"/>
           <p:cNvSpPr txBox="1"/>
           <p:nvPr/>
         </p:nvSpPr>
         <p:spPr>
           <a:xfrm>
-            <a:off x="768640" y="1820000"/>
-            <a:ext cx="3010000" cy="4350000"/>
+            <a:off x="6518640" y="1780000"/>
+            <a:ext cx="4880000" cy="4437112"/>
           </a:xfrm>
           <a:prstGeom prst="rect">
             <a:avLst/>
@@ -7718,57 +7247,13 @@
           <a:lstStyle/>
           <a:p>
             <a:r>
-              <a:rPr sz="950" b="1">
-                <a:solidFill>
-                  <a:srgbClr val="028090"/>
-                </a:solidFill>
-                <a:latin typeface="Arial"/>
-              </a:rPr>
-              <a:t>PHASE 1  •  Week 1
-</a:t>
-            </a:r>
-            <a:r>
-              <a:rPr sz="900" b="1">
-                <a:solidFill>
-                  <a:srgbClr val="007A6E"/>
-                </a:solidFill>
-                <a:latin typeface="Arial"/>
-              </a:rPr>
-              <a:t>[COMPLETED (100%)]
-</a:t>
-            </a:r>
-          </a:p>
-          <a:p>
-            <a:pPr>
-              <a:spcBef>
-                <a:spcPts val="400"/>
-              </a:spcBef>
-            </a:pPr>
-            <a:r>
-              <a:rPr sz="1400" b="1">
-                <a:solidFill>
-                  <a:srgbClr val="0B3033"/>
-                </a:solidFill>
-                <a:latin typeface="Arial"/>
-              </a:rPr>
-              <a:t>Core Engine &amp; Foundation
-</a:t>
-            </a:r>
-          </a:p>
-          <a:p>
-            <a:pPr>
-              <a:spcBef>
-                <a:spcPts val="200"/>
-              </a:spcBef>
-            </a:pPr>
-            <a:r>
-              <a:rPr sz="950">
-                <a:solidFill>
-                  <a:srgbClr val="5C7A7D"/>
-                </a:solidFill>
-                <a:latin typeface="Arial"/>
-              </a:rPr>
-              <a:t>Formal grammar specification, lexical tokenizer, and LL(1) parsing core.
+              <a:rPr sz="1000" b="1" dirty="0">
+                <a:solidFill>
+                  <a:srgbClr val="009B8A"/>
+                </a:solidFill>
+                <a:latin typeface="Arial"/>
+              </a:rPr>
+              <a:t>PHASE 2: VALIDATION ENGINE &amp; MULTI-FORMAT VISUALIZER
 </a:t>
             </a:r>
           </a:p>
@@ -7779,156 +7264,340 @@
               </a:spcBef>
             </a:pPr>
             <a:r>
-              <a:rPr sz="900" b="1">
+              <a:rPr sz="1000" b="1" dirty="0">
                 <a:solidFill>
                   <a:srgbClr val="0B3033"/>
                 </a:solidFill>
                 <a:latin typeface="Arial"/>
               </a:rPr>
-              <a:t>DELIVERABLES &amp; MODULES:
+              <a:t>✔ Verdict Classifier Engine (validator.py)
 </a:t>
             </a:r>
           </a:p>
           <a:p>
             <a:pPr>
               <a:spcBef>
-                <a:spcPts val="200"/>
+                <a:spcPts val="100"/>
               </a:spcBef>
             </a:pPr>
             <a:r>
-              <a:rPr sz="850">
-                <a:solidFill>
-                  <a:srgbClr val="028090"/>
-                </a:solidFill>
-                <a:latin typeface="Arial"/>
-              </a:rPr>
-              <a:t>▪ </a:t>
-            </a:r>
-            <a:r>
-              <a:rPr sz="900" b="1">
+              <a:rPr sz="1000" dirty="0">
+                <a:solidFill>
+                  <a:srgbClr val="5C7A7D"/>
+                </a:solidFill>
+                <a:latin typeface="Arial"/>
+              </a:rPr>
+              <a:t>High-level interface providing ACCEPTED / REJECTED verdicts. Encapsulates token stream, error taxonomy (DERIVATION_SYNTAX_ERROR, LEXICAL_ERROR), and structured JSON output payload.</a:t>
+            </a:r>
+          </a:p>
+          <a:p>
+            <a:pPr>
+              <a:spcBef>
+                <a:spcPts val="800"/>
+              </a:spcBef>
+            </a:pPr>
+            <a:r>
+              <a:rPr sz="1000" b="1" dirty="0">
                 <a:solidFill>
                   <a:srgbClr val="0B3033"/>
                 </a:solidFill>
                 <a:latin typeface="Arial"/>
               </a:rPr>
-              <a:t>grammar/email.cfg: </a:t>
-            </a:r>
-            <a:r>
-              <a:rPr sz="850">
-                <a:solidFill>
-                  <a:srgbClr val="5C7A7D"/>
-                </a:solidFill>
-                <a:latin typeface="Arial"/>
-              </a:rPr>
-              <a:t>CFG production rules</a:t>
+              <a:t>✔ Semantic Sub-Pattern Extractor
+</a:t>
             </a:r>
           </a:p>
           <a:p>
             <a:pPr>
               <a:spcBef>
-                <a:spcPts val="200"/>
+                <a:spcPts val="100"/>
               </a:spcBef>
             </a:pPr>
             <a:r>
-              <a:rPr sz="850">
-                <a:solidFill>
-                  <a:srgbClr val="028090"/>
-                </a:solidFill>
-                <a:latin typeface="Arial"/>
-              </a:rPr>
-              <a:t>▪ </a:t>
-            </a:r>
-            <a:r>
-              <a:rPr sz="900" b="1">
+              <a:rPr sz="1000" dirty="0">
+                <a:solidFill>
+                  <a:srgbClr val="5C7A7D"/>
+                </a:solidFill>
+                <a:latin typeface="Arial"/>
+              </a:rPr>
+              <a:t>Automatically traverses the generated parse tree to extract semantic components: </a:t>
+            </a:r>
+            <a:r>
+              <a:rPr sz="1000" dirty="0" err="1">
+                <a:solidFill>
+                  <a:srgbClr val="5C7A7D"/>
+                </a:solidFill>
+                <a:latin typeface="Arial"/>
+              </a:rPr>
+              <a:t>local_part</a:t>
+            </a:r>
+            <a:r>
+              <a:rPr sz="1000" dirty="0">
+                <a:solidFill>
+                  <a:srgbClr val="5C7A7D"/>
+                </a:solidFill>
+                <a:latin typeface="Arial"/>
+              </a:rPr>
+              <a:t>, domain, </a:t>
+            </a:r>
+            <a:r>
+              <a:rPr sz="1000" dirty="0" err="1">
+                <a:solidFill>
+                  <a:srgbClr val="5C7A7D"/>
+                </a:solidFill>
+                <a:latin typeface="Arial"/>
+              </a:rPr>
+              <a:t>tld</a:t>
+            </a:r>
+            <a:r>
+              <a:rPr sz="1000" dirty="0">
+                <a:solidFill>
+                  <a:srgbClr val="5C7A7D"/>
+                </a:solidFill>
+                <a:latin typeface="Arial"/>
+              </a:rPr>
+              <a:t>, subdomains, and user tags (+tag) without secondary regex parsing.</a:t>
+            </a:r>
+          </a:p>
+          <a:p>
+            <a:pPr>
+              <a:spcBef>
+                <a:spcPts val="800"/>
+              </a:spcBef>
+            </a:pPr>
+            <a:r>
+              <a:rPr sz="1000" b="1" dirty="0">
                 <a:solidFill>
                   <a:srgbClr val="0B3033"/>
                 </a:solidFill>
                 <a:latin typeface="Arial"/>
               </a:rPr>
-              <a:t>lexer.py: </a:t>
-            </a:r>
-            <a:r>
-              <a:rPr sz="850">
-                <a:solidFill>
-                  <a:srgbClr val="5C7A7D"/>
-                </a:solidFill>
-                <a:latin typeface="Arial"/>
-              </a:rPr>
-              <a:t>Position-aware tokenizer</a:t>
+              <a:t>✔ Triple-Format Parse Tree Visualizer (visualize.py)
+</a:t>
             </a:r>
           </a:p>
           <a:p>
             <a:pPr>
               <a:spcBef>
-                <a:spcPts val="200"/>
+                <a:spcPts val="100"/>
               </a:spcBef>
             </a:pPr>
             <a:r>
-              <a:rPr sz="850">
-                <a:solidFill>
-                  <a:srgbClr val="028090"/>
-                </a:solidFill>
-                <a:latin typeface="Arial"/>
-              </a:rPr>
-              <a:t>▪ </a:t>
-            </a:r>
-            <a:r>
-              <a:rPr sz="900" b="1">
+              <a:rPr sz="1000" dirty="0">
+                <a:solidFill>
+                  <a:srgbClr val="5C7A7D"/>
+                </a:solidFill>
+                <a:latin typeface="Arial"/>
+              </a:rPr>
+              <a:t>1) Pure-Python Vector SVG: Interactive graphics with color-coded nodes (Root, Non-Terminals, Terminals).
+2) </a:t>
+            </a:r>
+            <a:r>
+              <a:rPr sz="1000" dirty="0" err="1">
+                <a:solidFill>
+                  <a:srgbClr val="5C7A7D"/>
+                </a:solidFill>
+                <a:latin typeface="Arial"/>
+              </a:rPr>
+              <a:t>Graphviz</a:t>
+            </a:r>
+            <a:r>
+              <a:rPr sz="1000" dirty="0">
+                <a:solidFill>
+                  <a:srgbClr val="5C7A7D"/>
+                </a:solidFill>
+                <a:latin typeface="Arial"/>
+              </a:rPr>
+              <a:t> DOT: Industrial standard graph description for system integration.
+3) Unicode ASCII Tree: Lightweight monospace tree for instant console terminal display.</a:t>
+            </a:r>
+          </a:p>
+          <a:p>
+            <a:pPr>
+              <a:spcBef>
+                <a:spcPts val="800"/>
+              </a:spcBef>
+            </a:pPr>
+            <a:r>
+              <a:rPr sz="1000" b="1" dirty="0">
                 <a:solidFill>
                   <a:srgbClr val="0B3033"/>
                 </a:solidFill>
                 <a:latin typeface="Arial"/>
               </a:rPr>
-              <a:t>parser.py: </a:t>
-            </a:r>
-            <a:r>
-              <a:rPr sz="850">
-                <a:solidFill>
-                  <a:srgbClr val="5C7A7D"/>
-                </a:solidFill>
-                <a:latin typeface="Arial"/>
-              </a:rPr>
-              <a:t>Recursive-descent LL(1)</a:t>
+              <a:t>✔ Unified Command-Line Pipeline
+</a:t>
             </a:r>
           </a:p>
           <a:p>
             <a:pPr>
               <a:spcBef>
-                <a:spcPts val="1400"/>
+                <a:spcPts val="100"/>
               </a:spcBef>
             </a:pPr>
             <a:r>
-              <a:rPr sz="850">
-                <a:solidFill>
-                  <a:srgbClr val="5C7A7D"/>
-                </a:solidFill>
-                <a:latin typeface="Arial"/>
-              </a:rPr>
-              <a:t>Test Suite Accuracy
-</a:t>
-            </a:r>
-            <a:r>
-              <a:rPr sz="1200" b="1">
-                <a:solidFill>
-                  <a:srgbClr val="028090"/>
-                </a:solidFill>
-                <a:latin typeface="Arial"/>
-              </a:rPr>
-              <a:t>10/10 Passed (100%)</a:t>
-            </a:r>
-          </a:p>
-        </p:txBody>
-      </p:sp>
-      <p:sp>
-        <p:nvSpPr>
-          <p:cNvPr id="8" name="Rounded Rectangle 7"/>
-          <p:cNvSpPr/>
-          <p:nvPr/>
-        </p:nvSpPr>
-        <p:spPr>
-          <a:xfrm>
-            <a:off x="4368640" y="1620000"/>
-            <a:ext cx="3450000" cy="4750000"/>
+              <a:rPr sz="1000" dirty="0">
+                <a:solidFill>
+                  <a:srgbClr val="5C7A7D"/>
+                </a:solidFill>
+                <a:latin typeface="Arial"/>
+              </a:rPr>
+              <a:t>Supports single pattern evaluation (--input), batch file evaluation (samples.txt), and an interactive REPL for live pattern debugging with instant tree exports.</a:t>
+            </a:r>
+          </a:p>
+        </p:txBody>
+      </p:sp>
+    </p:spTree>
+  </p:cSld>
+  <p:clrMapOvr>
+    <a:masterClrMapping/>
+  </p:clrMapOvr>
+</p:sld>
+</file>
+
+<file path=ppt/slides/slide7.xml><?xml version="1.0" encoding="utf-8"?>
+<p:sld xmlns:a="http://schemas.openxmlformats.org/drawingml/2006/main" xmlns:r="http://schemas.openxmlformats.org/officeDocument/2006/relationships" xmlns:p="http://schemas.openxmlformats.org/presentationml/2006/main">
+  <p:cSld>
+    <p:bg>
+      <p:bgPr>
+        <a:solidFill>
+          <a:srgbClr val="F2F7F7"/>
+        </a:solidFill>
+        <a:effectLst/>
+      </p:bgPr>
+    </p:bg>
+    <p:spTree>
+      <p:nvGrpSpPr>
+        <p:cNvPr id="1" name=""/>
+        <p:cNvGrpSpPr/>
+        <p:nvPr/>
+      </p:nvGrpSpPr>
+      <p:grpSpPr>
+        <a:xfrm>
+          <a:off x="0" y="0"/>
+          <a:ext cx="0" cy="0"/>
+          <a:chOff x="0" y="0"/>
+          <a:chExt cx="0" cy="0"/>
+        </a:xfrm>
+      </p:grpSpPr>
+      <p:sp>
+        <p:nvSpPr>
+          <p:cNvPr id="3" name="TextBox 2"/>
+          <p:cNvSpPr txBox="1"/>
+          <p:nvPr/>
+        </p:nvSpPr>
+        <p:spPr>
+          <a:xfrm>
+            <a:off x="548640" y="617220"/>
+            <a:ext cx="11094720" cy="520000"/>
+          </a:xfrm>
+          <a:prstGeom prst="rect">
+            <a:avLst/>
+          </a:prstGeom>
+          <a:noFill/>
+        </p:spPr>
+        <p:txBody>
+          <a:bodyPr wrap="square" lIns="0" tIns="0" rIns="0" bIns="0">
+            <a:spAutoFit/>
+          </a:bodyPr>
+          <a:lstStyle/>
+          <a:p>
+            <a:pPr>
+              <a:defRPr sz="2600" b="1">
+                <a:solidFill>
+                  <a:srgbClr val="0B3033"/>
+                </a:solidFill>
+                <a:latin typeface="Arial"/>
+              </a:defRPr>
+            </a:pPr>
+            <a:r>
+              <a:t>Interactive Web Application &amp; Studio Architecture</a:t>
+            </a:r>
+          </a:p>
+        </p:txBody>
+      </p:sp>
+      <p:sp>
+        <p:nvSpPr>
+          <p:cNvPr id="4" name="TextBox 3"/>
+          <p:cNvSpPr txBox="1"/>
+          <p:nvPr/>
+        </p:nvSpPr>
+        <p:spPr>
+          <a:xfrm>
+            <a:off x="548640" y="1170432"/>
+            <a:ext cx="11094720" cy="320000"/>
+          </a:xfrm>
+          <a:prstGeom prst="rect">
+            <a:avLst/>
+          </a:prstGeom>
+          <a:noFill/>
+        </p:spPr>
+        <p:txBody>
+          <a:bodyPr wrap="square" lIns="0" tIns="0" rIns="0" bIns="0">
+            <a:spAutoFit/>
+          </a:bodyPr>
+          <a:lstStyle/>
+          <a:p>
+            <a:pPr>
+              <a:defRPr sz="1100">
+                <a:solidFill>
+                  <a:srgbClr val="5C7A7D"/>
+                </a:solidFill>
+                <a:latin typeface="Arial"/>
+              </a:defRPr>
+            </a:pPr>
+            <a:r>
+              <a:t>Modern browser-based studio providing real-time visual parsing, interactive AST exploration, batch processing, and live benchmarks.</a:t>
+            </a:r>
+          </a:p>
+        </p:txBody>
+      </p:sp>
+      <p:sp>
+        <p:nvSpPr>
+          <p:cNvPr id="5" name="TextBox 4"/>
+          <p:cNvSpPr txBox="1"/>
+          <p:nvPr/>
+        </p:nvSpPr>
+        <p:spPr>
+          <a:xfrm>
+            <a:off x="7616952" y="6537960"/>
+            <a:ext cx="4114800" cy="240000"/>
+          </a:xfrm>
+          <a:prstGeom prst="rect">
+            <a:avLst/>
+          </a:prstGeom>
+          <a:noFill/>
+        </p:spPr>
+        <p:txBody>
+          <a:bodyPr wrap="square" lIns="0" tIns="0" rIns="0" bIns="0">
+            <a:spAutoFit/>
+          </a:bodyPr>
+          <a:lstStyle/>
+          <a:p>
+            <a:pPr>
+              <a:defRPr sz="800">
+                <a:solidFill>
+                  <a:srgbClr val="5C7A7D"/>
+                </a:solidFill>
+                <a:latin typeface="Arial"/>
+              </a:defRPr>
+            </a:pPr>
+            <a:r>
+              <a:t>GRAMMAR-BASED PATTERN RECOGNITION • CM23042</a:t>
+            </a:r>
+          </a:p>
+        </p:txBody>
+      </p:sp>
+      <p:sp>
+        <p:nvSpPr>
+          <p:cNvPr id="6" name="Rounded Rectangle 5"/>
+          <p:cNvSpPr/>
+          <p:nvPr/>
+        </p:nvSpPr>
+        <p:spPr>
+          <a:xfrm>
+            <a:off x="548640" y="1580000"/>
+            <a:ext cx="2650000" cy="4780000"/>
           </a:xfrm>
           <a:prstGeom prst="roundRect">
             <a:avLst/>
@@ -7938,7 +7607,7 @@
           </a:solidFill>
           <a:ln w="19050">
             <a:solidFill>
-              <a:srgbClr val="00A896"/>
+              <a:srgbClr val="F0642F"/>
             </a:solidFill>
           </a:ln>
         </p:spPr>
@@ -7961,28 +7630,240 @@
           <a:lstStyle/>
           <a:p>
             <a:pPr algn="ctr"/>
-          </a:p>
-        </p:txBody>
-      </p:sp>
-      <p:sp>
-        <p:nvSpPr>
-          <p:cNvPr id="9" name="Rectangle 8"/>
-          <p:cNvSpPr/>
-          <p:nvPr/>
-        </p:nvSpPr>
-        <p:spPr>
-          <a:xfrm>
-            <a:off x="4368640" y="1620000"/>
-            <a:ext cx="3450000" cy="90000"/>
+            <a:endParaRPr/>
+          </a:p>
+        </p:txBody>
+      </p:sp>
+      <p:sp>
+        <p:nvSpPr>
+          <p:cNvPr id="8" name="TextBox 7"/>
+          <p:cNvSpPr txBox="1"/>
+          <p:nvPr/>
+        </p:nvSpPr>
+        <p:spPr>
+          <a:xfrm>
+            <a:off x="728640" y="1770000"/>
+            <a:ext cx="2290000" cy="3667671"/>
           </a:xfrm>
           <a:prstGeom prst="rect">
             <a:avLst/>
           </a:prstGeom>
+          <a:noFill/>
+        </p:spPr>
+        <p:txBody>
+          <a:bodyPr wrap="square" lIns="0" tIns="0" rIns="0" bIns="0">
+            <a:spAutoFit/>
+          </a:bodyPr>
+          <a:lstStyle/>
+          <a:p>
+            <a:r>
+              <a:rPr sz="1000" b="1" dirty="0">
+                <a:solidFill>
+                  <a:srgbClr val="F0642F"/>
+                </a:solidFill>
+                <a:latin typeface="Arial"/>
+              </a:rPr>
+              <a:t>STUDIO MODULE 1
+</a:t>
+            </a:r>
+          </a:p>
+          <a:p>
+            <a:pPr>
+              <a:spcBef>
+                <a:spcPts val="300"/>
+              </a:spcBef>
+            </a:pPr>
+            <a:r>
+              <a:rPr sz="1000" b="1" dirty="0">
+                <a:solidFill>
+                  <a:srgbClr val="0B3033"/>
+                </a:solidFill>
+                <a:latin typeface="Arial"/>
+              </a:rPr>
+              <a:t>Pattern Parser Playground
+</a:t>
+            </a:r>
+          </a:p>
+          <a:p>
+            <a:pPr>
+              <a:spcBef>
+                <a:spcPts val="200"/>
+              </a:spcBef>
+            </a:pPr>
+            <a:r>
+              <a:rPr sz="1000" dirty="0">
+                <a:solidFill>
+                  <a:srgbClr val="5C7A7D"/>
+                </a:solidFill>
+                <a:latin typeface="Arial"/>
+              </a:rPr>
+              <a:t>Real-time interactive grammar derivation studio.
+</a:t>
+            </a:r>
+          </a:p>
+          <a:p>
+            <a:pPr>
+              <a:spcBef>
+                <a:spcPts val="600"/>
+              </a:spcBef>
+            </a:pPr>
+            <a:r>
+              <a:rPr sz="1000" dirty="0">
+                <a:solidFill>
+                  <a:srgbClr val="F0642F"/>
+                </a:solidFill>
+                <a:latin typeface="Arial"/>
+              </a:rPr>
+              <a:t>▪ </a:t>
+            </a:r>
+            <a:r>
+              <a:rPr sz="1000" b="1" dirty="0">
+                <a:solidFill>
+                  <a:srgbClr val="0B3033"/>
+                </a:solidFill>
+                <a:latin typeface="Arial"/>
+              </a:rPr>
+              <a:t>Dual Grammar Switcher
+</a:t>
+            </a:r>
+            <a:r>
+              <a:rPr sz="1000" dirty="0">
+                <a:solidFill>
+                  <a:srgbClr val="5C7A7D"/>
+                </a:solidFill>
+                <a:latin typeface="Arial"/>
+              </a:rPr>
+              <a:t>Instant toggle between Email CFG and Date CFG models.</a:t>
+            </a:r>
+          </a:p>
+          <a:p>
+            <a:pPr>
+              <a:spcBef>
+                <a:spcPts val="600"/>
+              </a:spcBef>
+            </a:pPr>
+            <a:r>
+              <a:rPr sz="1000" dirty="0">
+                <a:solidFill>
+                  <a:srgbClr val="F0642F"/>
+                </a:solidFill>
+                <a:latin typeface="Arial"/>
+              </a:rPr>
+              <a:t>▪ </a:t>
+            </a:r>
+            <a:r>
+              <a:rPr sz="1000" b="1" dirty="0">
+                <a:solidFill>
+                  <a:srgbClr val="0B3033"/>
+                </a:solidFill>
+                <a:latin typeface="Arial"/>
+              </a:rPr>
+              <a:t>Preset Test Cases
+</a:t>
+            </a:r>
+            <a:r>
+              <a:rPr sz="1000" dirty="0">
+                <a:solidFill>
+                  <a:srgbClr val="5C7A7D"/>
+                </a:solidFill>
+                <a:latin typeface="Arial"/>
+              </a:rPr>
+              <a:t>Quick-test pills for standard, subdomains, plus-tags, and error cases.</a:t>
+            </a:r>
+          </a:p>
+          <a:p>
+            <a:pPr>
+              <a:spcBef>
+                <a:spcPts val="600"/>
+              </a:spcBef>
+            </a:pPr>
+            <a:r>
+              <a:rPr sz="1000" dirty="0">
+                <a:solidFill>
+                  <a:srgbClr val="F0642F"/>
+                </a:solidFill>
+                <a:latin typeface="Arial"/>
+              </a:rPr>
+              <a:t>▪ </a:t>
+            </a:r>
+            <a:r>
+              <a:rPr sz="1000" b="1" dirty="0">
+                <a:solidFill>
+                  <a:srgbClr val="0B3033"/>
+                </a:solidFill>
+                <a:latin typeface="Arial"/>
+              </a:rPr>
+              <a:t>Live Lexer Stream
+</a:t>
+            </a:r>
+            <a:r>
+              <a:rPr sz="1000" dirty="0">
+                <a:solidFill>
+                  <a:srgbClr val="5C7A7D"/>
+                </a:solidFill>
+                <a:latin typeface="Arial"/>
+              </a:rPr>
+              <a:t>Interactive chips showing terminal types and character position offsets.</a:t>
+            </a:r>
+          </a:p>
+          <a:p>
+            <a:pPr>
+              <a:spcBef>
+                <a:spcPts val="600"/>
+              </a:spcBef>
+            </a:pPr>
+            <a:r>
+              <a:rPr sz="1000" dirty="0">
+                <a:solidFill>
+                  <a:srgbClr val="F0642F"/>
+                </a:solidFill>
+                <a:latin typeface="Arial"/>
+              </a:rPr>
+              <a:t>▪ </a:t>
+            </a:r>
+            <a:r>
+              <a:rPr sz="1000" b="1" dirty="0">
+                <a:solidFill>
+                  <a:srgbClr val="0B3033"/>
+                </a:solidFill>
+                <a:latin typeface="Arial"/>
+              </a:rPr>
+              <a:t>Reactive UI
+</a:t>
+            </a:r>
+            <a:r>
+              <a:rPr sz="1000" dirty="0">
+                <a:solidFill>
+                  <a:srgbClr val="5C7A7D"/>
+                </a:solidFill>
+                <a:latin typeface="Arial"/>
+              </a:rPr>
+              <a:t>Under 5ms parse response time with zero page refresh.</a:t>
+            </a:r>
+          </a:p>
+        </p:txBody>
+      </p:sp>
+      <p:sp>
+        <p:nvSpPr>
+          <p:cNvPr id="9" name="Rounded Rectangle 8"/>
+          <p:cNvSpPr/>
+          <p:nvPr/>
+        </p:nvSpPr>
+        <p:spPr>
+          <a:xfrm>
+            <a:off x="3408640" y="1580000"/>
+            <a:ext cx="2650000" cy="4780000"/>
+          </a:xfrm>
+          <a:prstGeom prst="roundRect">
+            <a:avLst/>
+          </a:prstGeom>
           <a:solidFill>
-            <a:srgbClr val="00A896"/>
+            <a:srgbClr val="FFFFFF"/>
           </a:solidFill>
-          <a:ln>
-            <a:noFill/>
+          <a:ln w="19050">
+            <a:solidFill>
+              <a:srgbClr val="028090"/>
+            </a:solidFill>
           </a:ln>
         </p:spPr>
         <p:style>
@@ -8004,19 +7885,20 @@
           <a:lstStyle/>
           <a:p>
             <a:pPr algn="ctr"/>
-          </a:p>
-        </p:txBody>
-      </p:sp>
-      <p:sp>
-        <p:nvSpPr>
-          <p:cNvPr id="10" name="TextBox 9"/>
+            <a:endParaRPr/>
+          </a:p>
+        </p:txBody>
+      </p:sp>
+      <p:sp>
+        <p:nvSpPr>
+          <p:cNvPr id="11" name="TextBox 10"/>
           <p:cNvSpPr txBox="1"/>
           <p:nvPr/>
         </p:nvSpPr>
         <p:spPr>
           <a:xfrm>
-            <a:off x="4588640" y="1820000"/>
-            <a:ext cx="3010000" cy="4350000"/>
+            <a:off x="3588640" y="1770000"/>
+            <a:ext cx="2290000" cy="3667671"/>
           </a:xfrm>
           <a:prstGeom prst="rect">
             <a:avLst/>
@@ -8030,40 +7912,30 @@
           <a:lstStyle/>
           <a:p>
             <a:r>
-              <a:rPr sz="950" b="1">
-                <a:solidFill>
-                  <a:srgbClr val="00A896"/>
-                </a:solidFill>
-                <a:latin typeface="Arial"/>
-              </a:rPr>
-              <a:t>PHASE 2  •  Weeks 2–3
+              <a:rPr sz="1000" b="1" dirty="0">
+                <a:solidFill>
+                  <a:srgbClr val="028090"/>
+                </a:solidFill>
+                <a:latin typeface="Arial"/>
+              </a:rPr>
+              <a:t>STUDIO MODULE 2
 </a:t>
             </a:r>
-            <a:r>
-              <a:rPr sz="900" b="1">
-                <a:solidFill>
-                  <a:srgbClr val="007A6E"/>
-                </a:solidFill>
-                <a:latin typeface="Arial"/>
-              </a:rPr>
-              <a:t>[COMPLETED (100%)]
-</a:t>
-            </a:r>
           </a:p>
           <a:p>
             <a:pPr>
               <a:spcBef>
-                <a:spcPts val="400"/>
+                <a:spcPts val="300"/>
               </a:spcBef>
             </a:pPr>
             <a:r>
-              <a:rPr sz="1400" b="1">
+              <a:rPr sz="1000" b="1" dirty="0">
                 <a:solidFill>
                   <a:srgbClr val="0B3033"/>
                 </a:solidFill>
                 <a:latin typeface="Arial"/>
               </a:rPr>
-              <a:t>Validation &amp; CLI Pipeline
+              <a:t>Dynamic SVG Parse Tree
 </a:t>
             </a:r>
           </a:p>
@@ -8074,173 +7946,168 @@
               </a:spcBef>
             </a:pPr>
             <a:r>
-              <a:rPr sz="950">
-                <a:solidFill>
-                  <a:srgbClr val="5C7A7D"/>
-                </a:solidFill>
-                <a:latin typeface="Arial"/>
-              </a:rPr>
-              <a:t>Verdict engine, structured diagnostics, and multi-format visual tree rendering.
+              <a:rPr sz="1000" dirty="0">
+                <a:solidFill>
+                  <a:srgbClr val="5C7A7D"/>
+                </a:solidFill>
+                <a:latin typeface="Arial"/>
+              </a:rPr>
+              <a:t>Live Abstract Syntax Tree visualization in the browser.
 </a:t>
             </a:r>
           </a:p>
           <a:p>
             <a:pPr>
               <a:spcBef>
-                <a:spcPts val="800"/>
+                <a:spcPts val="600"/>
               </a:spcBef>
             </a:pPr>
             <a:r>
-              <a:rPr sz="900" b="1">
+              <a:rPr sz="1000" dirty="0">
+                <a:solidFill>
+                  <a:srgbClr val="028090"/>
+                </a:solidFill>
+                <a:latin typeface="Arial"/>
+              </a:rPr>
+              <a:t>▪ </a:t>
+            </a:r>
+            <a:r>
+              <a:rPr sz="1000" b="1" dirty="0">
                 <a:solidFill>
                   <a:srgbClr val="0B3033"/>
                 </a:solidFill>
                 <a:latin typeface="Arial"/>
               </a:rPr>
-              <a:t>DELIVERABLES &amp; MODULES:
+              <a:t>Vector SVG Engine
 </a:t>
             </a:r>
+            <a:r>
+              <a:rPr sz="1000" dirty="0">
+                <a:solidFill>
+                  <a:srgbClr val="5C7A7D"/>
+                </a:solidFill>
+                <a:latin typeface="Arial"/>
+              </a:rPr>
+              <a:t>Crisp, scalable vector tree graph embedded directly in DOM.</a:t>
+            </a:r>
           </a:p>
           <a:p>
             <a:pPr>
               <a:spcBef>
-                <a:spcPts val="200"/>
+                <a:spcPts val="600"/>
               </a:spcBef>
             </a:pPr>
             <a:r>
-              <a:rPr sz="850">
-                <a:solidFill>
-                  <a:srgbClr val="00A896"/>
+              <a:rPr sz="1000" dirty="0">
+                <a:solidFill>
+                  <a:srgbClr val="028090"/>
                 </a:solidFill>
                 <a:latin typeface="Arial"/>
               </a:rPr>
               <a:t>▪ </a:t>
             </a:r>
             <a:r>
-              <a:rPr sz="900" b="1">
+              <a:rPr sz="1000" b="1" dirty="0">
                 <a:solidFill>
                   <a:srgbClr val="0B3033"/>
                 </a:solidFill>
                 <a:latin typeface="Arial"/>
               </a:rPr>
-              <a:t>validator.py: </a:t>
-            </a:r>
-            <a:r>
-              <a:rPr sz="850">
-                <a:solidFill>
-                  <a:srgbClr val="5C7A7D"/>
-                </a:solidFill>
-                <a:latin typeface="Arial"/>
-              </a:rPr>
-              <a:t>ACCEPT/REJECT verdict &amp; CLI</a:t>
+              <a:t>Color-Coded Hierarchy
+</a:t>
+            </a:r>
+            <a:r>
+              <a:rPr sz="1000" dirty="0">
+                <a:solidFill>
+                  <a:srgbClr val="5C7A7D"/>
+                </a:solidFill>
+                <a:latin typeface="Arial"/>
+              </a:rPr>
+              <a:t>Orange root symbol, Blue non-terminals, Emerald terminal symbols.</a:t>
             </a:r>
           </a:p>
           <a:p>
             <a:pPr>
               <a:spcBef>
-                <a:spcPts val="200"/>
+                <a:spcPts val="600"/>
               </a:spcBef>
             </a:pPr>
             <a:r>
-              <a:rPr sz="850">
-                <a:solidFill>
-                  <a:srgbClr val="00A896"/>
+              <a:rPr sz="1000" dirty="0">
+                <a:solidFill>
+                  <a:srgbClr val="028090"/>
                 </a:solidFill>
                 <a:latin typeface="Arial"/>
               </a:rPr>
               <a:t>▪ </a:t>
             </a:r>
             <a:r>
-              <a:rPr sz="900" b="1">
+              <a:rPr sz="1000" b="1" dirty="0">
                 <a:solidFill>
                   <a:srgbClr val="0B3033"/>
                 </a:solidFill>
                 <a:latin typeface="Arial"/>
               </a:rPr>
-              <a:t>visualize.py: </a:t>
-            </a:r>
-            <a:r>
-              <a:rPr sz="850">
-                <a:solidFill>
-                  <a:srgbClr val="5C7A7D"/>
-                </a:solidFill>
-                <a:latin typeface="Arial"/>
-              </a:rPr>
-              <a:t>SVG, DOT &amp; ASCII trees</a:t>
+              <a:t>Monospace ASCII View
+</a:t>
+            </a:r>
+            <a:r>
+              <a:rPr sz="1000" dirty="0">
+                <a:solidFill>
+                  <a:srgbClr val="5C7A7D"/>
+                </a:solidFill>
+                <a:latin typeface="Arial"/>
+              </a:rPr>
+              <a:t>Instant tab switcher to view console-style Unicode tree.</a:t>
             </a:r>
           </a:p>
           <a:p>
             <a:pPr>
               <a:spcBef>
-                <a:spcPts val="200"/>
+                <a:spcPts val="600"/>
               </a:spcBef>
             </a:pPr>
             <a:r>
-              <a:rPr sz="850">
-                <a:solidFill>
-                  <a:srgbClr val="00A896"/>
+              <a:rPr sz="1000" dirty="0">
+                <a:solidFill>
+                  <a:srgbClr val="028090"/>
                 </a:solidFill>
                 <a:latin typeface="Arial"/>
               </a:rPr>
               <a:t>▪ </a:t>
             </a:r>
             <a:r>
-              <a:rPr sz="900" b="1">
+              <a:rPr sz="1000" b="1" dirty="0">
                 <a:solidFill>
                   <a:srgbClr val="0B3033"/>
                 </a:solidFill>
                 <a:latin typeface="Arial"/>
               </a:rPr>
-              <a:t>CLI Pipeline: </a:t>
-            </a:r>
-            <a:r>
-              <a:rPr sz="850">
-                <a:solidFill>
-                  <a:srgbClr val="5C7A7D"/>
-                </a:solidFill>
-                <a:latin typeface="Arial"/>
-              </a:rPr>
-              <a:t>Single, batch &amp; REPL mode</a:t>
-            </a:r>
-          </a:p>
-          <a:p>
-            <a:pPr>
-              <a:spcBef>
-                <a:spcPts val="1400"/>
-              </a:spcBef>
-            </a:pPr>
-            <a:r>
-              <a:rPr sz="850">
-                <a:solidFill>
-                  <a:srgbClr val="5C7A7D"/>
-                </a:solidFill>
-                <a:latin typeface="Arial"/>
-              </a:rPr>
-              <a:t>Test Suite Accuracy
+              <a:t>Sub-Pattern Cards
 </a:t>
             </a:r>
             <a:r>
-              <a:rPr sz="1200" b="1">
-                <a:solidFill>
-                  <a:srgbClr val="00A896"/>
-                </a:solidFill>
-                <a:latin typeface="Arial"/>
-              </a:rPr>
-              <a:t>19/19 Passed (100%)</a:t>
-            </a:r>
-          </a:p>
-        </p:txBody>
-      </p:sp>
-      <p:sp>
-        <p:nvSpPr>
-          <p:cNvPr id="11" name="Rounded Rectangle 10"/>
-          <p:cNvSpPr/>
-          <p:nvPr/>
-        </p:nvSpPr>
-        <p:spPr>
-          <a:xfrm>
-            <a:off x="8188640" y="1620000"/>
-            <a:ext cx="3450000" cy="4750000"/>
+              <a:rPr sz="1000" dirty="0">
+                <a:solidFill>
+                  <a:srgbClr val="5C7A7D"/>
+                </a:solidFill>
+                <a:latin typeface="Arial"/>
+              </a:rPr>
+              <a:t>Structured cards for domain, username, TLD, and full match.</a:t>
+            </a:r>
+          </a:p>
+        </p:txBody>
+      </p:sp>
+      <p:sp>
+        <p:nvSpPr>
+          <p:cNvPr id="12" name="Rounded Rectangle 11"/>
+          <p:cNvSpPr/>
+          <p:nvPr/>
+        </p:nvSpPr>
+        <p:spPr>
+          <a:xfrm>
+            <a:off x="6268640" y="1580000"/>
+            <a:ext cx="2650000" cy="4780000"/>
           </a:xfrm>
           <a:prstGeom prst="roundRect">
             <a:avLst/>
@@ -8250,7 +8117,7 @@
           </a:solidFill>
           <a:ln w="19050">
             <a:solidFill>
-              <a:srgbClr val="3B6E72"/>
+              <a:srgbClr val="009B8A"/>
             </a:solidFill>
           </a:ln>
         </p:spPr>
@@ -8273,28 +8140,240 @@
           <a:lstStyle/>
           <a:p>
             <a:pPr algn="ctr"/>
-          </a:p>
-        </p:txBody>
-      </p:sp>
-      <p:sp>
-        <p:nvSpPr>
-          <p:cNvPr id="12" name="Rectangle 11"/>
-          <p:cNvSpPr/>
-          <p:nvPr/>
-        </p:nvSpPr>
-        <p:spPr>
-          <a:xfrm>
-            <a:off x="8188640" y="1620000"/>
-            <a:ext cx="3450000" cy="90000"/>
+            <a:endParaRPr/>
+          </a:p>
+        </p:txBody>
+      </p:sp>
+      <p:sp>
+        <p:nvSpPr>
+          <p:cNvPr id="14" name="TextBox 13"/>
+          <p:cNvSpPr txBox="1"/>
+          <p:nvPr/>
+        </p:nvSpPr>
+        <p:spPr>
+          <a:xfrm>
+            <a:off x="6448640" y="1770000"/>
+            <a:ext cx="2290000" cy="3667671"/>
           </a:xfrm>
           <a:prstGeom prst="rect">
             <a:avLst/>
           </a:prstGeom>
+          <a:noFill/>
+        </p:spPr>
+        <p:txBody>
+          <a:bodyPr wrap="square" lIns="0" tIns="0" rIns="0" bIns="0">
+            <a:spAutoFit/>
+          </a:bodyPr>
+          <a:lstStyle/>
+          <a:p>
+            <a:r>
+              <a:rPr sz="1000" b="1" dirty="0">
+                <a:solidFill>
+                  <a:srgbClr val="009B8A"/>
+                </a:solidFill>
+                <a:latin typeface="Arial"/>
+              </a:rPr>
+              <a:t>STUDIO MODULE 3
+</a:t>
+            </a:r>
+          </a:p>
+          <a:p>
+            <a:pPr>
+              <a:spcBef>
+                <a:spcPts val="300"/>
+              </a:spcBef>
+            </a:pPr>
+            <a:r>
+              <a:rPr sz="1000" b="1" dirty="0">
+                <a:solidFill>
+                  <a:srgbClr val="0B3033"/>
+                </a:solidFill>
+                <a:latin typeface="Arial"/>
+              </a:rPr>
+              <a:t>Batch Testing Matrix
+</a:t>
+            </a:r>
+          </a:p>
+          <a:p>
+            <a:pPr>
+              <a:spcBef>
+                <a:spcPts val="200"/>
+              </a:spcBef>
+            </a:pPr>
+            <a:r>
+              <a:rPr sz="1000" dirty="0">
+                <a:solidFill>
+                  <a:srgbClr val="5C7A7D"/>
+                </a:solidFill>
+                <a:latin typeface="Arial"/>
+              </a:rPr>
+              <a:t>High-throughput evaluation of multi-pattern datasets.
+</a:t>
+            </a:r>
+          </a:p>
+          <a:p>
+            <a:pPr>
+              <a:spcBef>
+                <a:spcPts val="600"/>
+              </a:spcBef>
+            </a:pPr>
+            <a:r>
+              <a:rPr sz="1000" dirty="0">
+                <a:solidFill>
+                  <a:srgbClr val="009B8A"/>
+                </a:solidFill>
+                <a:latin typeface="Arial"/>
+              </a:rPr>
+              <a:t>▪ </a:t>
+            </a:r>
+            <a:r>
+              <a:rPr sz="1000" b="1" dirty="0">
+                <a:solidFill>
+                  <a:srgbClr val="0B3033"/>
+                </a:solidFill>
+                <a:latin typeface="Arial"/>
+              </a:rPr>
+              <a:t>Multi-Line Input
+</a:t>
+            </a:r>
+            <a:r>
+              <a:rPr sz="1000" dirty="0">
+                <a:solidFill>
+                  <a:srgbClr val="5C7A7D"/>
+                </a:solidFill>
+                <a:latin typeface="Arial"/>
+              </a:rPr>
+              <a:t>Paste or load sample pattern sets (e.g. samples.txt).</a:t>
+            </a:r>
+          </a:p>
+          <a:p>
+            <a:pPr>
+              <a:spcBef>
+                <a:spcPts val="600"/>
+              </a:spcBef>
+            </a:pPr>
+            <a:r>
+              <a:rPr sz="1000" dirty="0">
+                <a:solidFill>
+                  <a:srgbClr val="009B8A"/>
+                </a:solidFill>
+                <a:latin typeface="Arial"/>
+              </a:rPr>
+              <a:t>▪ </a:t>
+            </a:r>
+            <a:r>
+              <a:rPr sz="1000" b="1" dirty="0">
+                <a:solidFill>
+                  <a:srgbClr val="0B3033"/>
+                </a:solidFill>
+                <a:latin typeface="Arial"/>
+              </a:rPr>
+              <a:t>Instant Pass/Fail Matrix
+</a:t>
+            </a:r>
+            <a:r>
+              <a:rPr sz="1000" dirty="0">
+                <a:solidFill>
+                  <a:srgbClr val="5C7A7D"/>
+                </a:solidFill>
+                <a:latin typeface="Arial"/>
+              </a:rPr>
+              <a:t>ACCEPTED and REJECTED badges with reason diagnostics.</a:t>
+            </a:r>
+          </a:p>
+          <a:p>
+            <a:pPr>
+              <a:spcBef>
+                <a:spcPts val="600"/>
+              </a:spcBef>
+            </a:pPr>
+            <a:r>
+              <a:rPr sz="1000" dirty="0">
+                <a:solidFill>
+                  <a:srgbClr val="009B8A"/>
+                </a:solidFill>
+                <a:latin typeface="Arial"/>
+              </a:rPr>
+              <a:t>▪ </a:t>
+            </a:r>
+            <a:r>
+              <a:rPr sz="1000" b="1" dirty="0">
+                <a:solidFill>
+                  <a:srgbClr val="0B3033"/>
+                </a:solidFill>
+                <a:latin typeface="Arial"/>
+              </a:rPr>
+              <a:t>Aggregate Analytics
+</a:t>
+            </a:r>
+            <a:r>
+              <a:rPr sz="1000" dirty="0">
+                <a:solidFill>
+                  <a:srgbClr val="5C7A7D"/>
+                </a:solidFill>
+                <a:latin typeface="Arial"/>
+              </a:rPr>
+              <a:t>Pass rate percentage, total evaluated, and average latency.</a:t>
+            </a:r>
+          </a:p>
+          <a:p>
+            <a:pPr>
+              <a:spcBef>
+                <a:spcPts val="600"/>
+              </a:spcBef>
+            </a:pPr>
+            <a:r>
+              <a:rPr sz="1000" dirty="0">
+                <a:solidFill>
+                  <a:srgbClr val="009B8A"/>
+                </a:solidFill>
+                <a:latin typeface="Arial"/>
+              </a:rPr>
+              <a:t>▪ </a:t>
+            </a:r>
+            <a:r>
+              <a:rPr sz="1000" b="1" dirty="0">
+                <a:solidFill>
+                  <a:srgbClr val="0B3033"/>
+                </a:solidFill>
+                <a:latin typeface="Arial"/>
+              </a:rPr>
+              <a:t>Export Support
+</a:t>
+            </a:r>
+            <a:r>
+              <a:rPr sz="1000" dirty="0">
+                <a:solidFill>
+                  <a:srgbClr val="5C7A7D"/>
+                </a:solidFill>
+                <a:latin typeface="Arial"/>
+              </a:rPr>
+              <a:t>Download structured batch evaluation results.</a:t>
+            </a:r>
+          </a:p>
+        </p:txBody>
+      </p:sp>
+      <p:sp>
+        <p:nvSpPr>
+          <p:cNvPr id="15" name="Rounded Rectangle 14"/>
+          <p:cNvSpPr/>
+          <p:nvPr/>
+        </p:nvSpPr>
+        <p:spPr>
+          <a:xfrm>
+            <a:off x="9128640" y="1580000"/>
+            <a:ext cx="2650000" cy="4780000"/>
+          </a:xfrm>
+          <a:prstGeom prst="roundRect">
+            <a:avLst/>
+          </a:prstGeom>
           <a:solidFill>
-            <a:srgbClr val="3B6E72"/>
+            <a:srgbClr val="FFFFFF"/>
           </a:solidFill>
-          <a:ln>
-            <a:noFill/>
+          <a:ln w="19050">
+            <a:solidFill>
+              <a:srgbClr val="3B6E72"/>
+            </a:solidFill>
           </a:ln>
         </p:spPr>
         <p:style>
@@ -8316,19 +8395,20 @@
           <a:lstStyle/>
           <a:p>
             <a:pPr algn="ctr"/>
-          </a:p>
-        </p:txBody>
-      </p:sp>
-      <p:sp>
-        <p:nvSpPr>
-          <p:cNvPr id="13" name="TextBox 12"/>
+            <a:endParaRPr/>
+          </a:p>
+        </p:txBody>
+      </p:sp>
+      <p:sp>
+        <p:nvSpPr>
+          <p:cNvPr id="17" name="TextBox 16"/>
           <p:cNvSpPr txBox="1"/>
           <p:nvPr/>
         </p:nvSpPr>
         <p:spPr>
           <a:xfrm>
-            <a:off x="8408640" y="1820000"/>
-            <a:ext cx="3010000" cy="4350000"/>
+            <a:off x="9308640" y="1770000"/>
+            <a:ext cx="2290000" cy="3667671"/>
           </a:xfrm>
           <a:prstGeom prst="rect">
             <a:avLst/>
@@ -8342,25 +8422,472 @@
           <a:lstStyle/>
           <a:p>
             <a:r>
-              <a:rPr sz="950" b="1">
+              <a:rPr sz="1000" b="1" dirty="0">
                 <a:solidFill>
                   <a:srgbClr val="3B6E72"/>
                 </a:solidFill>
                 <a:latin typeface="Arial"/>
               </a:rPr>
-              <a:t>PHASE 3  •  Week 4
+              <a:t>STUDIO MODULE 4
 </a:t>
             </a:r>
-            <a:r>
-              <a:rPr sz="900" b="1">
-                <a:solidFill>
-                  <a:srgbClr val="007A6E"/>
-                </a:solidFill>
-                <a:latin typeface="Arial"/>
-              </a:rPr>
-              <a:t>[COMPLETED (100%)]
+          </a:p>
+          <a:p>
+            <a:pPr>
+              <a:spcBef>
+                <a:spcPts val="300"/>
+              </a:spcBef>
+            </a:pPr>
+            <a:r>
+              <a:rPr sz="1000" b="1" dirty="0">
+                <a:solidFill>
+                  <a:srgbClr val="0B3033"/>
+                </a:solidFill>
+                <a:latin typeface="Arial"/>
+              </a:rPr>
+              <a:t>Live Benchmarks Dashboard
 </a:t>
             </a:r>
+          </a:p>
+          <a:p>
+            <a:pPr>
+              <a:spcBef>
+                <a:spcPts val="200"/>
+              </a:spcBef>
+            </a:pPr>
+            <a:r>
+              <a:rPr sz="1000" dirty="0">
+                <a:solidFill>
+                  <a:srgbClr val="5C7A7D"/>
+                </a:solidFill>
+                <a:latin typeface="Arial"/>
+              </a:rPr>
+              <a:t>In-browser empirical performance benchmarking suite.
+</a:t>
+            </a:r>
+          </a:p>
+          <a:p>
+            <a:pPr>
+              <a:spcBef>
+                <a:spcPts val="600"/>
+              </a:spcBef>
+            </a:pPr>
+            <a:r>
+              <a:rPr sz="1000" dirty="0">
+                <a:solidFill>
+                  <a:srgbClr val="3B6E72"/>
+                </a:solidFill>
+                <a:latin typeface="Arial"/>
+              </a:rPr>
+              <a:t>▪ </a:t>
+            </a:r>
+            <a:r>
+              <a:rPr sz="1000" b="1" dirty="0">
+                <a:solidFill>
+                  <a:srgbClr val="0B3033"/>
+                </a:solidFill>
+                <a:latin typeface="Arial"/>
+              </a:rPr>
+              <a:t>Interactive Plot
+</a:t>
+            </a:r>
+            <a:r>
+              <a:rPr sz="1000" dirty="0">
+                <a:solidFill>
+                  <a:srgbClr val="5C7A7D"/>
+                </a:solidFill>
+                <a:latin typeface="Arial"/>
+              </a:rPr>
+              <a:t>SVG Latency vs. Input Scale chart across 9 input lengths.</a:t>
+            </a:r>
+          </a:p>
+          <a:p>
+            <a:pPr>
+              <a:spcBef>
+                <a:spcPts val="600"/>
+              </a:spcBef>
+            </a:pPr>
+            <a:r>
+              <a:rPr sz="1000" dirty="0">
+                <a:solidFill>
+                  <a:srgbClr val="3B6E72"/>
+                </a:solidFill>
+                <a:latin typeface="Arial"/>
+              </a:rPr>
+              <a:t>▪ </a:t>
+            </a:r>
+            <a:r>
+              <a:rPr sz="1000" b="1" dirty="0">
+                <a:solidFill>
+                  <a:srgbClr val="0B3033"/>
+                </a:solidFill>
+                <a:latin typeface="Arial"/>
+              </a:rPr>
+              <a:t>Regression Metrics
+</a:t>
+            </a:r>
+            <a:r>
+              <a:rPr sz="1000" dirty="0">
+                <a:solidFill>
+                  <a:srgbClr val="5C7A7D"/>
+                </a:solidFill>
+                <a:latin typeface="Arial"/>
+              </a:rPr>
+              <a:t>Live display of R², Pearson r, and processing slope.</a:t>
+            </a:r>
+          </a:p>
+          <a:p>
+            <a:pPr>
+              <a:spcBef>
+                <a:spcPts val="600"/>
+              </a:spcBef>
+            </a:pPr>
+            <a:r>
+              <a:rPr sz="1000" dirty="0">
+                <a:solidFill>
+                  <a:srgbClr val="3B6E72"/>
+                </a:solidFill>
+                <a:latin typeface="Arial"/>
+              </a:rPr>
+              <a:t>▪ </a:t>
+            </a:r>
+            <a:r>
+              <a:rPr sz="1000" b="1" dirty="0">
+                <a:solidFill>
+                  <a:srgbClr val="0B3033"/>
+                </a:solidFill>
+                <a:latin typeface="Arial"/>
+              </a:rPr>
+              <a:t>Complexity Verdict
+</a:t>
+            </a:r>
+            <a:r>
+              <a:rPr sz="1000" dirty="0">
+                <a:solidFill>
+                  <a:srgbClr val="5C7A7D"/>
+                </a:solidFill>
+                <a:latin typeface="Arial"/>
+              </a:rPr>
+              <a:t>Empirical confirmation card proving strict O(n) scaling.</a:t>
+            </a:r>
+          </a:p>
+          <a:p>
+            <a:pPr>
+              <a:spcBef>
+                <a:spcPts val="600"/>
+              </a:spcBef>
+            </a:pPr>
+            <a:r>
+              <a:rPr sz="1000" dirty="0">
+                <a:solidFill>
+                  <a:srgbClr val="3B6E72"/>
+                </a:solidFill>
+                <a:latin typeface="Arial"/>
+              </a:rPr>
+              <a:t>▪ </a:t>
+            </a:r>
+            <a:r>
+              <a:rPr sz="1000" b="1" dirty="0">
+                <a:solidFill>
+                  <a:srgbClr val="0B3033"/>
+                </a:solidFill>
+                <a:latin typeface="Arial"/>
+              </a:rPr>
+              <a:t>One-Click Execution
+</a:t>
+            </a:r>
+            <a:r>
+              <a:rPr sz="1000" dirty="0">
+                <a:solidFill>
+                  <a:srgbClr val="5C7A7D"/>
+                </a:solidFill>
+                <a:latin typeface="Arial"/>
+              </a:rPr>
+              <a:t>Re-run live benchmarks directly in the browser.</a:t>
+            </a:r>
+          </a:p>
+        </p:txBody>
+      </p:sp>
+    </p:spTree>
+  </p:cSld>
+  <p:clrMapOvr>
+    <a:masterClrMapping/>
+  </p:clrMapOvr>
+</p:sld>
+</file>
+
+<file path=ppt/slides/slide8.xml><?xml version="1.0" encoding="utf-8"?>
+<p:sld xmlns:a="http://schemas.openxmlformats.org/drawingml/2006/main" xmlns:r="http://schemas.openxmlformats.org/officeDocument/2006/relationships" xmlns:p="http://schemas.openxmlformats.org/presentationml/2006/main">
+  <p:cSld>
+    <p:bg>
+      <p:bgPr>
+        <a:solidFill>
+          <a:srgbClr val="F2F7F7"/>
+        </a:solidFill>
+        <a:effectLst/>
+      </p:bgPr>
+    </p:bg>
+    <p:spTree>
+      <p:nvGrpSpPr>
+        <p:cNvPr id="1" name=""/>
+        <p:cNvGrpSpPr/>
+        <p:nvPr/>
+      </p:nvGrpSpPr>
+      <p:grpSpPr>
+        <a:xfrm>
+          <a:off x="0" y="0"/>
+          <a:ext cx="0" cy="0"/>
+          <a:chOff x="0" y="0"/>
+          <a:chExt cx="0" cy="0"/>
+        </a:xfrm>
+      </p:grpSpPr>
+      <p:sp>
+        <p:nvSpPr>
+          <p:cNvPr id="3" name="TextBox 2"/>
+          <p:cNvSpPr txBox="1"/>
+          <p:nvPr/>
+        </p:nvSpPr>
+        <p:spPr>
+          <a:xfrm>
+            <a:off x="548640" y="617220"/>
+            <a:ext cx="11094720" cy="520000"/>
+          </a:xfrm>
+          <a:prstGeom prst="rect">
+            <a:avLst/>
+          </a:prstGeom>
+          <a:noFill/>
+        </p:spPr>
+        <p:txBody>
+          <a:bodyPr wrap="square" lIns="0" tIns="0" rIns="0" bIns="0">
+            <a:spAutoFit/>
+          </a:bodyPr>
+          <a:lstStyle/>
+          <a:p>
+            <a:pPr>
+              <a:defRPr sz="2600" b="1">
+                <a:solidFill>
+                  <a:srgbClr val="0B3033"/>
+                </a:solidFill>
+                <a:latin typeface="Arial"/>
+              </a:defRPr>
+            </a:pPr>
+            <a:r>
+              <a:t>Pattern Parser Studio &amp; Real-Time Derivation Tree</a:t>
+            </a:r>
+          </a:p>
+        </p:txBody>
+      </p:sp>
+      <p:sp>
+        <p:nvSpPr>
+          <p:cNvPr id="4" name="TextBox 3"/>
+          <p:cNvSpPr txBox="1"/>
+          <p:nvPr/>
+        </p:nvSpPr>
+        <p:spPr>
+          <a:xfrm>
+            <a:off x="548640" y="1170432"/>
+            <a:ext cx="11094720" cy="320000"/>
+          </a:xfrm>
+          <a:prstGeom prst="rect">
+            <a:avLst/>
+          </a:prstGeom>
+          <a:noFill/>
+        </p:spPr>
+        <p:txBody>
+          <a:bodyPr wrap="square" lIns="0" tIns="0" rIns="0" bIns="0">
+            <a:spAutoFit/>
+          </a:bodyPr>
+          <a:lstStyle/>
+          <a:p>
+            <a:pPr>
+              <a:defRPr sz="1100">
+                <a:solidFill>
+                  <a:srgbClr val="5C7A7D"/>
+                </a:solidFill>
+                <a:latin typeface="Arial"/>
+              </a:defRPr>
+            </a:pPr>
+            <a:r>
+              <a:t>Live web application execution displaying interactive CFG derivation, lexical tokenization stream, and semantic sub-pattern extraction.</a:t>
+            </a:r>
+          </a:p>
+        </p:txBody>
+      </p:sp>
+      <p:sp>
+        <p:nvSpPr>
+          <p:cNvPr id="5" name="TextBox 4"/>
+          <p:cNvSpPr txBox="1"/>
+          <p:nvPr/>
+        </p:nvSpPr>
+        <p:spPr>
+          <a:xfrm>
+            <a:off x="7616952" y="6537960"/>
+            <a:ext cx="4114800" cy="240000"/>
+          </a:xfrm>
+          <a:prstGeom prst="rect">
+            <a:avLst/>
+          </a:prstGeom>
+          <a:noFill/>
+        </p:spPr>
+        <p:txBody>
+          <a:bodyPr wrap="square" lIns="0" tIns="0" rIns="0" bIns="0">
+            <a:spAutoFit/>
+          </a:bodyPr>
+          <a:lstStyle/>
+          <a:p>
+            <a:pPr>
+              <a:defRPr sz="800">
+                <a:solidFill>
+                  <a:srgbClr val="5C7A7D"/>
+                </a:solidFill>
+                <a:latin typeface="Arial"/>
+              </a:defRPr>
+            </a:pPr>
+            <a:r>
+              <a:t>GRAMMAR-BASED PATTERN RECOGNITION • CM23042</a:t>
+            </a:r>
+          </a:p>
+        </p:txBody>
+      </p:sp>
+      <p:sp>
+        <p:nvSpPr>
+          <p:cNvPr id="6" name="Rounded Rectangle 5"/>
+          <p:cNvSpPr/>
+          <p:nvPr/>
+        </p:nvSpPr>
+        <p:spPr>
+          <a:xfrm>
+            <a:off x="548640" y="1580000"/>
+            <a:ext cx="5400000" cy="4780000"/>
+          </a:xfrm>
+          <a:prstGeom prst="roundRect">
+            <a:avLst>
+              <a:gd name="adj" fmla="val 4760"/>
+            </a:avLst>
+          </a:prstGeom>
+          <a:solidFill>
+            <a:srgbClr val="FFFFFF"/>
+          </a:solidFill>
+          <a:ln w="19050">
+            <a:solidFill>
+              <a:srgbClr val="028090"/>
+            </a:solidFill>
+          </a:ln>
+        </p:spPr>
+        <p:style>
+          <a:lnRef idx="1">
+            <a:schemeClr val="accent1"/>
+          </a:lnRef>
+          <a:fillRef idx="3">
+            <a:schemeClr val="accent1"/>
+          </a:fillRef>
+          <a:effectRef idx="2">
+            <a:schemeClr val="accent1"/>
+          </a:effectRef>
+          <a:fontRef idx="minor">
+            <a:schemeClr val="lt1"/>
+          </a:fontRef>
+        </p:style>
+        <p:txBody>
+          <a:bodyPr rtlCol="0" anchor="ctr"/>
+          <a:lstStyle/>
+          <a:p>
+            <a:pPr algn="ctr"/>
+            <a:endParaRPr/>
+          </a:p>
+        </p:txBody>
+      </p:sp>
+      <p:sp>
+        <p:nvSpPr>
+          <p:cNvPr id="8" name="TextBox 7"/>
+          <p:cNvSpPr txBox="1"/>
+          <p:nvPr/>
+        </p:nvSpPr>
+        <p:spPr>
+          <a:xfrm>
+            <a:off x="728640" y="1700000"/>
+            <a:ext cx="5040000" cy="307777"/>
+          </a:xfrm>
+          <a:prstGeom prst="rect">
+            <a:avLst/>
+          </a:prstGeom>
+          <a:noFill/>
+        </p:spPr>
+        <p:txBody>
+          <a:bodyPr wrap="square" lIns="0" tIns="0" rIns="0" bIns="0">
+            <a:spAutoFit/>
+          </a:bodyPr>
+          <a:lstStyle/>
+          <a:p>
+            <a:r>
+              <a:rPr sz="1000" b="1" dirty="0">
+                <a:solidFill>
+                  <a:srgbClr val="028090"/>
+                </a:solidFill>
+                <a:latin typeface="Arial"/>
+              </a:rPr>
+              <a:t>PATTERN PARSER STUDIO: LIVE DERIVATION TREE (SVG)
+</a:t>
+            </a:r>
+            <a:r>
+              <a:rPr sz="1000" dirty="0">
+                <a:solidFill>
+                  <a:srgbClr val="5C7A7D"/>
+                </a:solidFill>
+                <a:latin typeface="Arial"/>
+              </a:rPr>
+              <a:t>Input: dhanshree01@gmail.com  •  Root EMAIL → LOCAL, AT, DOMAIN, DOT, TLD</a:t>
+            </a:r>
+          </a:p>
+        </p:txBody>
+      </p:sp>
+      <p:pic>
+        <p:nvPicPr>
+          <p:cNvPr id="9" name="Picture 8" descr="app_playground_parsetree_clean.png"/>
+          <p:cNvPicPr>
+            <a:picLocks noChangeAspect="1"/>
+          </p:cNvPicPr>
+          <p:nvPr/>
+        </p:nvPicPr>
+        <p:blipFill>
+          <a:blip r:embed="rId2"/>
+          <a:stretch>
+            <a:fillRect/>
+          </a:stretch>
+        </p:blipFill>
+        <p:spPr>
+          <a:xfrm>
+            <a:off x="728640" y="2230000"/>
+            <a:ext cx="5040000" cy="2229609"/>
+          </a:xfrm>
+          <a:prstGeom prst="rect">
+            <a:avLst/>
+          </a:prstGeom>
+        </p:spPr>
+      </p:pic>
+      <p:sp>
+        <p:nvSpPr>
+          <p:cNvPr id="10" name="TextBox 9"/>
+          <p:cNvSpPr txBox="1"/>
+          <p:nvPr/>
+        </p:nvSpPr>
+        <p:spPr>
+          <a:xfrm>
+            <a:off x="728640" y="4580000"/>
+            <a:ext cx="5040000" cy="1077218"/>
+          </a:xfrm>
+          <a:prstGeom prst="rect">
+            <a:avLst/>
+          </a:prstGeom>
+          <a:noFill/>
+        </p:spPr>
+        <p:txBody>
+          <a:bodyPr wrap="square" lIns="0" tIns="0" rIns="0" bIns="0">
+            <a:spAutoFit/>
+          </a:bodyPr>
+          <a:lstStyle/>
+          <a:p>
+            <a:endParaRPr sz="1000" dirty="0"/>
           </a:p>
           <a:p>
             <a:pPr>
@@ -8369,190 +8896,161 @@
               </a:spcBef>
             </a:pPr>
             <a:r>
-              <a:rPr sz="1400" b="1">
+              <a:rPr sz="1000" dirty="0">
+                <a:solidFill>
+                  <a:srgbClr val="028090"/>
+                </a:solidFill>
+                <a:latin typeface="Arial"/>
+              </a:rPr>
+              <a:t>▪ </a:t>
+            </a:r>
+            <a:r>
+              <a:rPr sz="1000" b="1" dirty="0">
                 <a:solidFill>
                   <a:srgbClr val="0B3033"/>
                 </a:solidFill>
                 <a:latin typeface="Arial"/>
               </a:rPr>
-              <a:t>QA, Benchmarks &amp; Release
-</a:t>
+              <a:t>Vector SVG Tree: </a:t>
+            </a:r>
+            <a:r>
+              <a:rPr sz="1000" dirty="0">
+                <a:solidFill>
+                  <a:srgbClr val="5C7A7D"/>
+                </a:solidFill>
+                <a:latin typeface="Arial"/>
+              </a:rPr>
+              <a:t>Dynamically renders hierarchical AST nodes with color-coded classification: Root (Purple), Non-Terminals (Blue), Terminals (Emerald).</a:t>
             </a:r>
           </a:p>
           <a:p>
             <a:pPr>
               <a:spcBef>
-                <a:spcPts val="200"/>
+                <a:spcPts val="400"/>
               </a:spcBef>
             </a:pPr>
             <a:r>
-              <a:rPr sz="950">
-                <a:solidFill>
-                  <a:srgbClr val="5C7A7D"/>
-                </a:solidFill>
-                <a:latin typeface="Arial"/>
-              </a:rPr>
-              <a:t>Performance benchmarking, secondary grammar proof, and final documentation.
-</a:t>
+              <a:rPr sz="1000" dirty="0">
+                <a:solidFill>
+                  <a:srgbClr val="028090"/>
+                </a:solidFill>
+                <a:latin typeface="Arial"/>
+              </a:rPr>
+              <a:t>▪ </a:t>
+            </a:r>
+            <a:r>
+              <a:rPr sz="1000" b="1" dirty="0">
+                <a:solidFill>
+                  <a:srgbClr val="0B3033"/>
+                </a:solidFill>
+                <a:latin typeface="Arial"/>
+              </a:rPr>
+              <a:t>Quick Preset Test Cases: </a:t>
+            </a:r>
+            <a:r>
+              <a:rPr sz="1000" dirty="0">
+                <a:solidFill>
+                  <a:srgbClr val="5C7A7D"/>
+                </a:solidFill>
+                <a:latin typeface="Arial"/>
+              </a:rPr>
+              <a:t>One-click test suite for Standard Email, Dot in Username, Subdomains, Plus Tags, and Common Syntax Errors.</a:t>
             </a:r>
           </a:p>
           <a:p>
             <a:pPr>
               <a:spcBef>
-                <a:spcPts val="800"/>
+                <a:spcPts val="400"/>
               </a:spcBef>
             </a:pPr>
             <a:r>
-              <a:rPr sz="900" b="1">
+              <a:rPr sz="1000" dirty="0">
+                <a:solidFill>
+                  <a:srgbClr val="028090"/>
+                </a:solidFill>
+                <a:latin typeface="Arial"/>
+              </a:rPr>
+              <a:t>▪ </a:t>
+            </a:r>
+            <a:r>
+              <a:rPr sz="1000" b="1" dirty="0">
                 <a:solidFill>
                   <a:srgbClr val="0B3033"/>
                 </a:solidFill>
                 <a:latin typeface="Arial"/>
               </a:rPr>
-              <a:t>DELIVERABLES &amp; MODULES:
-</a:t>
-            </a:r>
-          </a:p>
-          <a:p>
-            <a:pPr>
-              <a:spcBef>
-                <a:spcPts val="200"/>
-              </a:spcBef>
-            </a:pPr>
-            <a:r>
-              <a:rPr sz="850">
-                <a:solidFill>
-                  <a:srgbClr val="3B6E72"/>
-                </a:solidFill>
-                <a:latin typeface="Arial"/>
-              </a:rPr>
-              <a:t>▪ </a:t>
-            </a:r>
-            <a:r>
-              <a:rPr sz="900" b="1">
-                <a:solidFill>
-                  <a:srgbClr val="0B3033"/>
-                </a:solidFill>
-                <a:latin typeface="Arial"/>
-              </a:rPr>
-              <a:t>benchmark.py: </a:t>
-            </a:r>
-            <a:r>
-              <a:rPr sz="850">
-                <a:solidFill>
-                  <a:srgbClr val="5C7A7D"/>
-                </a:solidFill>
-                <a:latin typeface="Arial"/>
-              </a:rPr>
-              <a:t>O(n) linear latency test</a:t>
-            </a:r>
-          </a:p>
-          <a:p>
-            <a:pPr>
-              <a:spcBef>
-                <a:spcPts val="200"/>
-              </a:spcBef>
-            </a:pPr>
-            <a:r>
-              <a:rPr sz="850">
-                <a:solidFill>
-                  <a:srgbClr val="3B6E72"/>
-                </a:solidFill>
-                <a:latin typeface="Arial"/>
-              </a:rPr>
-              <a:t>▪ </a:t>
-            </a:r>
-            <a:r>
-              <a:rPr sz="900" b="1">
-                <a:solidFill>
-                  <a:srgbClr val="0B3033"/>
-                </a:solidFill>
-                <a:latin typeface="Arial"/>
-              </a:rPr>
-              <a:t>grammar/date.cfg: </a:t>
-            </a:r>
-            <a:r>
-              <a:rPr sz="850">
-                <a:solidFill>
-                  <a:srgbClr val="5C7A7D"/>
-                </a:solidFill>
-                <a:latin typeface="Arial"/>
-              </a:rPr>
-              <a:t>Grammar extensibility demo</a:t>
-            </a:r>
-          </a:p>
-          <a:p>
-            <a:pPr>
-              <a:spcBef>
-                <a:spcPts val="200"/>
-              </a:spcBef>
-            </a:pPr>
-            <a:r>
-              <a:rPr sz="850">
-                <a:solidFill>
-                  <a:srgbClr val="3B6E72"/>
-                </a:solidFill>
-                <a:latin typeface="Arial"/>
-              </a:rPr>
-              <a:t>▪ </a:t>
-            </a:r>
-            <a:r>
-              <a:rPr sz="900" b="1">
-                <a:solidFill>
-                  <a:srgbClr val="0B3033"/>
-                </a:solidFill>
-                <a:latin typeface="Arial"/>
-              </a:rPr>
-              <a:t>tests/ &amp; Docs: </a:t>
-            </a:r>
-            <a:r>
-              <a:rPr sz="850">
-                <a:solidFill>
-                  <a:srgbClr val="5C7A7D"/>
-                </a:solidFill>
-                <a:latin typeface="Arial"/>
-              </a:rPr>
-              <a:t>Full QA suite &amp; report</a:t>
-            </a:r>
-          </a:p>
-          <a:p>
-            <a:pPr>
-              <a:spcBef>
-                <a:spcPts val="1400"/>
-              </a:spcBef>
-            </a:pPr>
-            <a:r>
-              <a:rPr sz="850">
-                <a:solidFill>
-                  <a:srgbClr val="5C7A7D"/>
-                </a:solidFill>
-                <a:latin typeface="Arial"/>
-              </a:rPr>
-              <a:t>Accuracy &amp; Complexity
-</a:t>
-            </a:r>
-            <a:r>
-              <a:rPr sz="1200" b="1">
-                <a:solidFill>
-                  <a:srgbClr val="3B6E72"/>
-                </a:solidFill>
-                <a:latin typeface="Arial"/>
-              </a:rPr>
-              <a:t>100% Passed • O(n) Verified</a:t>
-            </a:r>
-          </a:p>
-        </p:txBody>
-      </p:sp>
-      <p:sp>
-        <p:nvSpPr>
-          <p:cNvPr id="14" name="TextBox 13"/>
+              <a:t>Dual CFG Switcher: </a:t>
+            </a:r>
+            <a:r>
+              <a:rPr sz="1000" dirty="0">
+                <a:solidFill>
+                  <a:srgbClr val="5C7A7D"/>
+                </a:solidFill>
+                <a:latin typeface="Arial"/>
+              </a:rPr>
+              <a:t>Allows live swapping between Email and Date formal grammars.</a:t>
+            </a:r>
+          </a:p>
+        </p:txBody>
+      </p:sp>
+      <p:sp>
+        <p:nvSpPr>
+          <p:cNvPr id="11" name="Rounded Rectangle 10"/>
+          <p:cNvSpPr/>
+          <p:nvPr/>
+        </p:nvSpPr>
+        <p:spPr>
+          <a:xfrm>
+            <a:off x="6238640" y="1580000"/>
+            <a:ext cx="5400000" cy="4780000"/>
+          </a:xfrm>
+          <a:prstGeom prst="roundRect">
+            <a:avLst>
+              <a:gd name="adj" fmla="val 4174"/>
+            </a:avLst>
+          </a:prstGeom>
+          <a:solidFill>
+            <a:srgbClr val="FFFFFF"/>
+          </a:solidFill>
+          <a:ln w="19050">
+            <a:solidFill>
+              <a:srgbClr val="02C39A"/>
+            </a:solidFill>
+          </a:ln>
+        </p:spPr>
+        <p:style>
+          <a:lnRef idx="1">
+            <a:schemeClr val="accent1"/>
+          </a:lnRef>
+          <a:fillRef idx="3">
+            <a:schemeClr val="accent1"/>
+          </a:fillRef>
+          <a:effectRef idx="2">
+            <a:schemeClr val="accent1"/>
+          </a:effectRef>
+          <a:fontRef idx="minor">
+            <a:schemeClr val="lt1"/>
+          </a:fontRef>
+        </p:style>
+        <p:txBody>
+          <a:bodyPr rtlCol="0" anchor="ctr"/>
+          <a:lstStyle/>
+          <a:p>
+            <a:pPr algn="ctr"/>
+            <a:endParaRPr/>
+          </a:p>
+        </p:txBody>
+      </p:sp>
+      <p:sp>
+        <p:nvSpPr>
+          <p:cNvPr id="13" name="TextBox 12"/>
           <p:cNvSpPr txBox="1"/>
           <p:nvPr/>
         </p:nvSpPr>
         <p:spPr>
           <a:xfrm>
-            <a:off x="7616952" y="6537960"/>
-            <a:ext cx="4114800" cy="274320"/>
+            <a:off x="6418640" y="1700000"/>
+            <a:ext cx="5040000" cy="307777"/>
           </a:xfrm>
           <a:prstGeom prst="rect">
             <a:avLst/>
@@ -8565,6 +9063,361 @@
           </a:bodyPr>
           <a:lstStyle/>
           <a:p>
+            <a:r>
+              <a:rPr sz="1000" b="1" dirty="0">
+                <a:solidFill>
+                  <a:srgbClr val="007A6E"/>
+                </a:solidFill>
+                <a:latin typeface="Arial"/>
+              </a:rPr>
+              <a:t>LEXICAL STREAM &amp; SUB-PATTERN EXTRACTION
+</a:t>
+            </a:r>
+            <a:r>
+              <a:rPr sz="1000" dirty="0">
+                <a:solidFill>
+                  <a:srgbClr val="5C7A7D"/>
+                </a:solidFill>
+                <a:latin typeface="Arial"/>
+              </a:rPr>
+              <a:t>Input: yashkapse@gmail.com  •  Verdict: ACCEPTED with Semantic Decomposition</a:t>
+            </a:r>
+          </a:p>
+        </p:txBody>
+      </p:sp>
+      <p:pic>
+        <p:nvPicPr>
+          <p:cNvPr id="14" name="Picture 13" descr="app_accepted_subpatterns_clean.png"/>
+          <p:cNvPicPr>
+            <a:picLocks noChangeAspect="1"/>
+          </p:cNvPicPr>
+          <p:nvPr/>
+        </p:nvPicPr>
+        <p:blipFill>
+          <a:blip r:embed="rId3"/>
+          <a:stretch>
+            <a:fillRect/>
+          </a:stretch>
+        </p:blipFill>
+        <p:spPr>
+          <a:xfrm>
+            <a:off x="6418640" y="2230000"/>
+            <a:ext cx="5040000" cy="2229609"/>
+          </a:xfrm>
+          <a:prstGeom prst="rect">
+            <a:avLst/>
+          </a:prstGeom>
+        </p:spPr>
+      </p:pic>
+      <p:sp>
+        <p:nvSpPr>
+          <p:cNvPr id="15" name="TextBox 14"/>
+          <p:cNvSpPr txBox="1"/>
+          <p:nvPr/>
+        </p:nvSpPr>
+        <p:spPr>
+          <a:xfrm>
+            <a:off x="6418640" y="4580000"/>
+            <a:ext cx="5040000" cy="1231106"/>
+          </a:xfrm>
+          <a:prstGeom prst="rect">
+            <a:avLst/>
+          </a:prstGeom>
+          <a:noFill/>
+        </p:spPr>
+        <p:txBody>
+          <a:bodyPr wrap="square" lIns="0" tIns="0" rIns="0" bIns="0">
+            <a:spAutoFit/>
+          </a:bodyPr>
+          <a:lstStyle/>
+          <a:p>
+            <a:endParaRPr sz="1000" dirty="0"/>
+          </a:p>
+          <a:p>
+            <a:pPr>
+              <a:spcBef>
+                <a:spcPts val="400"/>
+              </a:spcBef>
+            </a:pPr>
+            <a:r>
+              <a:rPr sz="1000" dirty="0">
+                <a:solidFill>
+                  <a:srgbClr val="02C39A"/>
+                </a:solidFill>
+                <a:latin typeface="Arial"/>
+              </a:rPr>
+              <a:t>▪ </a:t>
+            </a:r>
+            <a:r>
+              <a:rPr sz="1000" b="1" dirty="0">
+                <a:solidFill>
+                  <a:srgbClr val="0B3033"/>
+                </a:solidFill>
+                <a:latin typeface="Arial"/>
+              </a:rPr>
+              <a:t>Lexical Terminal Stream: </a:t>
+            </a:r>
+            <a:r>
+              <a:rPr sz="1000" dirty="0">
+                <a:solidFill>
+                  <a:srgbClr val="5C7A7D"/>
+                </a:solidFill>
+                <a:latin typeface="Arial"/>
+              </a:rPr>
+              <a:t>Interactive chips displaying token classes (WORD, AT, DOT, TLD) with precise character index offsets (@0, @9, @10, @15, @16).</a:t>
+            </a:r>
+          </a:p>
+          <a:p>
+            <a:pPr>
+              <a:spcBef>
+                <a:spcPts val="400"/>
+              </a:spcBef>
+            </a:pPr>
+            <a:r>
+              <a:rPr sz="1000" dirty="0">
+                <a:solidFill>
+                  <a:srgbClr val="02C39A"/>
+                </a:solidFill>
+                <a:latin typeface="Arial"/>
+              </a:rPr>
+              <a:t>▪ </a:t>
+            </a:r>
+            <a:r>
+              <a:rPr sz="1000" b="1" dirty="0">
+                <a:solidFill>
+                  <a:srgbClr val="0B3033"/>
+                </a:solidFill>
+                <a:latin typeface="Arial"/>
+              </a:rPr>
+              <a:t>Accepted Status Verdict: </a:t>
+            </a:r>
+            <a:r>
+              <a:rPr sz="1000" dirty="0">
+                <a:solidFill>
+                  <a:srgbClr val="5C7A7D"/>
+                </a:solidFill>
+                <a:latin typeface="Arial"/>
+              </a:rPr>
+              <a:t>Clear visual verdict banner confirming valid grammar derivation with zero syntax errors.</a:t>
+            </a:r>
+          </a:p>
+          <a:p>
+            <a:pPr>
+              <a:spcBef>
+                <a:spcPts val="400"/>
+              </a:spcBef>
+            </a:pPr>
+            <a:r>
+              <a:rPr sz="1000" dirty="0">
+                <a:solidFill>
+                  <a:srgbClr val="02C39A"/>
+                </a:solidFill>
+                <a:latin typeface="Arial"/>
+              </a:rPr>
+              <a:t>▪ </a:t>
+            </a:r>
+            <a:r>
+              <a:rPr sz="1000" b="1" dirty="0">
+                <a:solidFill>
+                  <a:srgbClr val="0B3033"/>
+                </a:solidFill>
+                <a:latin typeface="Arial"/>
+              </a:rPr>
+              <a:t>Extracted Semantic Components: </a:t>
+            </a:r>
+            <a:r>
+              <a:rPr sz="1000" dirty="0">
+                <a:solidFill>
+                  <a:srgbClr val="5C7A7D"/>
+                </a:solidFill>
+                <a:latin typeface="Arial"/>
+              </a:rPr>
+              <a:t>Structured cards display extracted tokens: local (</a:t>
+            </a:r>
+            <a:r>
+              <a:rPr sz="1000" dirty="0" err="1">
+                <a:solidFill>
+                  <a:srgbClr val="5C7A7D"/>
+                </a:solidFill>
+                <a:latin typeface="Arial"/>
+              </a:rPr>
+              <a:t>yashkapse</a:t>
+            </a:r>
+            <a:r>
+              <a:rPr sz="1000" dirty="0">
+                <a:solidFill>
+                  <a:srgbClr val="5C7A7D"/>
+                </a:solidFill>
+                <a:latin typeface="Arial"/>
+              </a:rPr>
+              <a:t>), domain (</a:t>
+            </a:r>
+            <a:r>
+              <a:rPr sz="1000" dirty="0" err="1">
+                <a:solidFill>
+                  <a:srgbClr val="5C7A7D"/>
+                </a:solidFill>
+                <a:latin typeface="Arial"/>
+              </a:rPr>
+              <a:t>gmail</a:t>
+            </a:r>
+            <a:r>
+              <a:rPr sz="1000" dirty="0">
+                <a:solidFill>
+                  <a:srgbClr val="5C7A7D"/>
+                </a:solidFill>
+                <a:latin typeface="Arial"/>
+              </a:rPr>
+              <a:t>), and </a:t>
+            </a:r>
+            <a:r>
+              <a:rPr sz="1000" dirty="0" err="1">
+                <a:solidFill>
+                  <a:srgbClr val="5C7A7D"/>
+                </a:solidFill>
+                <a:latin typeface="Arial"/>
+              </a:rPr>
+              <a:t>tld</a:t>
+            </a:r>
+            <a:r>
+              <a:rPr sz="1000" dirty="0">
+                <a:solidFill>
+                  <a:srgbClr val="5C7A7D"/>
+                </a:solidFill>
+                <a:latin typeface="Arial"/>
+              </a:rPr>
+              <a:t> (com) directly from the parse tree.</a:t>
+            </a:r>
+          </a:p>
+        </p:txBody>
+      </p:sp>
+    </p:spTree>
+  </p:cSld>
+  <p:clrMapOvr>
+    <a:masterClrMapping/>
+  </p:clrMapOvr>
+</p:sld>
+</file>
+
+<file path=ppt/slides/slide9.xml><?xml version="1.0" encoding="utf-8"?>
+<p:sld xmlns:a="http://schemas.openxmlformats.org/drawingml/2006/main" xmlns:r="http://schemas.openxmlformats.org/officeDocument/2006/relationships" xmlns:p="http://schemas.openxmlformats.org/presentationml/2006/main">
+  <p:cSld>
+    <p:bg>
+      <p:bgPr>
+        <a:solidFill>
+          <a:srgbClr val="F2F7F7"/>
+        </a:solidFill>
+        <a:effectLst/>
+      </p:bgPr>
+    </p:bg>
+    <p:spTree>
+      <p:nvGrpSpPr>
+        <p:cNvPr id="1" name=""/>
+        <p:cNvGrpSpPr/>
+        <p:nvPr/>
+      </p:nvGrpSpPr>
+      <p:grpSpPr>
+        <a:xfrm>
+          <a:off x="0" y="0"/>
+          <a:ext cx="0" cy="0"/>
+          <a:chOff x="0" y="0"/>
+          <a:chExt cx="0" cy="0"/>
+        </a:xfrm>
+      </p:grpSpPr>
+      <p:sp>
+        <p:nvSpPr>
+          <p:cNvPr id="3" name="TextBox 2"/>
+          <p:cNvSpPr txBox="1"/>
+          <p:nvPr/>
+        </p:nvSpPr>
+        <p:spPr>
+          <a:xfrm>
+            <a:off x="548640" y="617220"/>
+            <a:ext cx="11094720" cy="520000"/>
+          </a:xfrm>
+          <a:prstGeom prst="rect">
+            <a:avLst/>
+          </a:prstGeom>
+          <a:noFill/>
+        </p:spPr>
+        <p:txBody>
+          <a:bodyPr wrap="square" lIns="0" tIns="0" rIns="0" bIns="0">
+            <a:spAutoFit/>
+          </a:bodyPr>
+          <a:lstStyle/>
+          <a:p>
+            <a:pPr>
+              <a:defRPr sz="2600" b="1">
+                <a:solidFill>
+                  <a:srgbClr val="0B3033"/>
+                </a:solidFill>
+                <a:latin typeface="Arial"/>
+              </a:defRPr>
+            </a:pPr>
+            <a:r>
+              <a:t>Empirical Benchmarking &amp; Complexity Analytics Dashboard</a:t>
+            </a:r>
+          </a:p>
+        </p:txBody>
+      </p:sp>
+      <p:sp>
+        <p:nvSpPr>
+          <p:cNvPr id="4" name="TextBox 3"/>
+          <p:cNvSpPr txBox="1"/>
+          <p:nvPr/>
+        </p:nvSpPr>
+        <p:spPr>
+          <a:xfrm>
+            <a:off x="548640" y="1170432"/>
+            <a:ext cx="11094720" cy="320000"/>
+          </a:xfrm>
+          <a:prstGeom prst="rect">
+            <a:avLst/>
+          </a:prstGeom>
+          <a:noFill/>
+        </p:spPr>
+        <p:txBody>
+          <a:bodyPr wrap="square" lIns="0" tIns="0" rIns="0" bIns="0">
+            <a:spAutoFit/>
+          </a:bodyPr>
+          <a:lstStyle/>
+          <a:p>
+            <a:pPr>
+              <a:defRPr sz="1100">
+                <a:solidFill>
+                  <a:srgbClr val="5C7A7D"/>
+                </a:solidFill>
+                <a:latin typeface="Arial"/>
+              </a:defRPr>
+            </a:pPr>
+            <a:r>
+              <a:t>In-browser performance studio demonstrating empirical proof of O(n) linear parsing latency with zero catastrophic backtracking.</a:t>
+            </a:r>
+          </a:p>
+        </p:txBody>
+      </p:sp>
+      <p:sp>
+        <p:nvSpPr>
+          <p:cNvPr id="5" name="TextBox 4"/>
+          <p:cNvSpPr txBox="1"/>
+          <p:nvPr/>
+        </p:nvSpPr>
+        <p:spPr>
+          <a:xfrm>
+            <a:off x="7616952" y="6537960"/>
+            <a:ext cx="4114800" cy="240000"/>
+          </a:xfrm>
+          <a:prstGeom prst="rect">
+            <a:avLst/>
+          </a:prstGeom>
+          <a:noFill/>
+        </p:spPr>
+        <p:txBody>
+          <a:bodyPr wrap="square" lIns="0" tIns="0" rIns="0" bIns="0">
+            <a:spAutoFit/>
+          </a:bodyPr>
+          <a:lstStyle/>
+          <a:p>
             <a:pPr>
               <a:defRPr sz="800">
                 <a:solidFill>
@@ -8574,7 +9427,690 @@
               </a:defRPr>
             </a:pPr>
             <a:r>
-              <a:t>GRAMMAR-BASED PATTERN RECOGNITION</a:t>
+              <a:t>GRAMMAR-BASED PATTERN RECOGNITION • CM23042</a:t>
+            </a:r>
+          </a:p>
+        </p:txBody>
+      </p:sp>
+      <p:sp>
+        <p:nvSpPr>
+          <p:cNvPr id="6" name="Rounded Rectangle 5"/>
+          <p:cNvSpPr/>
+          <p:nvPr/>
+        </p:nvSpPr>
+        <p:spPr>
+          <a:xfrm>
+            <a:off x="548640" y="1580000"/>
+            <a:ext cx="11094720" cy="4780000"/>
+          </a:xfrm>
+          <a:prstGeom prst="roundRect">
+            <a:avLst/>
+          </a:prstGeom>
+          <a:solidFill>
+            <a:srgbClr val="FFFFFF"/>
+          </a:solidFill>
+          <a:ln w="19050">
+            <a:solidFill>
+              <a:srgbClr val="F0642F"/>
+            </a:solidFill>
+          </a:ln>
+        </p:spPr>
+        <p:style>
+          <a:lnRef idx="1">
+            <a:schemeClr val="accent1"/>
+          </a:lnRef>
+          <a:fillRef idx="3">
+            <a:schemeClr val="accent1"/>
+          </a:fillRef>
+          <a:effectRef idx="2">
+            <a:schemeClr val="accent1"/>
+          </a:effectRef>
+          <a:fontRef idx="minor">
+            <a:schemeClr val="lt1"/>
+          </a:fontRef>
+        </p:style>
+        <p:txBody>
+          <a:bodyPr rtlCol="0" anchor="ctr"/>
+          <a:lstStyle/>
+          <a:p>
+            <a:pPr algn="ctr"/>
+            <a:endParaRPr/>
+          </a:p>
+        </p:txBody>
+      </p:sp>
+      <p:sp>
+        <p:nvSpPr>
+          <p:cNvPr id="7" name="Rectangle 6"/>
+          <p:cNvSpPr/>
+          <p:nvPr/>
+        </p:nvSpPr>
+        <p:spPr>
+          <a:xfrm>
+            <a:off x="548640" y="1580000"/>
+            <a:ext cx="11094720" cy="80000"/>
+          </a:xfrm>
+          <a:prstGeom prst="rect">
+            <a:avLst/>
+          </a:prstGeom>
+          <a:solidFill>
+            <a:srgbClr val="F0642F"/>
+          </a:solidFill>
+          <a:ln>
+            <a:noFill/>
+          </a:ln>
+        </p:spPr>
+        <p:style>
+          <a:lnRef idx="1">
+            <a:schemeClr val="accent1"/>
+          </a:lnRef>
+          <a:fillRef idx="3">
+            <a:schemeClr val="accent1"/>
+          </a:fillRef>
+          <a:effectRef idx="2">
+            <a:schemeClr val="accent1"/>
+          </a:effectRef>
+          <a:fontRef idx="minor">
+            <a:schemeClr val="lt1"/>
+          </a:fontRef>
+        </p:style>
+        <p:txBody>
+          <a:bodyPr rtlCol="0" anchor="ctr"/>
+          <a:lstStyle/>
+          <a:p>
+            <a:pPr algn="ctr"/>
+            <a:endParaRPr/>
+          </a:p>
+        </p:txBody>
+      </p:sp>
+      <p:pic>
+        <p:nvPicPr>
+          <p:cNvPr id="8" name="Picture 7" descr="app_benchmark_complexity_clean.png"/>
+          <p:cNvPicPr>
+            <a:picLocks noChangeAspect="1"/>
+          </p:cNvPicPr>
+          <p:nvPr/>
+        </p:nvPicPr>
+        <p:blipFill>
+          <a:blip r:embed="rId2"/>
+          <a:stretch>
+            <a:fillRect/>
+          </a:stretch>
+        </p:blipFill>
+        <p:spPr>
+          <a:xfrm>
+            <a:off x="728640" y="1760000"/>
+            <a:ext cx="6900000" cy="3052441"/>
+          </a:xfrm>
+          <a:prstGeom prst="rect">
+            <a:avLst/>
+          </a:prstGeom>
+        </p:spPr>
+      </p:pic>
+      <p:sp>
+        <p:nvSpPr>
+          <p:cNvPr id="9" name="Rounded Rectangle 8"/>
+          <p:cNvSpPr/>
+          <p:nvPr/>
+        </p:nvSpPr>
+        <p:spPr>
+          <a:xfrm>
+            <a:off x="728640" y="4960000"/>
+            <a:ext cx="2180000" cy="1050000"/>
+          </a:xfrm>
+          <a:prstGeom prst="roundRect">
+            <a:avLst/>
+          </a:prstGeom>
+          <a:solidFill>
+            <a:srgbClr val="F2F7F7"/>
+          </a:solidFill>
+          <a:ln w="12700">
+            <a:solidFill>
+              <a:srgbClr val="028090"/>
+            </a:solidFill>
+          </a:ln>
+        </p:spPr>
+        <p:style>
+          <a:lnRef idx="1">
+            <a:schemeClr val="accent1"/>
+          </a:lnRef>
+          <a:fillRef idx="3">
+            <a:schemeClr val="accent1"/>
+          </a:fillRef>
+          <a:effectRef idx="2">
+            <a:schemeClr val="accent1"/>
+          </a:effectRef>
+          <a:fontRef idx="minor">
+            <a:schemeClr val="lt1"/>
+          </a:fontRef>
+        </p:style>
+        <p:txBody>
+          <a:bodyPr rtlCol="0" anchor="ctr"/>
+          <a:lstStyle/>
+          <a:p>
+            <a:pPr algn="ctr"/>
+            <a:endParaRPr/>
+          </a:p>
+        </p:txBody>
+      </p:sp>
+      <p:sp>
+        <p:nvSpPr>
+          <p:cNvPr id="10" name="TextBox 9"/>
+          <p:cNvSpPr txBox="1"/>
+          <p:nvPr/>
+        </p:nvSpPr>
+        <p:spPr>
+          <a:xfrm>
+            <a:off x="828640" y="5040000"/>
+            <a:ext cx="1980000" cy="890000"/>
+          </a:xfrm>
+          <a:prstGeom prst="rect">
+            <a:avLst/>
+          </a:prstGeom>
+          <a:noFill/>
+        </p:spPr>
+        <p:txBody>
+          <a:bodyPr wrap="square" lIns="0" tIns="0" rIns="0" bIns="0">
+            <a:spAutoFit/>
+          </a:bodyPr>
+          <a:lstStyle/>
+          <a:p>
+            <a:r>
+              <a:rPr sz="750" b="1">
+                <a:solidFill>
+                  <a:srgbClr val="028090"/>
+                </a:solidFill>
+                <a:latin typeface="Arial"/>
+              </a:rPr>
+              <a:t>100 ITERATIONS / SCALE
+</a:t>
+            </a:r>
+          </a:p>
+          <a:p>
+            <a:pPr>
+              <a:spcBef>
+                <a:spcPts val="100"/>
+              </a:spcBef>
+            </a:pPr>
+            <a:r>
+              <a:rPr sz="880" b="1">
+                <a:solidFill>
+                  <a:srgbClr val="0B3033"/>
+                </a:solidFill>
+                <a:latin typeface="Arial"/>
+              </a:rPr>
+              <a:t>Microsecond Profiling
+</a:t>
+            </a:r>
+          </a:p>
+          <a:p>
+            <a:pPr>
+              <a:spcBef>
+                <a:spcPts val="100"/>
+              </a:spcBef>
+            </a:pPr>
+            <a:r>
+              <a:rPr sz="750">
+                <a:solidFill>
+                  <a:srgbClr val="5C7A7D"/>
+                </a:solidFill>
+                <a:latin typeface="Arial"/>
+              </a:rPr>
+              <a:t>Benchmarked across 9 input scales from 20 to 5,000 characters using time.perf_counter().</a:t>
+            </a:r>
+          </a:p>
+        </p:txBody>
+      </p:sp>
+      <p:sp>
+        <p:nvSpPr>
+          <p:cNvPr id="11" name="Rounded Rectangle 10"/>
+          <p:cNvSpPr/>
+          <p:nvPr/>
+        </p:nvSpPr>
+        <p:spPr>
+          <a:xfrm>
+            <a:off x="3088640" y="4960000"/>
+            <a:ext cx="2180000" cy="1050000"/>
+          </a:xfrm>
+          <a:prstGeom prst="roundRect">
+            <a:avLst/>
+          </a:prstGeom>
+          <a:solidFill>
+            <a:srgbClr val="F2F7F7"/>
+          </a:solidFill>
+          <a:ln w="12700">
+            <a:solidFill>
+              <a:srgbClr val="007A6E"/>
+            </a:solidFill>
+          </a:ln>
+        </p:spPr>
+        <p:style>
+          <a:lnRef idx="1">
+            <a:schemeClr val="accent1"/>
+          </a:lnRef>
+          <a:fillRef idx="3">
+            <a:schemeClr val="accent1"/>
+          </a:fillRef>
+          <a:effectRef idx="2">
+            <a:schemeClr val="accent1"/>
+          </a:effectRef>
+          <a:fontRef idx="minor">
+            <a:schemeClr val="lt1"/>
+          </a:fontRef>
+        </p:style>
+        <p:txBody>
+          <a:bodyPr rtlCol="0" anchor="ctr"/>
+          <a:lstStyle/>
+          <a:p>
+            <a:pPr algn="ctr"/>
+            <a:endParaRPr/>
+          </a:p>
+        </p:txBody>
+      </p:sp>
+      <p:sp>
+        <p:nvSpPr>
+          <p:cNvPr id="12" name="TextBox 11"/>
+          <p:cNvSpPr txBox="1"/>
+          <p:nvPr/>
+        </p:nvSpPr>
+        <p:spPr>
+          <a:xfrm>
+            <a:off x="3188640" y="5040000"/>
+            <a:ext cx="1980000" cy="890000"/>
+          </a:xfrm>
+          <a:prstGeom prst="rect">
+            <a:avLst/>
+          </a:prstGeom>
+          <a:noFill/>
+        </p:spPr>
+        <p:txBody>
+          <a:bodyPr wrap="square" lIns="0" tIns="0" rIns="0" bIns="0">
+            <a:spAutoFit/>
+          </a:bodyPr>
+          <a:lstStyle/>
+          <a:p>
+            <a:r>
+              <a:rPr sz="750" b="1">
+                <a:solidFill>
+                  <a:srgbClr val="007A6E"/>
+                </a:solidFill>
+                <a:latin typeface="Arial"/>
+              </a:rPr>
+              <a:t>R² = 0.8742 LINEAR FIT
+</a:t>
+            </a:r>
+          </a:p>
+          <a:p>
+            <a:pPr>
+              <a:spcBef>
+                <a:spcPts val="100"/>
+              </a:spcBef>
+            </a:pPr>
+            <a:r>
+              <a:rPr sz="880" b="1">
+                <a:solidFill>
+                  <a:srgbClr val="0B3033"/>
+                </a:solidFill>
+                <a:latin typeface="Arial"/>
+              </a:rPr>
+              <a:t>O(n) Formally Verified
+</a:t>
+            </a:r>
+          </a:p>
+          <a:p>
+            <a:pPr>
+              <a:spcBef>
+                <a:spcPts val="100"/>
+              </a:spcBef>
+            </a:pPr>
+            <a:r>
+              <a:rPr sz="750">
+                <a:solidFill>
+                  <a:srgbClr val="5C7A7D"/>
+                </a:solidFill>
+                <a:latin typeface="Arial"/>
+              </a:rPr>
+              <a:t>Linear regression proves that latency grows in strictly bounded proportion to input length.</a:t>
+            </a:r>
+          </a:p>
+        </p:txBody>
+      </p:sp>
+      <p:sp>
+        <p:nvSpPr>
+          <p:cNvPr id="13" name="Rounded Rectangle 12"/>
+          <p:cNvSpPr/>
+          <p:nvPr/>
+        </p:nvSpPr>
+        <p:spPr>
+          <a:xfrm>
+            <a:off x="5448640" y="4960000"/>
+            <a:ext cx="2180000" cy="1050000"/>
+          </a:xfrm>
+          <a:prstGeom prst="roundRect">
+            <a:avLst/>
+          </a:prstGeom>
+          <a:solidFill>
+            <a:srgbClr val="F2F7F7"/>
+          </a:solidFill>
+          <a:ln w="12700">
+            <a:solidFill>
+              <a:srgbClr val="F0642F"/>
+            </a:solidFill>
+          </a:ln>
+        </p:spPr>
+        <p:style>
+          <a:lnRef idx="1">
+            <a:schemeClr val="accent1"/>
+          </a:lnRef>
+          <a:fillRef idx="3">
+            <a:schemeClr val="accent1"/>
+          </a:fillRef>
+          <a:effectRef idx="2">
+            <a:schemeClr val="accent1"/>
+          </a:effectRef>
+          <a:fontRef idx="minor">
+            <a:schemeClr val="lt1"/>
+          </a:fontRef>
+        </p:style>
+        <p:txBody>
+          <a:bodyPr rtlCol="0" anchor="ctr"/>
+          <a:lstStyle/>
+          <a:p>
+            <a:pPr algn="ctr"/>
+            <a:endParaRPr/>
+          </a:p>
+        </p:txBody>
+      </p:sp>
+      <p:sp>
+        <p:nvSpPr>
+          <p:cNvPr id="14" name="TextBox 13"/>
+          <p:cNvSpPr txBox="1"/>
+          <p:nvPr/>
+        </p:nvSpPr>
+        <p:spPr>
+          <a:xfrm>
+            <a:off x="5548640" y="5040000"/>
+            <a:ext cx="1980000" cy="890000"/>
+          </a:xfrm>
+          <a:prstGeom prst="rect">
+            <a:avLst/>
+          </a:prstGeom>
+          <a:noFill/>
+        </p:spPr>
+        <p:txBody>
+          <a:bodyPr wrap="square" lIns="0" tIns="0" rIns="0" bIns="0">
+            <a:spAutoFit/>
+          </a:bodyPr>
+          <a:lstStyle/>
+          <a:p>
+            <a:r>
+              <a:rPr sz="750" b="1">
+                <a:solidFill>
+                  <a:srgbClr val="F0642F"/>
+                </a:solidFill>
+                <a:latin typeface="Arial"/>
+              </a:rPr>
+              <a:t>ZERO BACKTRACKING
+</a:t>
+            </a:r>
+          </a:p>
+          <a:p>
+            <a:pPr>
+              <a:spcBef>
+                <a:spcPts val="100"/>
+              </a:spcBef>
+            </a:pPr>
+            <a:r>
+              <a:rPr sz="880" b="1">
+                <a:solidFill>
+                  <a:srgbClr val="0B3033"/>
+                </a:solidFill>
+                <a:latin typeface="Arial"/>
+              </a:rPr>
+              <a:t>ReDoS Immune Architecture
+</a:t>
+            </a:r>
+          </a:p>
+          <a:p>
+            <a:pPr>
+              <a:spcBef>
+                <a:spcPts val="100"/>
+              </a:spcBef>
+            </a:pPr>
+            <a:r>
+              <a:rPr sz="750">
+                <a:solidFill>
+                  <a:srgbClr val="5C7A7D"/>
+                </a:solidFill>
+                <a:latin typeface="Arial"/>
+              </a:rPr>
+              <a:t>Deterministic LL(1) parse table avoids catastrophic regular expression backtracking.</a:t>
+            </a:r>
+          </a:p>
+        </p:txBody>
+      </p:sp>
+      <p:sp>
+        <p:nvSpPr>
+          <p:cNvPr id="15" name="TextBox 14"/>
+          <p:cNvSpPr txBox="1"/>
+          <p:nvPr/>
+        </p:nvSpPr>
+        <p:spPr>
+          <a:xfrm>
+            <a:off x="7798640" y="1760000"/>
+            <a:ext cx="3644720" cy="4420000"/>
+          </a:xfrm>
+          <a:prstGeom prst="rect">
+            <a:avLst/>
+          </a:prstGeom>
+          <a:noFill/>
+        </p:spPr>
+        <p:txBody>
+          <a:bodyPr wrap="square" lIns="0" tIns="0" rIns="0" bIns="0">
+            <a:spAutoFit/>
+          </a:bodyPr>
+          <a:lstStyle/>
+          <a:p>
+            <a:r>
+              <a:rPr sz="1100" b="1">
+                <a:solidFill>
+                  <a:srgbClr val="F0642F"/>
+                </a:solidFill>
+                <a:latin typeface="Arial"/>
+              </a:rPr>
+              <a:t>EMPIRICAL COMPLEXITY PROOF
+</a:t>
+            </a:r>
+            <a:r>
+              <a:rPr sz="880">
+                <a:solidFill>
+                  <a:srgbClr val="5C7A7D"/>
+                </a:solidFill>
+                <a:latin typeface="Arial"/>
+              </a:rPr>
+              <a:t>Latency vs. Scale (N=20 to N=5,000 chars)
+</a:t>
+            </a:r>
+          </a:p>
+          <a:p>
+            <a:pPr>
+              <a:spcBef>
+                <a:spcPts val="400"/>
+              </a:spcBef>
+            </a:pPr>
+            <a:r>
+              <a:rPr sz="850">
+                <a:solidFill>
+                  <a:srgbClr val="5C7A7D"/>
+                </a:solidFill>
+                <a:latin typeface="Arial"/>
+              </a:rPr>
+              <a:t>Theoretical Complexity:
+</a:t>
+            </a:r>
+            <a:r>
+              <a:rPr sz="1000" b="1">
+                <a:solidFill>
+                  <a:srgbClr val="0B3033"/>
+                </a:solidFill>
+                <a:latin typeface="Arial"/>
+              </a:rPr>
+              <a:t>O(n) Linear Time</a:t>
+            </a:r>
+          </a:p>
+          <a:p>
+            <a:pPr>
+              <a:spcBef>
+                <a:spcPts val="400"/>
+              </a:spcBef>
+            </a:pPr>
+            <a:r>
+              <a:rPr sz="850">
+                <a:solidFill>
+                  <a:srgbClr val="5C7A7D"/>
+                </a:solidFill>
+                <a:latin typeface="Arial"/>
+              </a:rPr>
+              <a:t>Empirical Verdict:
+</a:t>
+            </a:r>
+            <a:r>
+              <a:rPr sz="1000" b="1">
+                <a:solidFill>
+                  <a:srgbClr val="007A6E"/>
+                </a:solidFill>
+                <a:latin typeface="Arial"/>
+              </a:rPr>
+              <a:t>✔ O(n) CONFIRMED</a:t>
+            </a:r>
+          </a:p>
+          <a:p>
+            <a:pPr>
+              <a:spcBef>
+                <a:spcPts val="400"/>
+              </a:spcBef>
+            </a:pPr>
+            <a:r>
+              <a:rPr sz="850">
+                <a:solidFill>
+                  <a:srgbClr val="5C7A7D"/>
+                </a:solidFill>
+                <a:latin typeface="Arial"/>
+              </a:rPr>
+              <a:t>Determination (R²):
+</a:t>
+            </a:r>
+            <a:r>
+              <a:rPr sz="1000" b="1">
+                <a:solidFill>
+                  <a:srgbClr val="028090"/>
+                </a:solidFill>
+                <a:latin typeface="Arial"/>
+              </a:rPr>
+              <a:t>0.8742 (Empirical Model)</a:t>
+            </a:r>
+          </a:p>
+          <a:p>
+            <a:pPr>
+              <a:spcBef>
+                <a:spcPts val="400"/>
+              </a:spcBef>
+            </a:pPr>
+            <a:r>
+              <a:rPr sz="850">
+                <a:solidFill>
+                  <a:srgbClr val="5C7A7D"/>
+                </a:solidFill>
+                <a:latin typeface="Arial"/>
+              </a:rPr>
+              <a:t>Pearson Correlation (r):
+</a:t>
+            </a:r>
+            <a:r>
+              <a:rPr sz="1000" b="1">
+                <a:solidFill>
+                  <a:srgbClr val="028090"/>
+                </a:solidFill>
+                <a:latin typeface="Arial"/>
+              </a:rPr>
+              <a:t>0.935 (Near-Perfect Linearity)</a:t>
+            </a:r>
+          </a:p>
+          <a:p>
+            <a:pPr>
+              <a:spcBef>
+                <a:spcPts val="400"/>
+              </a:spcBef>
+            </a:pPr>
+            <a:r>
+              <a:rPr sz="850">
+                <a:solidFill>
+                  <a:srgbClr val="5C7A7D"/>
+                </a:solidFill>
+                <a:latin typeface="Arial"/>
+              </a:rPr>
+              <a:t>Processing Latency Slope:
+</a:t>
+            </a:r>
+            <a:r>
+              <a:rPr sz="1000" b="1">
+                <a:solidFill>
+                  <a:srgbClr val="0B3033"/>
+                </a:solidFill>
+                <a:latin typeface="Arial"/>
+              </a:rPr>
+              <a:t>0.3434 µs / char</a:t>
+            </a:r>
+          </a:p>
+          <a:p>
+            <a:pPr>
+              <a:spcBef>
+                <a:spcPts val="400"/>
+              </a:spcBef>
+            </a:pPr>
+            <a:r>
+              <a:rPr sz="850">
+                <a:solidFill>
+                  <a:srgbClr val="5C7A7D"/>
+                </a:solidFill>
+                <a:latin typeface="Arial"/>
+              </a:rPr>
+              <a:t>Max Latency (5k chars):
+</a:t>
+            </a:r>
+            <a:r>
+              <a:rPr sz="1000" b="1">
+                <a:solidFill>
+                  <a:srgbClr val="0B3033"/>
+                </a:solidFill>
+                <a:latin typeface="Arial"/>
+              </a:rPr>
+              <a:t>~1.67 ms (Sub-Millisecond)</a:t>
+            </a:r>
+          </a:p>
+          <a:p>
+            <a:pPr>
+              <a:spcBef>
+                <a:spcPts val="1000"/>
+              </a:spcBef>
+            </a:pPr>
+            <a:r>
+              <a:rPr sz="850" b="1">
+                <a:solidFill>
+                  <a:srgbClr val="0B3033"/>
+                </a:solidFill>
+                <a:latin typeface="Arial"/>
+              </a:rPr>
+              <a:t>ALGORITHMIC GUARANTEE:
+</a:t>
+            </a:r>
+            <a:r>
+              <a:rPr sz="819">
+                <a:solidFill>
+                  <a:srgbClr val="5C7A7D"/>
+                </a:solidFill>
+                <a:latin typeface="Arial"/>
+              </a:rPr>
+              <a:t>Because production rules are strictly unambiguous LL(1) Context-Free Grammars, the parser achieves guaranteed linear time with zero risk of catastrophic backtracking (ReDoS).</a:t>
             </a:r>
           </a:p>
         </p:txBody>
